--- a/exports/pptx/lessons/middle-module-02-panchabhuta/day-03-five-qualities.pptx
+++ b/exports/pptx/lessons/middle-module-02-panchabhuta/day-03-five-qualities.pptx
@@ -5011,7 +5011,497 @@
         </p:nvSpPr>
         <p:spPr>
           <a:xfrm>
-            <a:off x="634901" y="2958554"/>
+            <a:off x="406301" y="1254323"/>
+            <a:ext cx="8498026" cy="213271"/>
+          </a:xfrm>
+          <a:prstGeom prst="rect">
+            <a:avLst/>
+          </a:prstGeom>
+          <a:noFill/>
+          <a:ln/>
+        </p:spPr>
+        <p:txBody>
+          <a:bodyPr wrap="square" lIns="0" tIns="0" rIns="0" bIns="0" rtlCol="0" anchor="t"/>
+          <a:lstStyle/>
+          <a:p>
+            <a:pPr algn="l" indent="0" marL="0">
+              <a:lnSpc>
+                <a:spcPts val="1680"/>
+              </a:lnSpc>
+              <a:spcBef>
+                <a:spcPts val="300"/>
+              </a:spcBef>
+              <a:spcAft>
+                <a:spcPts val="300"/>
+              </a:spcAft>
+              <a:buNone/>
+            </a:pPr>
+            <a:r>
+              <a:rPr lang="en-US" sz="1200" i="1" dirty="0">
+                <a:solidFill>
+                  <a:srgbClr val="1C2833"/>
+                </a:solidFill>
+                <a:latin typeface="Arial" pitchFamily="34" charset="0"/>
+                <a:ea typeface="Arial" pitchFamily="34" charset="-122"/>
+                <a:cs typeface="Arial" pitchFamily="34" charset="-120"/>
+              </a:rPr>
+              <a:t>Each row: Element · Tanmātra (quality) · Sense organ · Test it:.</a:t>
+            </a:r>
+            <a:endParaRPr lang="en-US" sz="1200" dirty="0"/>
+          </a:p>
+        </p:txBody>
+      </p:sp>
+      <p:sp>
+        <p:nvSpPr>
+          <p:cNvPr id="6" name="Text 4"/>
+          <p:cNvSpPr/>
+          <p:nvPr/>
+        </p:nvSpPr>
+        <p:spPr>
+          <a:xfrm>
+            <a:off x="634901" y="1556445"/>
+            <a:ext cx="8102798" cy="1257002"/>
+          </a:xfrm>
+          <a:prstGeom prst="rect">
+            <a:avLst/>
+          </a:prstGeom>
+          <a:noFill/>
+          <a:ln/>
+        </p:spPr>
+        <p:txBody>
+          <a:bodyPr wrap="square" lIns="0" tIns="0" rIns="0" bIns="0" rtlCol="0" anchor="t"/>
+          <a:lstStyle/>
+          <a:p>
+            <a:pPr algn="l" marL="342900" indent="-342900">
+              <a:lnSpc>
+                <a:spcPts val="1620"/>
+              </a:lnSpc>
+              <a:spcAft>
+                <a:spcPts val="300"/>
+              </a:spcAft>
+              <a:buSzPct val="100000"/>
+              <a:buChar char="•"/>
+            </a:pPr>
+            <a:r>
+              <a:rPr lang="en-US" sz="1200" i="1" dirty="0">
+                <a:solidFill>
+                  <a:srgbClr val="1C2833"/>
+                </a:solidFill>
+                <a:latin typeface="Arial" pitchFamily="34" charset="0"/>
+                <a:ea typeface="Arial" pitchFamily="34" charset="-122"/>
+                <a:cs typeface="Arial" pitchFamily="34" charset="-120"/>
+              </a:rPr>
+              <a:t>ākāśa</a:t>
+            </a:r>
+            <a:pPr algn="l" indent="0" marL="0">
+              <a:lnSpc>
+                <a:spcPts val="1620"/>
+              </a:lnSpc>
+              <a:spcAft>
+                <a:spcPts val="300"/>
+              </a:spcAft>
+              <a:buNone/>
+            </a:pPr>
+            <a:r>
+              <a:rPr lang="en-US" sz="1200" dirty="0">
+                <a:solidFill>
+                  <a:srgbClr val="1C2833"/>
+                </a:solidFill>
+                <a:latin typeface="Arial" pitchFamily="34" charset="0"/>
+                <a:ea typeface="Arial" pitchFamily="34" charset="-122"/>
+                <a:cs typeface="Arial" pitchFamily="34" charset="-120"/>
+              </a:rPr>
+              <a:t> (space) — </a:t>
+            </a:r>
+            <a:pPr algn="l" indent="0" marL="0">
+              <a:lnSpc>
+                <a:spcPts val="1620"/>
+              </a:lnSpc>
+              <a:spcAft>
+                <a:spcPts val="300"/>
+              </a:spcAft>
+              <a:buNone/>
+            </a:pPr>
+            <a:r>
+              <a:rPr lang="en-US" sz="1200" i="1" dirty="0">
+                <a:solidFill>
+                  <a:srgbClr val="1C2833"/>
+                </a:solidFill>
+                <a:latin typeface="Arial" pitchFamily="34" charset="0"/>
+                <a:ea typeface="Arial" pitchFamily="34" charset="-122"/>
+                <a:cs typeface="Arial" pitchFamily="34" charset="-120"/>
+              </a:rPr>
+              <a:t>śabda</a:t>
+            </a:r>
+            <a:pPr algn="l" indent="0" marL="0">
+              <a:lnSpc>
+                <a:spcPts val="1620"/>
+              </a:lnSpc>
+              <a:spcAft>
+                <a:spcPts val="300"/>
+              </a:spcAft>
+              <a:buNone/>
+            </a:pPr>
+            <a:r>
+              <a:rPr lang="en-US" sz="1200" dirty="0">
+                <a:solidFill>
+                  <a:srgbClr val="1C2833"/>
+                </a:solidFill>
+                <a:latin typeface="Arial" pitchFamily="34" charset="0"/>
+                <a:ea typeface="Arial" pitchFamily="34" charset="-122"/>
+                <a:cs typeface="Arial" pitchFamily="34" charset="-120"/>
+              </a:rPr>
+              <a:t> (sound) · ear · Ring the bell</a:t>
+            </a:r>
+            <a:endParaRPr lang="en-US" sz="1200" dirty="0"/>
+          </a:p>
+          <a:p>
+            <a:pPr algn="l" marL="342900" indent="-342900">
+              <a:lnSpc>
+                <a:spcPts val="1620"/>
+              </a:lnSpc>
+              <a:spcAft>
+                <a:spcPts val="300"/>
+              </a:spcAft>
+              <a:buSzPct val="100000"/>
+              <a:buChar char="•"/>
+            </a:pPr>
+            <a:r>
+              <a:rPr lang="en-US" sz="1200" i="1" dirty="0">
+                <a:solidFill>
+                  <a:srgbClr val="1C2833"/>
+                </a:solidFill>
+                <a:latin typeface="Arial" pitchFamily="34" charset="0"/>
+                <a:ea typeface="Arial" pitchFamily="34" charset="-122"/>
+                <a:cs typeface="Arial" pitchFamily="34" charset="-120"/>
+              </a:rPr>
+              <a:t>vāyu</a:t>
+            </a:r>
+            <a:pPr algn="l" indent="0" marL="0">
+              <a:lnSpc>
+                <a:spcPts val="1620"/>
+              </a:lnSpc>
+              <a:spcAft>
+                <a:spcPts val="300"/>
+              </a:spcAft>
+              <a:buNone/>
+            </a:pPr>
+            <a:r>
+              <a:rPr lang="en-US" sz="1200" dirty="0">
+                <a:solidFill>
+                  <a:srgbClr val="1C2833"/>
+                </a:solidFill>
+                <a:latin typeface="Arial" pitchFamily="34" charset="0"/>
+                <a:ea typeface="Arial" pitchFamily="34" charset="-122"/>
+                <a:cs typeface="Arial" pitchFamily="34" charset="-120"/>
+              </a:rPr>
+              <a:t> (air) — </a:t>
+            </a:r>
+            <a:pPr algn="l" indent="0" marL="0">
+              <a:lnSpc>
+                <a:spcPts val="1620"/>
+              </a:lnSpc>
+              <a:spcAft>
+                <a:spcPts val="300"/>
+              </a:spcAft>
+              <a:buNone/>
+            </a:pPr>
+            <a:r>
+              <a:rPr lang="en-US" sz="1200" i="1" dirty="0">
+                <a:solidFill>
+                  <a:srgbClr val="1C2833"/>
+                </a:solidFill>
+                <a:latin typeface="Arial" pitchFamily="34" charset="0"/>
+                <a:ea typeface="Arial" pitchFamily="34" charset="-122"/>
+                <a:cs typeface="Arial" pitchFamily="34" charset="-120"/>
+              </a:rPr>
+              <a:t>sparśa</a:t>
+            </a:r>
+            <a:pPr algn="l" indent="0" marL="0">
+              <a:lnSpc>
+                <a:spcPts val="1620"/>
+              </a:lnSpc>
+              <a:spcAft>
+                <a:spcPts val="300"/>
+              </a:spcAft>
+              <a:buNone/>
+            </a:pPr>
+            <a:r>
+              <a:rPr lang="en-US" sz="1200" dirty="0">
+                <a:solidFill>
+                  <a:srgbClr val="1C2833"/>
+                </a:solidFill>
+                <a:latin typeface="Arial" pitchFamily="34" charset="0"/>
+                <a:ea typeface="Arial" pitchFamily="34" charset="-122"/>
+                <a:cs typeface="Arial" pitchFamily="34" charset="-120"/>
+              </a:rPr>
+              <a:t> (touch) · skin · Feel a breeze on your hand</a:t>
+            </a:r>
+            <a:endParaRPr lang="en-US" sz="1200" dirty="0"/>
+          </a:p>
+          <a:p>
+            <a:pPr algn="l" marL="342900" indent="-342900">
+              <a:lnSpc>
+                <a:spcPts val="1620"/>
+              </a:lnSpc>
+              <a:spcAft>
+                <a:spcPts val="300"/>
+              </a:spcAft>
+              <a:buSzPct val="100000"/>
+              <a:buChar char="•"/>
+            </a:pPr>
+            <a:r>
+              <a:rPr lang="en-US" sz="1200" i="1" dirty="0">
+                <a:solidFill>
+                  <a:srgbClr val="1C2833"/>
+                </a:solidFill>
+                <a:latin typeface="Arial" pitchFamily="34" charset="0"/>
+                <a:ea typeface="Arial" pitchFamily="34" charset="-122"/>
+                <a:cs typeface="Arial" pitchFamily="34" charset="-120"/>
+              </a:rPr>
+              <a:t>tejas</a:t>
+            </a:r>
+            <a:pPr algn="l" indent="0" marL="0">
+              <a:lnSpc>
+                <a:spcPts val="1620"/>
+              </a:lnSpc>
+              <a:spcAft>
+                <a:spcPts val="300"/>
+              </a:spcAft>
+              <a:buNone/>
+            </a:pPr>
+            <a:r>
+              <a:rPr lang="en-US" sz="1200" dirty="0">
+                <a:solidFill>
+                  <a:srgbClr val="1C2833"/>
+                </a:solidFill>
+                <a:latin typeface="Arial" pitchFamily="34" charset="0"/>
+                <a:ea typeface="Arial" pitchFamily="34" charset="-122"/>
+                <a:cs typeface="Arial" pitchFamily="34" charset="-120"/>
+              </a:rPr>
+              <a:t> (fire) — </a:t>
+            </a:r>
+            <a:pPr algn="l" indent="0" marL="0">
+              <a:lnSpc>
+                <a:spcPts val="1620"/>
+              </a:lnSpc>
+              <a:spcAft>
+                <a:spcPts val="300"/>
+              </a:spcAft>
+              <a:buNone/>
+            </a:pPr>
+            <a:r>
+              <a:rPr lang="en-US" sz="1200" i="1" dirty="0">
+                <a:solidFill>
+                  <a:srgbClr val="1C2833"/>
+                </a:solidFill>
+                <a:latin typeface="Arial" pitchFamily="34" charset="0"/>
+                <a:ea typeface="Arial" pitchFamily="34" charset="-122"/>
+                <a:cs typeface="Arial" pitchFamily="34" charset="-120"/>
+              </a:rPr>
+              <a:t>rūpa</a:t>
+            </a:r>
+            <a:pPr algn="l" indent="0" marL="0">
+              <a:lnSpc>
+                <a:spcPts val="1620"/>
+              </a:lnSpc>
+              <a:spcAft>
+                <a:spcPts val="300"/>
+              </a:spcAft>
+              <a:buNone/>
+            </a:pPr>
+            <a:r>
+              <a:rPr lang="en-US" sz="1200" dirty="0">
+                <a:solidFill>
+                  <a:srgbClr val="1C2833"/>
+                </a:solidFill>
+                <a:latin typeface="Arial" pitchFamily="34" charset="0"/>
+                <a:ea typeface="Arial" pitchFamily="34" charset="-122"/>
+                <a:cs typeface="Arial" pitchFamily="34" charset="-120"/>
+              </a:rPr>
+              <a:t> (form / colour) · eye · Look at a flame's colour</a:t>
+            </a:r>
+            <a:endParaRPr lang="en-US" sz="1200" dirty="0"/>
+          </a:p>
+          <a:p>
+            <a:pPr algn="l" marL="342900" indent="-342900">
+              <a:lnSpc>
+                <a:spcPts val="1620"/>
+              </a:lnSpc>
+              <a:spcAft>
+                <a:spcPts val="300"/>
+              </a:spcAft>
+              <a:buSzPct val="100000"/>
+              <a:buChar char="•"/>
+            </a:pPr>
+            <a:r>
+              <a:rPr lang="en-US" sz="1200" i="1" dirty="0">
+                <a:solidFill>
+                  <a:srgbClr val="1C2833"/>
+                </a:solidFill>
+                <a:latin typeface="Arial" pitchFamily="34" charset="0"/>
+                <a:ea typeface="Arial" pitchFamily="34" charset="-122"/>
+                <a:cs typeface="Arial" pitchFamily="34" charset="-120"/>
+              </a:rPr>
+              <a:t>ap</a:t>
+            </a:r>
+            <a:pPr algn="l" indent="0" marL="0">
+              <a:lnSpc>
+                <a:spcPts val="1620"/>
+              </a:lnSpc>
+              <a:spcAft>
+                <a:spcPts val="300"/>
+              </a:spcAft>
+              <a:buNone/>
+            </a:pPr>
+            <a:r>
+              <a:rPr lang="en-US" sz="1200" dirty="0">
+                <a:solidFill>
+                  <a:srgbClr val="1C2833"/>
+                </a:solidFill>
+                <a:latin typeface="Arial" pitchFamily="34" charset="0"/>
+                <a:ea typeface="Arial" pitchFamily="34" charset="-122"/>
+                <a:cs typeface="Arial" pitchFamily="34" charset="-120"/>
+              </a:rPr>
+              <a:t> (water) — </a:t>
+            </a:r>
+            <a:pPr algn="l" indent="0" marL="0">
+              <a:lnSpc>
+                <a:spcPts val="1620"/>
+              </a:lnSpc>
+              <a:spcAft>
+                <a:spcPts val="300"/>
+              </a:spcAft>
+              <a:buNone/>
+            </a:pPr>
+            <a:r>
+              <a:rPr lang="en-US" sz="1200" i="1" dirty="0">
+                <a:solidFill>
+                  <a:srgbClr val="1C2833"/>
+                </a:solidFill>
+                <a:latin typeface="Arial" pitchFamily="34" charset="0"/>
+                <a:ea typeface="Arial" pitchFamily="34" charset="-122"/>
+                <a:cs typeface="Arial" pitchFamily="34" charset="-120"/>
+              </a:rPr>
+              <a:t>rasa</a:t>
+            </a:r>
+            <a:pPr algn="l" indent="0" marL="0">
+              <a:lnSpc>
+                <a:spcPts val="1620"/>
+              </a:lnSpc>
+              <a:spcAft>
+                <a:spcPts val="300"/>
+              </a:spcAft>
+              <a:buNone/>
+            </a:pPr>
+            <a:r>
+              <a:rPr lang="en-US" sz="1200" dirty="0">
+                <a:solidFill>
+                  <a:srgbClr val="1C2833"/>
+                </a:solidFill>
+                <a:latin typeface="Arial" pitchFamily="34" charset="0"/>
+                <a:ea typeface="Arial" pitchFamily="34" charset="-122"/>
+                <a:cs typeface="Arial" pitchFamily="34" charset="-120"/>
+              </a:rPr>
+              <a:t> (taste) · tongue · Taste sweetness / saltiness</a:t>
+            </a:r>
+            <a:endParaRPr lang="en-US" sz="1200" dirty="0"/>
+          </a:p>
+          <a:p>
+            <a:pPr algn="l" marL="342900" indent="-342900">
+              <a:lnSpc>
+                <a:spcPts val="1620"/>
+              </a:lnSpc>
+              <a:spcAft>
+                <a:spcPts val="300"/>
+              </a:spcAft>
+              <a:buSzPct val="100000"/>
+              <a:buChar char="•"/>
+            </a:pPr>
+            <a:r>
+              <a:rPr lang="en-US" sz="1200" i="1" dirty="0">
+                <a:solidFill>
+                  <a:srgbClr val="1C2833"/>
+                </a:solidFill>
+                <a:latin typeface="Arial" pitchFamily="34" charset="0"/>
+                <a:ea typeface="Arial" pitchFamily="34" charset="-122"/>
+                <a:cs typeface="Arial" pitchFamily="34" charset="-120"/>
+              </a:rPr>
+              <a:t>pṛthvī</a:t>
+            </a:r>
+            <a:pPr algn="l" indent="0" marL="0">
+              <a:lnSpc>
+                <a:spcPts val="1620"/>
+              </a:lnSpc>
+              <a:spcAft>
+                <a:spcPts val="300"/>
+              </a:spcAft>
+              <a:buNone/>
+            </a:pPr>
+            <a:r>
+              <a:rPr lang="en-US" sz="1200" dirty="0">
+                <a:solidFill>
+                  <a:srgbClr val="1C2833"/>
+                </a:solidFill>
+                <a:latin typeface="Arial" pitchFamily="34" charset="0"/>
+                <a:ea typeface="Arial" pitchFamily="34" charset="-122"/>
+                <a:cs typeface="Arial" pitchFamily="34" charset="-120"/>
+              </a:rPr>
+              <a:t> (earth) — </a:t>
+            </a:r>
+            <a:pPr algn="l" indent="0" marL="0">
+              <a:lnSpc>
+                <a:spcPts val="1620"/>
+              </a:lnSpc>
+              <a:spcAft>
+                <a:spcPts val="300"/>
+              </a:spcAft>
+              <a:buNone/>
+            </a:pPr>
+            <a:r>
+              <a:rPr lang="en-US" sz="1200" i="1" dirty="0">
+                <a:solidFill>
+                  <a:srgbClr val="1C2833"/>
+                </a:solidFill>
+                <a:latin typeface="Arial" pitchFamily="34" charset="0"/>
+                <a:ea typeface="Arial" pitchFamily="34" charset="-122"/>
+                <a:cs typeface="Arial" pitchFamily="34" charset="-120"/>
+              </a:rPr>
+              <a:t>gandha</a:t>
+            </a:r>
+            <a:pPr algn="l" indent="0" marL="0">
+              <a:lnSpc>
+                <a:spcPts val="1620"/>
+              </a:lnSpc>
+              <a:spcAft>
+                <a:spcPts val="300"/>
+              </a:spcAft>
+              <a:buNone/>
+            </a:pPr>
+            <a:r>
+              <a:rPr lang="en-US" sz="1200" dirty="0">
+                <a:solidFill>
+                  <a:srgbClr val="1C2833"/>
+                </a:solidFill>
+                <a:latin typeface="Arial" pitchFamily="34" charset="0"/>
+                <a:ea typeface="Arial" pitchFamily="34" charset="-122"/>
+                <a:cs typeface="Arial" pitchFamily="34" charset="-120"/>
+              </a:rPr>
+              <a:t> (smell) · nose · Smell soil, or jaggery, or peel</a:t>
+            </a:r>
+            <a:endParaRPr lang="en-US" sz="1200" dirty="0"/>
+          </a:p>
+        </p:txBody>
+      </p:sp>
+      <p:sp>
+        <p:nvSpPr>
+          <p:cNvPr id="7" name="Text 5"/>
+          <p:cNvSpPr/>
+          <p:nvPr/>
+        </p:nvSpPr>
+        <p:spPr>
+          <a:xfrm>
+            <a:off x="634901" y="2914948"/>
             <a:ext cx="8102798" cy="487561"/>
           </a:xfrm>
           <a:prstGeom prst="rect">
@@ -5151,13 +5641,13 @@
       </p:sp>
       <p:sp>
         <p:nvSpPr>
-          <p:cNvPr id="6" name="Text 4"/>
+          <p:cNvPr id="8" name="Text 6"/>
           <p:cNvSpPr/>
           <p:nvPr/>
         </p:nvSpPr>
         <p:spPr>
           <a:xfrm>
-            <a:off x="634901" y="3547616"/>
+            <a:off x="634901" y="3504009"/>
             <a:ext cx="8102798" cy="281880"/>
           </a:xfrm>
           <a:prstGeom prst="rect">
@@ -5217,13 +5707,13 @@
       </p:sp>
       <p:sp>
         <p:nvSpPr>
-          <p:cNvPr id="7" name="Text 5"/>
+          <p:cNvPr id="9" name="Text 7"/>
           <p:cNvSpPr/>
           <p:nvPr/>
         </p:nvSpPr>
         <p:spPr>
           <a:xfrm>
-            <a:off x="406301" y="3918347"/>
+            <a:off x="406301" y="3874740"/>
             <a:ext cx="8498026" cy="639812"/>
           </a:xfrm>
           <a:prstGeom prst="rect">
@@ -5403,13 +5893,13 @@
       </p:sp>
       <p:sp>
         <p:nvSpPr>
-          <p:cNvPr id="8" name="Text 6"/>
+          <p:cNvPr id="10" name="Text 8"/>
           <p:cNvSpPr/>
           <p:nvPr/>
         </p:nvSpPr>
         <p:spPr>
           <a:xfrm>
-            <a:off x="406301" y="4634359"/>
+            <a:off x="406301" y="4590752"/>
             <a:ext cx="8498026" cy="426541"/>
           </a:xfrm>
           <a:prstGeom prst="rect">
@@ -5543,13 +6033,13 @@
       </p:sp>
       <p:sp>
         <p:nvSpPr>
-          <p:cNvPr id="9" name="Text 7"/>
+          <p:cNvPr id="11" name="Text 9"/>
           <p:cNvSpPr/>
           <p:nvPr/>
         </p:nvSpPr>
         <p:spPr>
           <a:xfrm>
-            <a:off x="634901" y="5149751"/>
+            <a:off x="634901" y="5106144"/>
             <a:ext cx="8102798" cy="281880"/>
           </a:xfrm>
           <a:prstGeom prst="rect">
@@ -5589,13 +6079,13 @@
       </p:sp>
       <p:sp>
         <p:nvSpPr>
-          <p:cNvPr id="10" name="Text 8"/>
+          <p:cNvPr id="12" name="Text 10"/>
           <p:cNvSpPr/>
           <p:nvPr/>
         </p:nvSpPr>
         <p:spPr>
           <a:xfrm>
-            <a:off x="406301" y="5520482"/>
+            <a:off x="406301" y="5476875"/>
             <a:ext cx="8498026" cy="853083"/>
           </a:xfrm>
           <a:prstGeom prst="rect">
@@ -5683,13 +6173,13 @@
       </p:sp>
       <p:sp>
         <p:nvSpPr>
-          <p:cNvPr id="11" name="Text 9"/>
+          <p:cNvPr id="13" name="Text 11"/>
           <p:cNvSpPr/>
           <p:nvPr/>
         </p:nvSpPr>
         <p:spPr>
           <a:xfrm>
-            <a:off x="406301" y="6525964"/>
+            <a:off x="406301" y="6482358"/>
             <a:ext cx="8498026" cy="213271"/>
           </a:xfrm>
           <a:prstGeom prst="rect">

--- a/exports/pptx/lessons/middle-module-02-panchabhuta/day-03-five-qualities.pptx
+++ b/exports/pptx/lessons/middle-module-02-panchabhuta/day-03-five-qualities.pptx
@@ -18,9 +18,15 @@
     <p:sldId id="266" r:id="rId12"/>
     <p:sldId id="267" r:id="rId13"/>
     <p:sldId id="268" r:id="rId14"/>
+    <p:sldId id="269" r:id="rId15"/>
+    <p:sldId id="270" r:id="rId16"/>
+    <p:sldId id="271" r:id="rId17"/>
+    <p:sldId id="272" r:id="rId18"/>
+    <p:sldId id="273" r:id="rId19"/>
+    <p:sldId id="274" r:id="rId20"/>
   </p:sldIdLst>
   <p:notesMasterIdLst>
-    <p:notesMasterId r:id="rId15"/>
+    <p:notesMasterId r:id="rId21"/>
   </p:notesMasterIdLst>
   <p:sldSz cx="9144000" cy="5143500"/>
   <p:notesSz cx="5143500" cy="9144000"/>
@@ -890,6 +896,534 @@
             <a:fld id="{F7021451-1387-4CA6-816F-3879F97B5CBC}" type="slidenum">
               <a:rPr lang="en-US"/>
               <a:t>13</a:t>
+            </a:fld>
+            <a:endParaRPr lang="en-US"/>
+          </a:p>
+        </p:txBody>
+      </p:sp>
+    </p:spTree>
+    <p:extLst>
+      <p:ext uri="{BB962C8B-B14F-4D97-AF65-F5344CB8AC3E}">
+        <p14:creationId xmlns:p14="http://schemas.microsoft.com/office/powerpoint/2010/main" val="1024086991"/>
+      </p:ext>
+    </p:extLst>
+  </p:cSld>
+  <p:clrMapOvr>
+    <a:masterClrMapping/>
+  </p:clrMapOvr>
+</p:notes>
+</file>
+
+<file path=ppt/notesSlides/notesSlide14.xml><?xml version="1.0" encoding="utf-8"?>
+<p:notes xmlns:a="http://schemas.openxmlformats.org/drawingml/2006/main" xmlns:r="http://schemas.openxmlformats.org/officeDocument/2006/relationships" xmlns:p="http://schemas.openxmlformats.org/presentationml/2006/main">
+  <p:cSld>
+    <p:spTree>
+      <p:nvGrpSpPr>
+        <p:cNvPr id="1" name=""/>
+        <p:cNvGrpSpPr/>
+        <p:nvPr/>
+      </p:nvGrpSpPr>
+      <p:grpSpPr>
+        <a:xfrm>
+          <a:off x="0" y="0"/>
+          <a:ext cx="0" cy="0"/>
+          <a:chOff x="0" y="0"/>
+          <a:chExt cx="0" cy="0"/>
+        </a:xfrm>
+      </p:grpSpPr>
+      <p:sp>
+        <p:nvSpPr>
+          <p:cNvPr id="2" name="Slide Image Placeholder 1"/>
+          <p:cNvSpPr>
+            <a:spLocks noGrp="1" noRot="1" noChangeAspect="1"/>
+          </p:cNvSpPr>
+          <p:nvPr>
+            <p:ph type="sldImg"/>
+          </p:nvPr>
+        </p:nvSpPr>
+        <p:spPr/>
+      </p:sp>
+      <p:sp>
+        <p:nvSpPr>
+          <p:cNvPr id="3" name="Notes Placeholder 2"/>
+          <p:cNvSpPr>
+            <a:spLocks noGrp="1"/>
+          </p:cNvSpPr>
+          <p:nvPr>
+            <p:ph type="body" idx="1"/>
+          </p:nvPr>
+        </p:nvSpPr>
+        <p:spPr/>
+        <p:txBody>
+          <a:bodyPr/>
+          <a:lstStyle/>
+          <a:p>
+            <a:r>
+              <a:rPr lang="en-US" dirty="0"/>
+              <a:t/>
+            </a:r>
+            <a:endParaRPr lang="en-US" dirty="0"/>
+          </a:p>
+        </p:txBody>
+      </p:sp>
+      <p:sp>
+        <p:nvSpPr>
+          <p:cNvPr id="4" name="Slide Number Placeholder 3"/>
+          <p:cNvSpPr>
+            <a:spLocks noGrp="1"/>
+          </p:cNvSpPr>
+          <p:nvPr>
+            <p:ph type="sldNum" sz="quarter" idx="10"/>
+          </p:nvPr>
+        </p:nvSpPr>
+        <p:spPr/>
+        <p:txBody>
+          <a:bodyPr/>
+          <a:lstStyle/>
+          <a:p>
+            <a:fld id="{F7021451-1387-4CA6-816F-3879F97B5CBC}" type="slidenum">
+              <a:rPr lang="en-US"/>
+              <a:t>14</a:t>
+            </a:fld>
+            <a:endParaRPr lang="en-US"/>
+          </a:p>
+        </p:txBody>
+      </p:sp>
+    </p:spTree>
+    <p:extLst>
+      <p:ext uri="{BB962C8B-B14F-4D97-AF65-F5344CB8AC3E}">
+        <p14:creationId xmlns:p14="http://schemas.microsoft.com/office/powerpoint/2010/main" val="1024086991"/>
+      </p:ext>
+    </p:extLst>
+  </p:cSld>
+  <p:clrMapOvr>
+    <a:masterClrMapping/>
+  </p:clrMapOvr>
+</p:notes>
+</file>
+
+<file path=ppt/notesSlides/notesSlide15.xml><?xml version="1.0" encoding="utf-8"?>
+<p:notes xmlns:a="http://schemas.openxmlformats.org/drawingml/2006/main" xmlns:r="http://schemas.openxmlformats.org/officeDocument/2006/relationships" xmlns:p="http://schemas.openxmlformats.org/presentationml/2006/main">
+  <p:cSld>
+    <p:spTree>
+      <p:nvGrpSpPr>
+        <p:cNvPr id="1" name=""/>
+        <p:cNvGrpSpPr/>
+        <p:nvPr/>
+      </p:nvGrpSpPr>
+      <p:grpSpPr>
+        <a:xfrm>
+          <a:off x="0" y="0"/>
+          <a:ext cx="0" cy="0"/>
+          <a:chOff x="0" y="0"/>
+          <a:chExt cx="0" cy="0"/>
+        </a:xfrm>
+      </p:grpSpPr>
+      <p:sp>
+        <p:nvSpPr>
+          <p:cNvPr id="2" name="Slide Image Placeholder 1"/>
+          <p:cNvSpPr>
+            <a:spLocks noGrp="1" noRot="1" noChangeAspect="1"/>
+          </p:cNvSpPr>
+          <p:nvPr>
+            <p:ph type="sldImg"/>
+          </p:nvPr>
+        </p:nvSpPr>
+        <p:spPr/>
+      </p:sp>
+      <p:sp>
+        <p:nvSpPr>
+          <p:cNvPr id="3" name="Notes Placeholder 2"/>
+          <p:cNvSpPr>
+            <a:spLocks noGrp="1"/>
+          </p:cNvSpPr>
+          <p:nvPr>
+            <p:ph type="body" idx="1"/>
+          </p:nvPr>
+        </p:nvSpPr>
+        <p:spPr/>
+        <p:txBody>
+          <a:bodyPr/>
+          <a:lstStyle/>
+          <a:p>
+            <a:r>
+              <a:rPr lang="en-US" dirty="0"/>
+              <a:t/>
+            </a:r>
+            <a:endParaRPr lang="en-US" dirty="0"/>
+          </a:p>
+        </p:txBody>
+      </p:sp>
+      <p:sp>
+        <p:nvSpPr>
+          <p:cNvPr id="4" name="Slide Number Placeholder 3"/>
+          <p:cNvSpPr>
+            <a:spLocks noGrp="1"/>
+          </p:cNvSpPr>
+          <p:nvPr>
+            <p:ph type="sldNum" sz="quarter" idx="10"/>
+          </p:nvPr>
+        </p:nvSpPr>
+        <p:spPr/>
+        <p:txBody>
+          <a:bodyPr/>
+          <a:lstStyle/>
+          <a:p>
+            <a:fld id="{F7021451-1387-4CA6-816F-3879F97B5CBC}" type="slidenum">
+              <a:rPr lang="en-US"/>
+              <a:t>15</a:t>
+            </a:fld>
+            <a:endParaRPr lang="en-US"/>
+          </a:p>
+        </p:txBody>
+      </p:sp>
+    </p:spTree>
+    <p:extLst>
+      <p:ext uri="{BB962C8B-B14F-4D97-AF65-F5344CB8AC3E}">
+        <p14:creationId xmlns:p14="http://schemas.microsoft.com/office/powerpoint/2010/main" val="1024086991"/>
+      </p:ext>
+    </p:extLst>
+  </p:cSld>
+  <p:clrMapOvr>
+    <a:masterClrMapping/>
+  </p:clrMapOvr>
+</p:notes>
+</file>
+
+<file path=ppt/notesSlides/notesSlide16.xml><?xml version="1.0" encoding="utf-8"?>
+<p:notes xmlns:a="http://schemas.openxmlformats.org/drawingml/2006/main" xmlns:r="http://schemas.openxmlformats.org/officeDocument/2006/relationships" xmlns:p="http://schemas.openxmlformats.org/presentationml/2006/main">
+  <p:cSld>
+    <p:spTree>
+      <p:nvGrpSpPr>
+        <p:cNvPr id="1" name=""/>
+        <p:cNvGrpSpPr/>
+        <p:nvPr/>
+      </p:nvGrpSpPr>
+      <p:grpSpPr>
+        <a:xfrm>
+          <a:off x="0" y="0"/>
+          <a:ext cx="0" cy="0"/>
+          <a:chOff x="0" y="0"/>
+          <a:chExt cx="0" cy="0"/>
+        </a:xfrm>
+      </p:grpSpPr>
+      <p:sp>
+        <p:nvSpPr>
+          <p:cNvPr id="2" name="Slide Image Placeholder 1"/>
+          <p:cNvSpPr>
+            <a:spLocks noGrp="1" noRot="1" noChangeAspect="1"/>
+          </p:cNvSpPr>
+          <p:nvPr>
+            <p:ph type="sldImg"/>
+          </p:nvPr>
+        </p:nvSpPr>
+        <p:spPr/>
+      </p:sp>
+      <p:sp>
+        <p:nvSpPr>
+          <p:cNvPr id="3" name="Notes Placeholder 2"/>
+          <p:cNvSpPr>
+            <a:spLocks noGrp="1"/>
+          </p:cNvSpPr>
+          <p:nvPr>
+            <p:ph type="body" idx="1"/>
+          </p:nvPr>
+        </p:nvSpPr>
+        <p:spPr/>
+        <p:txBody>
+          <a:bodyPr/>
+          <a:lstStyle/>
+          <a:p>
+            <a:r>
+              <a:rPr lang="en-US" dirty="0"/>
+              <a:t/>
+            </a:r>
+            <a:endParaRPr lang="en-US" dirty="0"/>
+          </a:p>
+        </p:txBody>
+      </p:sp>
+      <p:sp>
+        <p:nvSpPr>
+          <p:cNvPr id="4" name="Slide Number Placeholder 3"/>
+          <p:cNvSpPr>
+            <a:spLocks noGrp="1"/>
+          </p:cNvSpPr>
+          <p:nvPr>
+            <p:ph type="sldNum" sz="quarter" idx="10"/>
+          </p:nvPr>
+        </p:nvSpPr>
+        <p:spPr/>
+        <p:txBody>
+          <a:bodyPr/>
+          <a:lstStyle/>
+          <a:p>
+            <a:fld id="{F7021451-1387-4CA6-816F-3879F97B5CBC}" type="slidenum">
+              <a:rPr lang="en-US"/>
+              <a:t>16</a:t>
+            </a:fld>
+            <a:endParaRPr lang="en-US"/>
+          </a:p>
+        </p:txBody>
+      </p:sp>
+    </p:spTree>
+    <p:extLst>
+      <p:ext uri="{BB962C8B-B14F-4D97-AF65-F5344CB8AC3E}">
+        <p14:creationId xmlns:p14="http://schemas.microsoft.com/office/powerpoint/2010/main" val="1024086991"/>
+      </p:ext>
+    </p:extLst>
+  </p:cSld>
+  <p:clrMapOvr>
+    <a:masterClrMapping/>
+  </p:clrMapOvr>
+</p:notes>
+</file>
+
+<file path=ppt/notesSlides/notesSlide17.xml><?xml version="1.0" encoding="utf-8"?>
+<p:notes xmlns:a="http://schemas.openxmlformats.org/drawingml/2006/main" xmlns:r="http://schemas.openxmlformats.org/officeDocument/2006/relationships" xmlns:p="http://schemas.openxmlformats.org/presentationml/2006/main">
+  <p:cSld>
+    <p:spTree>
+      <p:nvGrpSpPr>
+        <p:cNvPr id="1" name=""/>
+        <p:cNvGrpSpPr/>
+        <p:nvPr/>
+      </p:nvGrpSpPr>
+      <p:grpSpPr>
+        <a:xfrm>
+          <a:off x="0" y="0"/>
+          <a:ext cx="0" cy="0"/>
+          <a:chOff x="0" y="0"/>
+          <a:chExt cx="0" cy="0"/>
+        </a:xfrm>
+      </p:grpSpPr>
+      <p:sp>
+        <p:nvSpPr>
+          <p:cNvPr id="2" name="Slide Image Placeholder 1"/>
+          <p:cNvSpPr>
+            <a:spLocks noGrp="1" noRot="1" noChangeAspect="1"/>
+          </p:cNvSpPr>
+          <p:nvPr>
+            <p:ph type="sldImg"/>
+          </p:nvPr>
+        </p:nvSpPr>
+        <p:spPr/>
+      </p:sp>
+      <p:sp>
+        <p:nvSpPr>
+          <p:cNvPr id="3" name="Notes Placeholder 2"/>
+          <p:cNvSpPr>
+            <a:spLocks noGrp="1"/>
+          </p:cNvSpPr>
+          <p:nvPr>
+            <p:ph type="body" idx="1"/>
+          </p:nvPr>
+        </p:nvSpPr>
+        <p:spPr/>
+        <p:txBody>
+          <a:bodyPr/>
+          <a:lstStyle/>
+          <a:p>
+            <a:r>
+              <a:rPr lang="en-US" dirty="0"/>
+              <a:t/>
+            </a:r>
+            <a:endParaRPr lang="en-US" dirty="0"/>
+          </a:p>
+        </p:txBody>
+      </p:sp>
+      <p:sp>
+        <p:nvSpPr>
+          <p:cNvPr id="4" name="Slide Number Placeholder 3"/>
+          <p:cNvSpPr>
+            <a:spLocks noGrp="1"/>
+          </p:cNvSpPr>
+          <p:nvPr>
+            <p:ph type="sldNum" sz="quarter" idx="10"/>
+          </p:nvPr>
+        </p:nvSpPr>
+        <p:spPr/>
+        <p:txBody>
+          <a:bodyPr/>
+          <a:lstStyle/>
+          <a:p>
+            <a:fld id="{F7021451-1387-4CA6-816F-3879F97B5CBC}" type="slidenum">
+              <a:rPr lang="en-US"/>
+              <a:t>17</a:t>
+            </a:fld>
+            <a:endParaRPr lang="en-US"/>
+          </a:p>
+        </p:txBody>
+      </p:sp>
+    </p:spTree>
+    <p:extLst>
+      <p:ext uri="{BB962C8B-B14F-4D97-AF65-F5344CB8AC3E}">
+        <p14:creationId xmlns:p14="http://schemas.microsoft.com/office/powerpoint/2010/main" val="1024086991"/>
+      </p:ext>
+    </p:extLst>
+  </p:cSld>
+  <p:clrMapOvr>
+    <a:masterClrMapping/>
+  </p:clrMapOvr>
+</p:notes>
+</file>
+
+<file path=ppt/notesSlides/notesSlide18.xml><?xml version="1.0" encoding="utf-8"?>
+<p:notes xmlns:a="http://schemas.openxmlformats.org/drawingml/2006/main" xmlns:r="http://schemas.openxmlformats.org/officeDocument/2006/relationships" xmlns:p="http://schemas.openxmlformats.org/presentationml/2006/main">
+  <p:cSld>
+    <p:spTree>
+      <p:nvGrpSpPr>
+        <p:cNvPr id="1" name=""/>
+        <p:cNvGrpSpPr/>
+        <p:nvPr/>
+      </p:nvGrpSpPr>
+      <p:grpSpPr>
+        <a:xfrm>
+          <a:off x="0" y="0"/>
+          <a:ext cx="0" cy="0"/>
+          <a:chOff x="0" y="0"/>
+          <a:chExt cx="0" cy="0"/>
+        </a:xfrm>
+      </p:grpSpPr>
+      <p:sp>
+        <p:nvSpPr>
+          <p:cNvPr id="2" name="Slide Image Placeholder 1"/>
+          <p:cNvSpPr>
+            <a:spLocks noGrp="1" noRot="1" noChangeAspect="1"/>
+          </p:cNvSpPr>
+          <p:nvPr>
+            <p:ph type="sldImg"/>
+          </p:nvPr>
+        </p:nvSpPr>
+        <p:spPr/>
+      </p:sp>
+      <p:sp>
+        <p:nvSpPr>
+          <p:cNvPr id="3" name="Notes Placeholder 2"/>
+          <p:cNvSpPr>
+            <a:spLocks noGrp="1"/>
+          </p:cNvSpPr>
+          <p:nvPr>
+            <p:ph type="body" idx="1"/>
+          </p:nvPr>
+        </p:nvSpPr>
+        <p:spPr/>
+        <p:txBody>
+          <a:bodyPr/>
+          <a:lstStyle/>
+          <a:p>
+            <a:r>
+              <a:rPr lang="en-US" dirty="0"/>
+              <a:t/>
+            </a:r>
+            <a:endParaRPr lang="en-US" dirty="0"/>
+          </a:p>
+        </p:txBody>
+      </p:sp>
+      <p:sp>
+        <p:nvSpPr>
+          <p:cNvPr id="4" name="Slide Number Placeholder 3"/>
+          <p:cNvSpPr>
+            <a:spLocks noGrp="1"/>
+          </p:cNvSpPr>
+          <p:nvPr>
+            <p:ph type="sldNum" sz="quarter" idx="10"/>
+          </p:nvPr>
+        </p:nvSpPr>
+        <p:spPr/>
+        <p:txBody>
+          <a:bodyPr/>
+          <a:lstStyle/>
+          <a:p>
+            <a:fld id="{F7021451-1387-4CA6-816F-3879F97B5CBC}" type="slidenum">
+              <a:rPr lang="en-US"/>
+              <a:t>18</a:t>
+            </a:fld>
+            <a:endParaRPr lang="en-US"/>
+          </a:p>
+        </p:txBody>
+      </p:sp>
+    </p:spTree>
+    <p:extLst>
+      <p:ext uri="{BB962C8B-B14F-4D97-AF65-F5344CB8AC3E}">
+        <p14:creationId xmlns:p14="http://schemas.microsoft.com/office/powerpoint/2010/main" val="1024086991"/>
+      </p:ext>
+    </p:extLst>
+  </p:cSld>
+  <p:clrMapOvr>
+    <a:masterClrMapping/>
+  </p:clrMapOvr>
+</p:notes>
+</file>
+
+<file path=ppt/notesSlides/notesSlide19.xml><?xml version="1.0" encoding="utf-8"?>
+<p:notes xmlns:a="http://schemas.openxmlformats.org/drawingml/2006/main" xmlns:r="http://schemas.openxmlformats.org/officeDocument/2006/relationships" xmlns:p="http://schemas.openxmlformats.org/presentationml/2006/main">
+  <p:cSld>
+    <p:spTree>
+      <p:nvGrpSpPr>
+        <p:cNvPr id="1" name=""/>
+        <p:cNvGrpSpPr/>
+        <p:nvPr/>
+      </p:nvGrpSpPr>
+      <p:grpSpPr>
+        <a:xfrm>
+          <a:off x="0" y="0"/>
+          <a:ext cx="0" cy="0"/>
+          <a:chOff x="0" y="0"/>
+          <a:chExt cx="0" cy="0"/>
+        </a:xfrm>
+      </p:grpSpPr>
+      <p:sp>
+        <p:nvSpPr>
+          <p:cNvPr id="2" name="Slide Image Placeholder 1"/>
+          <p:cNvSpPr>
+            <a:spLocks noGrp="1" noRot="1" noChangeAspect="1"/>
+          </p:cNvSpPr>
+          <p:nvPr>
+            <p:ph type="sldImg"/>
+          </p:nvPr>
+        </p:nvSpPr>
+        <p:spPr/>
+      </p:sp>
+      <p:sp>
+        <p:nvSpPr>
+          <p:cNvPr id="3" name="Notes Placeholder 2"/>
+          <p:cNvSpPr>
+            <a:spLocks noGrp="1"/>
+          </p:cNvSpPr>
+          <p:nvPr>
+            <p:ph type="body" idx="1"/>
+          </p:nvPr>
+        </p:nvSpPr>
+        <p:spPr/>
+        <p:txBody>
+          <a:bodyPr/>
+          <a:lstStyle/>
+          <a:p>
+            <a:r>
+              <a:rPr lang="en-US" dirty="0"/>
+              <a:t/>
+            </a:r>
+            <a:endParaRPr lang="en-US" dirty="0"/>
+          </a:p>
+        </p:txBody>
+      </p:sp>
+      <p:sp>
+        <p:nvSpPr>
+          <p:cNvPr id="4" name="Slide Number Placeholder 3"/>
+          <p:cNvSpPr>
+            <a:spLocks noGrp="1"/>
+          </p:cNvSpPr>
+          <p:nvPr>
+            <p:ph type="sldNum" sz="quarter" idx="10"/>
+          </p:nvPr>
+        </p:nvSpPr>
+        <p:spPr/>
+        <p:txBody>
+          <a:bodyPr/>
+          <a:lstStyle/>
+          <a:p>
+            <a:fld id="{F7021451-1387-4CA6-816F-3879F97B5CBC}" type="slidenum">
+              <a:rPr lang="en-US"/>
+              <a:t>19</a:t>
             </a:fld>
             <a:endParaRPr lang="en-US"/>
           </a:p>
@@ -2189,148 +2723,6 @@
         </p:nvSpPr>
         <p:spPr>
           <a:xfrm>
-            <a:off x="406301" y="1223963"/>
-            <a:ext cx="8498026" cy="274290"/>
-          </a:xfrm>
-          <a:prstGeom prst="rect">
-            <a:avLst/>
-          </a:prstGeom>
-          <a:noFill/>
-          <a:ln/>
-        </p:spPr>
-        <p:txBody>
-          <a:bodyPr wrap="square" lIns="0" tIns="0" rIns="0" bIns="0" rtlCol="0" anchor="t"/>
-          <a:lstStyle/>
-          <a:p>
-            <a:pPr algn="l" indent="0" marL="0">
-              <a:lnSpc>
-                <a:spcPts val="2160"/>
-              </a:lnSpc>
-              <a:spcBef>
-                <a:spcPts val="600"/>
-              </a:spcBef>
-              <a:spcAft>
-                <a:spcPts val="800"/>
-              </a:spcAft>
-              <a:buNone/>
-            </a:pPr>
-            <a:r>
-              <a:rPr lang="en-US" sz="1800" b="1" dirty="0">
-                <a:solidFill>
-                  <a:srgbClr val="FE4447"/>
-                </a:solidFill>
-                <a:latin typeface="Georgia" pitchFamily="34" charset="0"/>
-                <a:ea typeface="Georgia" pitchFamily="34" charset="-122"/>
-                <a:cs typeface="Georgia" pitchFamily="34" charset="-120"/>
-              </a:rPr>
-              <a:t>Learning objective</a:t>
-            </a:r>
-            <a:endParaRPr lang="en-US" sz="1800" dirty="0"/>
-          </a:p>
-        </p:txBody>
-      </p:sp>
-      <p:sp>
-        <p:nvSpPr>
-          <p:cNvPr id="6" name="Text 4"/>
-          <p:cNvSpPr/>
-          <p:nvPr/>
-        </p:nvSpPr>
-        <p:spPr>
-          <a:xfrm>
-            <a:off x="406301" y="1637854"/>
-            <a:ext cx="8498026" cy="426541"/>
-          </a:xfrm>
-          <a:prstGeom prst="rect">
-            <a:avLst/>
-          </a:prstGeom>
-          <a:noFill/>
-          <a:ln/>
-        </p:spPr>
-        <p:txBody>
-          <a:bodyPr wrap="square" lIns="0" tIns="0" rIns="0" bIns="0" rtlCol="0" anchor="t"/>
-          <a:lstStyle/>
-          <a:p>
-            <a:pPr algn="l" indent="0" marL="0">
-              <a:lnSpc>
-                <a:spcPts val="1680"/>
-              </a:lnSpc>
-              <a:spcBef>
-                <a:spcPts val="300"/>
-              </a:spcBef>
-              <a:spcAft>
-                <a:spcPts val="300"/>
-              </a:spcAft>
-              <a:buNone/>
-            </a:pPr>
-            <a:r>
-              <a:rPr lang="en-US" sz="1200" dirty="0">
-                <a:solidFill>
-                  <a:srgbClr val="1C2833"/>
-                </a:solidFill>
-                <a:latin typeface="Arial" pitchFamily="34" charset="0"/>
-                <a:ea typeface="Arial" pitchFamily="34" charset="-122"/>
-                <a:cs typeface="Arial" pitchFamily="34" charset="-120"/>
-              </a:rPr>
-              <a:t>By the end of this lesson, students will match each </a:t>
-            </a:r>
-            <a:pPr algn="l" indent="0" marL="0">
-              <a:lnSpc>
-                <a:spcPts val="1680"/>
-              </a:lnSpc>
-              <a:spcBef>
-                <a:spcPts val="300"/>
-              </a:spcBef>
-              <a:spcAft>
-                <a:spcPts val="300"/>
-              </a:spcAft>
-              <a:buNone/>
-            </a:pPr>
-            <a:r>
-              <a:rPr lang="en-US" sz="1200" i="1" dirty="0">
-                <a:solidFill>
-                  <a:srgbClr val="1C2833"/>
-                </a:solidFill>
-                <a:latin typeface="Arial" pitchFamily="34" charset="0"/>
-                <a:ea typeface="Arial" pitchFamily="34" charset="-122"/>
-                <a:cs typeface="Arial" pitchFamily="34" charset="-120"/>
-              </a:rPr>
-              <a:t>tanmātra</a:t>
-            </a:r>
-            <a:pPr algn="l" indent="0" marL="0">
-              <a:lnSpc>
-                <a:spcPts val="1680"/>
-              </a:lnSpc>
-              <a:spcBef>
-                <a:spcPts val="300"/>
-              </a:spcBef>
-              <a:spcAft>
-                <a:spcPts val="300"/>
-              </a:spcAft>
-              <a:buNone/>
-            </a:pPr>
-            <a:r>
-              <a:rPr lang="en-US" sz="1200" dirty="0">
-                <a:solidFill>
-                  <a:srgbClr val="1C2833"/>
-                </a:solidFill>
-                <a:latin typeface="Arial" pitchFamily="34" charset="0"/>
-                <a:ea typeface="Arial" pitchFamily="34" charset="-122"/>
-                <a:cs typeface="Arial" pitchFamily="34" charset="-120"/>
-              </a:rPr>
-              <a:t> (subtle quality) to its element and to the sense organ that perceives it, and explain why this mapping is symmetric.</a:t>
-            </a:r>
-            <a:endParaRPr lang="en-US" sz="1200" dirty="0"/>
-          </a:p>
-        </p:txBody>
-      </p:sp>
-      <p:sp>
-        <p:nvSpPr>
-          <p:cNvPr id="7" name="Text 5"/>
-          <p:cNvSpPr/>
-          <p:nvPr/>
-        </p:nvSpPr>
-        <p:spPr>
-          <a:xfrm>
             <a:off x="406301" y="4434929"/>
             <a:ext cx="8498026" cy="213271"/>
           </a:xfrm>
@@ -2475,7 +2867,7 @@
                 <a:ea typeface="Georgia" pitchFamily="34" charset="-122"/>
                 <a:cs typeface="Georgia" pitchFamily="34" charset="-120"/>
               </a:rPr>
-              <a:t>Homework</a:t>
+              <a:t>Core (20 min) (cont.)</a:t>
             </a:r>
             <a:endParaRPr lang="en-US" sz="1800" dirty="0"/>
           </a:p>
@@ -2489,7 +2881,246 @@
         </p:nvSpPr>
         <p:spPr>
           <a:xfrm>
-            <a:off x="406301" y="870942"/>
+            <a:off x="406301" y="883593"/>
+            <a:ext cx="8331398" cy="1073944"/>
+          </a:xfrm>
+          <a:prstGeom prst="rect">
+            <a:avLst/>
+          </a:prstGeom>
+          <a:solidFill>
+            <a:srgbClr val="F4F8F9"/>
+          </a:solidFill>
+          <a:ln/>
+        </p:spPr>
+        <p:txBody>
+          <a:bodyPr wrap="square" rtlCol="0" anchor="ctr"/>
+          <a:lstStyle/>
+          <a:p>
+            <a:pPr indent="0" marL="0">
+              <a:buNone/>
+            </a:pPr>
+            <a:endParaRPr lang="en-US" dirty="0"/>
+          </a:p>
+        </p:txBody>
+      </p:sp>
+      <p:sp>
+        <p:nvSpPr>
+          <p:cNvPr id="5" name="Shape 3"/>
+          <p:cNvSpPr/>
+          <p:nvPr/>
+        </p:nvSpPr>
+        <p:spPr>
+          <a:xfrm>
+            <a:off x="434876" y="883593"/>
+            <a:ext cx="0" cy="1073944"/>
+          </a:xfrm>
+          <a:prstGeom prst="line">
+            <a:avLst/>
+          </a:prstGeom>
+          <a:noFill/>
+          <a:ln w="57150">
+            <a:solidFill>
+              <a:srgbClr val="FE4447"/>
+            </a:solidFill>
+            <a:prstDash val="solid"/>
+          </a:ln>
+        </p:spPr>
+      </p:sp>
+      <p:sp>
+        <p:nvSpPr>
+          <p:cNvPr id="6" name="Text 4"/>
+          <p:cNvSpPr/>
+          <p:nvPr/>
+        </p:nvSpPr>
+        <p:spPr>
+          <a:xfrm>
+            <a:off x="692051" y="1074093"/>
+            <a:ext cx="7973389" cy="692944"/>
+          </a:xfrm>
+          <a:prstGeom prst="rect">
+            <a:avLst/>
+          </a:prstGeom>
+          <a:noFill/>
+          <a:ln/>
+        </p:spPr>
+        <p:txBody>
+          <a:bodyPr wrap="square" lIns="0" tIns="0" rIns="0" bIns="0" rtlCol="0" anchor="t"/>
+          <a:lstStyle/>
+          <a:p>
+            <a:pPr algn="l" indent="0" marL="0">
+              <a:lnSpc>
+                <a:spcPts val="1820"/>
+              </a:lnSpc>
+              <a:spcBef>
+                <a:spcPts val="300"/>
+              </a:spcBef>
+              <a:spcAft>
+                <a:spcPts val="300"/>
+              </a:spcAft>
+              <a:buNone/>
+            </a:pPr>
+            <a:r>
+              <a:rPr lang="en-US" sz="1300" dirty="0">
+                <a:solidFill>
+                  <a:srgbClr val="1C2833"/>
+                </a:solidFill>
+                <a:latin typeface="Georgia" pitchFamily="34" charset="0"/>
+                <a:ea typeface="Georgia" pitchFamily="34" charset="-122"/>
+                <a:cs typeface="Georgia" pitchFamily="34" charset="-120"/>
+              </a:rPr>
+              <a:t>"</a:t>
+            </a:r>
+            <a:pPr algn="l" indent="0" marL="0">
+              <a:lnSpc>
+                <a:spcPts val="1820"/>
+              </a:lnSpc>
+              <a:spcBef>
+                <a:spcPts val="300"/>
+              </a:spcBef>
+              <a:spcAft>
+                <a:spcPts val="300"/>
+              </a:spcAft>
+              <a:buNone/>
+            </a:pPr>
+            <a:r>
+              <a:rPr lang="en-US" sz="1300" i="1" dirty="0">
+                <a:solidFill>
+                  <a:srgbClr val="1C2833"/>
+                </a:solidFill>
+                <a:latin typeface="Georgia" pitchFamily="34" charset="0"/>
+                <a:ea typeface="Georgia" pitchFamily="34" charset="-122"/>
+                <a:cs typeface="Georgia" pitchFamily="34" charset="-120"/>
+              </a:rPr>
+              <a:t>mṛdutvaṁ kaṭhinatvaṁ ca śaityam uṣṇatvam eva ca / etat sparśasya sparśatvaṁ tanmātratvaṁ nabhasvataḥ</a:t>
+            </a:r>
+            <a:pPr algn="l" indent="0" marL="0">
+              <a:lnSpc>
+                <a:spcPts val="1820"/>
+              </a:lnSpc>
+              <a:spcBef>
+                <a:spcPts val="300"/>
+              </a:spcBef>
+              <a:spcAft>
+                <a:spcPts val="300"/>
+              </a:spcAft>
+              <a:buNone/>
+            </a:pPr>
+            <a:r>
+              <a:rPr lang="en-US" sz="1300" dirty="0">
+                <a:solidFill>
+                  <a:srgbClr val="1C2833"/>
+                </a:solidFill>
+                <a:latin typeface="Georgia" pitchFamily="34" charset="0"/>
+                <a:ea typeface="Georgia" pitchFamily="34" charset="-122"/>
+                <a:cs typeface="Georgia" pitchFamily="34" charset="-120"/>
+              </a:rPr>
+              <a:t>" "Softness, hardness, cold and heat — these are the qualities of touch, which is the subtle attribute (</a:t>
+            </a:r>
+            <a:pPr algn="l" indent="0" marL="0">
+              <a:lnSpc>
+                <a:spcPts val="1820"/>
+              </a:lnSpc>
+              <a:spcBef>
+                <a:spcPts val="300"/>
+              </a:spcBef>
+              <a:spcAft>
+                <a:spcPts val="300"/>
+              </a:spcAft>
+              <a:buNone/>
+            </a:pPr>
+            <a:r>
+              <a:rPr lang="en-US" sz="1300" i="1" dirty="0">
+                <a:solidFill>
+                  <a:srgbClr val="1C2833"/>
+                </a:solidFill>
+                <a:latin typeface="Georgia" pitchFamily="34" charset="0"/>
+                <a:ea typeface="Georgia" pitchFamily="34" charset="-122"/>
+                <a:cs typeface="Georgia" pitchFamily="34" charset="-120"/>
+              </a:rPr>
+              <a:t>tanmātra</a:t>
+            </a:r>
+            <a:pPr algn="l" indent="0" marL="0">
+              <a:lnSpc>
+                <a:spcPts val="1820"/>
+              </a:lnSpc>
+              <a:spcBef>
+                <a:spcPts val="300"/>
+              </a:spcBef>
+              <a:spcAft>
+                <a:spcPts val="300"/>
+              </a:spcAft>
+              <a:buNone/>
+            </a:pPr>
+            <a:r>
+              <a:rPr lang="en-US" sz="1300" dirty="0">
+                <a:solidFill>
+                  <a:srgbClr val="1C2833"/>
+                </a:solidFill>
+                <a:latin typeface="Georgia" pitchFamily="34" charset="0"/>
+                <a:ea typeface="Georgia" pitchFamily="34" charset="-122"/>
+                <a:cs typeface="Georgia" pitchFamily="34" charset="-120"/>
+              </a:rPr>
+              <a:t>) of air (</a:t>
+            </a:r>
+            <a:pPr algn="l" indent="0" marL="0">
+              <a:lnSpc>
+                <a:spcPts val="1820"/>
+              </a:lnSpc>
+              <a:spcBef>
+                <a:spcPts val="300"/>
+              </a:spcBef>
+              <a:spcAft>
+                <a:spcPts val="300"/>
+              </a:spcAft>
+              <a:buNone/>
+            </a:pPr>
+            <a:r>
+              <a:rPr lang="en-US" sz="1300" i="1" dirty="0">
+                <a:solidFill>
+                  <a:srgbClr val="1C2833"/>
+                </a:solidFill>
+                <a:latin typeface="Georgia" pitchFamily="34" charset="0"/>
+                <a:ea typeface="Georgia" pitchFamily="34" charset="-122"/>
+                <a:cs typeface="Georgia" pitchFamily="34" charset="-120"/>
+              </a:rPr>
+              <a:t>nabhasvat</a:t>
+            </a:r>
+            <a:pPr algn="l" indent="0" marL="0">
+              <a:lnSpc>
+                <a:spcPts val="1820"/>
+              </a:lnSpc>
+              <a:spcBef>
+                <a:spcPts val="300"/>
+              </a:spcBef>
+              <a:spcAft>
+                <a:spcPts val="300"/>
+              </a:spcAft>
+              <a:buNone/>
+            </a:pPr>
+            <a:r>
+              <a:rPr lang="en-US" sz="1300" dirty="0">
+                <a:solidFill>
+                  <a:srgbClr val="1C2833"/>
+                </a:solidFill>
+                <a:latin typeface="Georgia" pitchFamily="34" charset="0"/>
+                <a:ea typeface="Georgia" pitchFamily="34" charset="-122"/>
+                <a:cs typeface="Georgia" pitchFamily="34" charset="-120"/>
+              </a:rPr>
+              <a:t>)." — Śrīmad-Bhāgavatam 3.26.36</a:t>
+            </a:r>
+            <a:endParaRPr lang="en-US" sz="1300" dirty="0"/>
+          </a:p>
+        </p:txBody>
+      </p:sp>
+      <p:sp>
+        <p:nvSpPr>
+          <p:cNvPr id="7" name="Text 5"/>
+          <p:cNvSpPr/>
+          <p:nvPr/>
+        </p:nvSpPr>
+        <p:spPr>
+          <a:xfrm>
+            <a:off x="406301" y="2046387"/>
             <a:ext cx="8498026" cy="426541"/>
           </a:xfrm>
           <a:prstGeom prst="rect">
@@ -2523,7 +3154,7 @@
                 <a:ea typeface="Arial" pitchFamily="34" charset="-122"/>
                 <a:cs typeface="Arial" pitchFamily="34" charset="-120"/>
               </a:rPr>
-              <a:t>– For each of your three home-objects (which you'll bring on Day 4), figure out the </a:t>
+              <a:t>"Notice what the </a:t>
             </a:r>
             <a:pPr algn="l" indent="0" marL="0">
               <a:lnSpc>
@@ -2546,7 +3177,7 @@
                 <a:ea typeface="Arial" pitchFamily="34" charset="-122"/>
                 <a:cs typeface="Arial" pitchFamily="34" charset="-120"/>
               </a:rPr>
-              <a:t>dominant</a:t>
+              <a:t>tanmātra</a:t>
             </a:r>
             <a:pPr algn="l" indent="0" marL="0">
               <a:lnSpc>
@@ -2569,7 +3200,7 @@
                 <a:ea typeface="Arial" pitchFamily="34" charset="-122"/>
                 <a:cs typeface="Arial" pitchFamily="34" charset="-120"/>
               </a:rPr>
-              <a:t> element and the </a:t>
+              <a:t> of touch is — not just 'softness' but also 'cold and heat.' The tradition is sorting </a:t>
             </a:r>
             <a:pPr algn="l" indent="0" marL="0">
               <a:lnSpc>
@@ -2592,7 +3223,7 @@
                 <a:ea typeface="Arial" pitchFamily="34" charset="-122"/>
                 <a:cs typeface="Arial" pitchFamily="34" charset="-120"/>
               </a:rPr>
-              <a:t>dominant tanmātra</a:t>
+              <a:t>physical sensations</a:t>
             </a:r>
             <a:pPr algn="l" indent="0" marL="0">
               <a:lnSpc>
@@ -2615,7 +3246,7 @@
                 <a:ea typeface="Arial" pitchFamily="34" charset="-122"/>
                 <a:cs typeface="Arial" pitchFamily="34" charset="-120"/>
               </a:rPr>
-              <a:t>. Write one line per object.</a:t>
+              <a:t> into the air-element bucket. Does that surprise you?"</a:t>
             </a:r>
             <a:endParaRPr lang="en-US" sz="1200" dirty="0"/>
           </a:p>
@@ -2623,7 +3254,7 @@
       </p:sp>
       <p:sp>
         <p:nvSpPr>
-          <p:cNvPr id="5" name="Text 3"/>
+          <p:cNvPr id="8" name="Text 6"/>
           <p:cNvSpPr/>
           <p:nvPr/>
         </p:nvSpPr>
@@ -2773,7 +3404,7 @@
                 <a:ea typeface="Georgia" pitchFamily="34" charset="-122"/>
                 <a:cs typeface="Georgia" pitchFamily="34" charset="-120"/>
               </a:rPr>
-              <a:t>Differentiation</a:t>
+              <a:t>Core (20 min) (cont.)</a:t>
             </a:r>
             <a:endParaRPr lang="en-US" sz="1800" dirty="0"/>
           </a:p>
@@ -2788,7 +3419,7 @@
         <p:spPr>
           <a:xfrm>
             <a:off x="634901" y="883593"/>
-            <a:ext cx="8102798" cy="937022"/>
+            <a:ext cx="8102798" cy="281880"/>
           </a:xfrm>
           <a:prstGeom prst="rect">
             <a:avLst/>
@@ -2819,70 +3450,32 @@
                 <a:ea typeface="Arial" pitchFamily="34" charset="-122"/>
                 <a:cs typeface="Arial" pitchFamily="34" charset="-120"/>
               </a:rPr>
-              <a:t>One tier up:</a:t>
-            </a:r>
-            <a:pPr algn="l" indent="0" marL="0">
-              <a:lnSpc>
-                <a:spcPts val="1620"/>
-              </a:lnSpc>
-              <a:spcAft>
-                <a:spcPts val="300"/>
-              </a:spcAft>
-              <a:buNone/>
-            </a:pPr>
-            <a:r>
-              <a:rPr lang="en-US" sz="1200" dirty="0">
-                <a:solidFill>
-                  <a:srgbClr val="1C2833"/>
-                </a:solidFill>
-                <a:latin typeface="Arial" pitchFamily="34" charset="0"/>
-                <a:ea typeface="Arial" pitchFamily="34" charset="-122"/>
-                <a:cs typeface="Arial" pitchFamily="34" charset="-120"/>
-              </a:rPr>
-              <a:t> What about ultrasonic sound (above 20,000 Hz) — humans can't hear it, but bats can. Does it still belong to </a:t>
-            </a:r>
-            <a:pPr algn="l" indent="0" marL="0">
-              <a:lnSpc>
-                <a:spcPts val="1620"/>
-              </a:lnSpc>
-              <a:spcAft>
-                <a:spcPts val="300"/>
-              </a:spcAft>
-              <a:buNone/>
-            </a:pPr>
-            <a:r>
-              <a:rPr lang="en-US" sz="1200" i="1" dirty="0">
-                <a:solidFill>
-                  <a:srgbClr val="1C2833"/>
-                </a:solidFill>
-                <a:latin typeface="Arial" pitchFamily="34" charset="0"/>
-                <a:ea typeface="Arial" pitchFamily="34" charset="-122"/>
-                <a:cs typeface="Arial" pitchFamily="34" charset="-120"/>
-              </a:rPr>
-              <a:t>ākāśa</a:t>
-            </a:r>
-            <a:pPr algn="l" indent="0" marL="0">
-              <a:lnSpc>
-                <a:spcPts val="1620"/>
-              </a:lnSpc>
-              <a:spcAft>
-                <a:spcPts val="300"/>
-              </a:spcAft>
-              <a:buNone/>
-            </a:pPr>
-            <a:r>
-              <a:rPr lang="en-US" sz="1200" dirty="0">
-                <a:solidFill>
-                  <a:srgbClr val="1C2833"/>
-                </a:solidFill>
-                <a:latin typeface="Arial" pitchFamily="34" charset="0"/>
-                <a:ea typeface="Arial" pitchFamily="34" charset="-122"/>
-                <a:cs typeface="Arial" pitchFamily="34" charset="-120"/>
-              </a:rPr>
-              <a:t>? What about magnetic fields, which no human sense can detect directly?</a:t>
+              <a:t>Modern parallel (one sentence each, no deep dive yet — that's Day 6):</a:t>
             </a:r>
             <a:endParaRPr lang="en-US" sz="1200" dirty="0"/>
           </a:p>
+        </p:txBody>
+      </p:sp>
+      <p:sp>
+        <p:nvSpPr>
+          <p:cNvPr id="5" name="Text 3"/>
+          <p:cNvSpPr/>
+          <p:nvPr/>
+        </p:nvSpPr>
+        <p:spPr>
+          <a:xfrm>
+            <a:off x="634901" y="1266974"/>
+            <a:ext cx="8102798" cy="1142702"/>
+          </a:xfrm>
+          <a:prstGeom prst="rect">
+            <a:avLst/>
+          </a:prstGeom>
+          <a:noFill/>
+          <a:ln/>
+        </p:spPr>
+        <p:txBody>
+          <a:bodyPr wrap="square" lIns="0" tIns="0" rIns="0" bIns="0" rtlCol="0" anchor="t"/>
+          <a:lstStyle/>
           <a:p>
             <a:pPr algn="l" marL="342900" indent="-342900">
               <a:lnSpc>
@@ -2895,26 +3488,6 @@
               <a:buChar char="•"/>
             </a:pPr>
             <a:r>
-              <a:rPr lang="en-US" sz="1200" b="1" dirty="0">
-                <a:solidFill>
-                  <a:srgbClr val="1C2833"/>
-                </a:solidFill>
-                <a:latin typeface="Arial" pitchFamily="34" charset="0"/>
-                <a:ea typeface="Arial" pitchFamily="34" charset="-122"/>
-                <a:cs typeface="Arial" pitchFamily="34" charset="-120"/>
-              </a:rPr>
-              <a:t>One tier down:</a:t>
-            </a:r>
-            <a:pPr algn="l" indent="0" marL="0">
-              <a:lnSpc>
-                <a:spcPts val="1620"/>
-              </a:lnSpc>
-              <a:spcAft>
-                <a:spcPts val="300"/>
-              </a:spcAft>
-              <a:buNone/>
-            </a:pPr>
-            <a:r>
               <a:rPr lang="en-US" sz="1200" dirty="0">
                 <a:solidFill>
                   <a:srgbClr val="1C2833"/>
@@ -2923,15 +3496,79 @@
                 <a:ea typeface="Arial" pitchFamily="34" charset="-122"/>
                 <a:cs typeface="Arial" pitchFamily="34" charset="-120"/>
               </a:rPr>
-              <a:t> Focus on memorising the table. The "why does this match the order of creation?" question can come later.</a:t>
+              <a:t>Modern physiology: sound = pressure waves transmitted through a medium → ear drum. Touch = mechanoreceptors in skin. Form = light reflected off objects → retina. Taste = chemical receptors on tongue. Smell = airborne molecules → olfactory receptors.</a:t>
             </a:r>
             <a:endParaRPr lang="en-US" sz="1200" dirty="0"/>
           </a:p>
-        </p:txBody>
-      </p:sp>
-      <p:sp>
-        <p:nvSpPr>
-          <p:cNvPr id="5" name="Text 3"/>
+          <a:p>
+            <a:pPr algn="l" marL="342900" indent="-342900">
+              <a:lnSpc>
+                <a:spcPts val="1620"/>
+              </a:lnSpc>
+              <a:spcAft>
+                <a:spcPts val="300"/>
+              </a:spcAft>
+              <a:buSzPct val="100000"/>
+              <a:buChar char="•"/>
+            </a:pPr>
+            <a:r>
+              <a:rPr lang="en-US" sz="1200" dirty="0">
+                <a:solidFill>
+                  <a:srgbClr val="1C2833"/>
+                </a:solidFill>
+                <a:latin typeface="Arial" pitchFamily="34" charset="0"/>
+                <a:ea typeface="Arial" pitchFamily="34" charset="-122"/>
+                <a:cs typeface="Arial" pitchFamily="34" charset="-120"/>
+              </a:rPr>
+              <a:t>Both systems are sorting our perception. The Indian system asks "what kind of </a:t>
+            </a:r>
+            <a:pPr algn="l" indent="0" marL="0">
+              <a:lnSpc>
+                <a:spcPts val="1620"/>
+              </a:lnSpc>
+              <a:spcAft>
+                <a:spcPts val="300"/>
+              </a:spcAft>
+              <a:buNone/>
+            </a:pPr>
+            <a:r>
+              <a:rPr lang="en-US" sz="1200" i="1" dirty="0">
+                <a:solidFill>
+                  <a:srgbClr val="1C2833"/>
+                </a:solidFill>
+                <a:latin typeface="Arial" pitchFamily="34" charset="0"/>
+                <a:ea typeface="Arial" pitchFamily="34" charset="-122"/>
+                <a:cs typeface="Arial" pitchFamily="34" charset="-120"/>
+              </a:rPr>
+              <a:t>stuff</a:t>
+            </a:r>
+            <a:pPr algn="l" indent="0" marL="0">
+              <a:lnSpc>
+                <a:spcPts val="1620"/>
+              </a:lnSpc>
+              <a:spcAft>
+                <a:spcPts val="300"/>
+              </a:spcAft>
+              <a:buNone/>
+            </a:pPr>
+            <a:r>
+              <a:rPr lang="en-US" sz="1200" dirty="0">
+                <a:solidFill>
+                  <a:srgbClr val="1C2833"/>
+                </a:solidFill>
+                <a:latin typeface="Arial" pitchFamily="34" charset="0"/>
+                <a:ea typeface="Arial" pitchFamily="34" charset="-122"/>
+                <a:cs typeface="Arial" pitchFamily="34" charset="-120"/>
+              </a:rPr>
+              <a:t> does this perception live in?" Modern science asks "what physical process produces this perception?"</a:t>
+            </a:r>
+            <a:endParaRPr lang="en-US" sz="1200" dirty="0"/>
+          </a:p>
+        </p:txBody>
+      </p:sp>
+      <p:sp>
+        <p:nvSpPr>
+          <p:cNvPr id="6" name="Text 4"/>
           <p:cNvSpPr/>
           <p:nvPr/>
         </p:nvSpPr>
@@ -3081,7 +3718,7 @@
                 <a:ea typeface="Georgia" pitchFamily="34" charset="-122"/>
                 <a:cs typeface="Georgia" pitchFamily="34" charset="-120"/>
               </a:rPr>
-              <a:t>Teacher notes</a:t>
+              <a:t>Activity (15 min) — Sense Station Rotation</a:t>
             </a:r>
             <a:endParaRPr lang="en-US" sz="1800" dirty="0"/>
           </a:p>
@@ -3095,8 +3732,8 @@
         </p:nvSpPr>
         <p:spPr>
           <a:xfrm>
-            <a:off x="406301" y="870942"/>
-            <a:ext cx="8498026" cy="1066354"/>
+            <a:off x="634901" y="883593"/>
+            <a:ext cx="8102798" cy="1013222"/>
           </a:xfrm>
           <a:prstGeom prst="rect">
             <a:avLst/>
@@ -3108,17 +3745,15 @@
           <a:bodyPr wrap="square" lIns="0" tIns="0" rIns="0" bIns="0" rtlCol="0" anchor="t"/>
           <a:lstStyle/>
           <a:p>
-            <a:pPr algn="l" indent="0" marL="0">
-              <a:lnSpc>
-                <a:spcPts val="1680"/>
-              </a:lnSpc>
-              <a:spcBef>
-                <a:spcPts val="300"/>
-              </a:spcBef>
-              <a:spcAft>
-                <a:spcPts val="300"/>
-              </a:spcAft>
-              <a:buNone/>
+            <a:pPr algn="l" marL="342900" indent="-342900">
+              <a:lnSpc>
+                <a:spcPts val="1620"/>
+              </a:lnSpc>
+              <a:spcAft>
+                <a:spcPts val="300"/>
+              </a:spcAft>
+              <a:buSzPct val="100000"/>
+              <a:buChar char="•"/>
             </a:pPr>
             <a:r>
               <a:rPr lang="en-US" sz="1200" dirty="0">
@@ -3129,42 +3764,20 @@
                 <a:ea typeface="Arial" pitchFamily="34" charset="-122"/>
                 <a:cs typeface="Arial" pitchFamily="34" charset="-120"/>
               </a:rPr>
-              <a:t>– Some students will challenge "fire = form/colour." Walk them through: the </a:t>
-            </a:r>
-            <a:pPr algn="l" indent="0" marL="0">
-              <a:lnSpc>
-                <a:spcPts val="1680"/>
-              </a:lnSpc>
-              <a:spcBef>
-                <a:spcPts val="300"/>
-              </a:spcBef>
-              <a:spcAft>
-                <a:spcPts val="300"/>
-              </a:spcAft>
-              <a:buNone/>
-            </a:pPr>
-            <a:r>
-              <a:rPr lang="en-US" sz="1200" i="1" dirty="0">
-                <a:solidFill>
-                  <a:srgbClr val="1C2833"/>
-                </a:solidFill>
-                <a:latin typeface="Arial" pitchFamily="34" charset="0"/>
-                <a:ea typeface="Arial" pitchFamily="34" charset="-122"/>
-                <a:cs typeface="Arial" pitchFamily="34" charset="-120"/>
-              </a:rPr>
-              <a:t>defining</a:t>
-            </a:r>
-            <a:pPr algn="l" indent="0" marL="0">
-              <a:lnSpc>
-                <a:spcPts val="1680"/>
-              </a:lnSpc>
-              <a:spcBef>
-                <a:spcPts val="300"/>
-              </a:spcBef>
-              <a:spcAft>
-                <a:spcPts val="300"/>
-              </a:spcAft>
-              <a:buNone/>
+              <a:t>5 stations around the room (or 5 desks, one per element). Each has:</a:t>
+            </a:r>
+            <a:endParaRPr lang="en-US" sz="1200" dirty="0"/>
+          </a:p>
+          <a:p>
+            <a:pPr algn="l" marL="342900" indent="-342900">
+              <a:lnSpc>
+                <a:spcPts val="1620"/>
+              </a:lnSpc>
+              <a:spcAft>
+                <a:spcPts val="300"/>
+              </a:spcAft>
+              <a:buSzPct val="100000"/>
+              <a:buChar char="•"/>
             </a:pPr>
             <a:r>
               <a:rPr lang="en-US" sz="1200" dirty="0">
@@ -3175,42 +3788,20 @@
                 <a:ea typeface="Arial" pitchFamily="34" charset="-122"/>
                 <a:cs typeface="Arial" pitchFamily="34" charset="-120"/>
               </a:rPr>
-              <a:t> perception of fire is what we </a:t>
-            </a:r>
-            <a:pPr algn="l" indent="0" marL="0">
-              <a:lnSpc>
-                <a:spcPts val="1680"/>
-              </a:lnSpc>
-              <a:spcBef>
-                <a:spcPts val="300"/>
-              </a:spcBef>
-              <a:spcAft>
-                <a:spcPts val="300"/>
-              </a:spcAft>
-              <a:buNone/>
-            </a:pPr>
-            <a:r>
-              <a:rPr lang="en-US" sz="1200" i="1" dirty="0">
-                <a:solidFill>
-                  <a:srgbClr val="1C2833"/>
-                </a:solidFill>
-                <a:latin typeface="Arial" pitchFamily="34" charset="0"/>
-                <a:ea typeface="Arial" pitchFamily="34" charset="-122"/>
-                <a:cs typeface="Arial" pitchFamily="34" charset="-120"/>
-              </a:rPr>
-              <a:t>see</a:t>
-            </a:r>
-            <a:pPr algn="l" indent="0" marL="0">
-              <a:lnSpc>
-                <a:spcPts val="1680"/>
-              </a:lnSpc>
-              <a:spcBef>
-                <a:spcPts val="300"/>
-              </a:spcBef>
-              <a:spcAft>
-                <a:spcPts val="300"/>
-              </a:spcAft>
-              <a:buNone/>
+              <a:t>A label (Sanskrit + English + tanmātra + sense organ)</a:t>
+            </a:r>
+            <a:endParaRPr lang="en-US" sz="1200" dirty="0"/>
+          </a:p>
+          <a:p>
+            <a:pPr algn="l" marL="342900" indent="-342900">
+              <a:lnSpc>
+                <a:spcPts val="1620"/>
+              </a:lnSpc>
+              <a:spcAft>
+                <a:spcPts val="300"/>
+              </a:spcAft>
+              <a:buSzPct val="100000"/>
+              <a:buChar char="•"/>
             </a:pPr>
             <a:r>
               <a:rPr lang="en-US" sz="1200" dirty="0">
@@ -3221,42 +3812,20 @@
                 <a:ea typeface="Arial" pitchFamily="34" charset="-122"/>
                 <a:cs typeface="Arial" pitchFamily="34" charset="-120"/>
               </a:rPr>
-              <a:t> — light, colour. We feel heat from fire, but that's borrowed from </a:t>
-            </a:r>
-            <a:pPr algn="l" indent="0" marL="0">
-              <a:lnSpc>
-                <a:spcPts val="1680"/>
-              </a:lnSpc>
-              <a:spcBef>
-                <a:spcPts val="300"/>
-              </a:spcBef>
-              <a:spcAft>
-                <a:spcPts val="300"/>
-              </a:spcAft>
-              <a:buNone/>
-            </a:pPr>
-            <a:r>
-              <a:rPr lang="en-US" sz="1200" i="1" dirty="0">
-                <a:solidFill>
-                  <a:srgbClr val="1C2833"/>
-                </a:solidFill>
-                <a:latin typeface="Arial" pitchFamily="34" charset="0"/>
-                <a:ea typeface="Arial" pitchFamily="34" charset="-122"/>
-                <a:cs typeface="Arial" pitchFamily="34" charset="-120"/>
-              </a:rPr>
-              <a:t>vāyu</a:t>
-            </a:r>
-            <a:pPr algn="l" indent="0" marL="0">
-              <a:lnSpc>
-                <a:spcPts val="1680"/>
-              </a:lnSpc>
-              <a:spcBef>
-                <a:spcPts val="300"/>
-              </a:spcBef>
-              <a:spcAft>
-                <a:spcPts val="300"/>
-              </a:spcAft>
-              <a:buNone/>
+              <a:t>A small sample to perceive (see materials list)</a:t>
+            </a:r>
+            <a:endParaRPr lang="en-US" sz="1200" dirty="0"/>
+          </a:p>
+          <a:p>
+            <a:pPr algn="l" marL="342900" indent="-342900">
+              <a:lnSpc>
+                <a:spcPts val="1620"/>
+              </a:lnSpc>
+              <a:spcAft>
+                <a:spcPts val="300"/>
+              </a:spcAft>
+              <a:buSzPct val="100000"/>
+              <a:buChar char="•"/>
             </a:pPr>
             <a:r>
               <a:rPr lang="en-US" sz="1200" dirty="0">
@@ -3267,42 +3836,42 @@
                 <a:ea typeface="Arial" pitchFamily="34" charset="-122"/>
                 <a:cs typeface="Arial" pitchFamily="34" charset="-120"/>
               </a:rPr>
-              <a:t>'s tanmātra of touch (heat). The mapping is about the </a:t>
-            </a:r>
-            <a:pPr algn="l" indent="0" marL="0">
-              <a:lnSpc>
-                <a:spcPts val="1680"/>
-              </a:lnSpc>
-              <a:spcBef>
-                <a:spcPts val="300"/>
-              </a:spcBef>
-              <a:spcAft>
-                <a:spcPts val="300"/>
-              </a:spcAft>
-              <a:buNone/>
-            </a:pPr>
-            <a:r>
-              <a:rPr lang="en-US" sz="1200" i="1" dirty="0">
-                <a:solidFill>
-                  <a:srgbClr val="1C2833"/>
-                </a:solidFill>
-                <a:latin typeface="Arial" pitchFamily="34" charset="0"/>
-                <a:ea typeface="Arial" pitchFamily="34" charset="-122"/>
-                <a:cs typeface="Arial" pitchFamily="34" charset="-120"/>
-              </a:rPr>
-              <a:t>new</a:t>
-            </a:r>
-            <a:pPr algn="l" indent="0" marL="0">
-              <a:lnSpc>
-                <a:spcPts val="1680"/>
-              </a:lnSpc>
-              <a:spcBef>
-                <a:spcPts val="300"/>
-              </a:spcBef>
-              <a:spcAft>
-                <a:spcPts val="300"/>
-              </a:spcAft>
-              <a:buNone/>
+              <a:t>A worksheet question</a:t>
+            </a:r>
+            <a:endParaRPr lang="en-US" sz="1200" dirty="0"/>
+          </a:p>
+        </p:txBody>
+      </p:sp>
+      <p:sp>
+        <p:nvSpPr>
+          <p:cNvPr id="5" name="Text 3"/>
+          <p:cNvSpPr/>
+          <p:nvPr/>
+        </p:nvSpPr>
+        <p:spPr>
+          <a:xfrm>
+            <a:off x="634901" y="1998315"/>
+            <a:ext cx="8102798" cy="281880"/>
+          </a:xfrm>
+          <a:prstGeom prst="rect">
+            <a:avLst/>
+          </a:prstGeom>
+          <a:noFill/>
+          <a:ln/>
+        </p:spPr>
+        <p:txBody>
+          <a:bodyPr wrap="square" lIns="0" tIns="0" rIns="0" bIns="0" rtlCol="0" anchor="t"/>
+          <a:lstStyle/>
+          <a:p>
+            <a:pPr algn="l" marL="342900" indent="-342900">
+              <a:lnSpc>
+                <a:spcPts val="1620"/>
+              </a:lnSpc>
+              <a:spcAft>
+                <a:spcPts val="300"/>
+              </a:spcAft>
+              <a:buSzPct val="100000"/>
+              <a:buChar char="•"/>
             </a:pPr>
             <a:r>
               <a:rPr lang="en-US" sz="1200" dirty="0">
@@ -3313,7 +3882,7 @@
                 <a:ea typeface="Arial" pitchFamily="34" charset="-122"/>
                 <a:cs typeface="Arial" pitchFamily="34" charset="-120"/>
               </a:rPr>
-              <a:t> quality each element introduces. – Watch for the smell-station: students will spend most of their time there. That's fine. Give them 30 extra seconds and pull them along. – If using jaggery / sweets — check for diabetic students. Substitute with salt or a non-edible smell-only sample.</a:t>
+              <a:t>Students work in pairs. 2 minutes per station. They rotate clockwise.</a:t>
             </a:r>
             <a:endParaRPr lang="en-US" sz="1200" dirty="0"/>
           </a:p>
@@ -3321,7 +3890,7 @@
       </p:sp>
       <p:sp>
         <p:nvSpPr>
-          <p:cNvPr id="5" name="Text 3"/>
+          <p:cNvPr id="6" name="Text 4"/>
           <p:cNvSpPr/>
           <p:nvPr/>
         </p:nvSpPr>
@@ -3471,6 +4040,2557 @@
                 <a:ea typeface="Georgia" pitchFamily="34" charset="-122"/>
                 <a:cs typeface="Georgia" pitchFamily="34" charset="-120"/>
               </a:rPr>
+              <a:t>Activity (15 min) — Sense Station Rotation (cont.)</a:t>
+            </a:r>
+            <a:endParaRPr lang="en-US" sz="1800" dirty="0"/>
+          </a:p>
+        </p:txBody>
+      </p:sp>
+      <p:sp>
+        <p:nvSpPr>
+          <p:cNvPr id="4" name="Text 2"/>
+          <p:cNvSpPr/>
+          <p:nvPr/>
+        </p:nvSpPr>
+        <p:spPr>
+          <a:xfrm>
+            <a:off x="634901" y="883593"/>
+            <a:ext cx="8102798" cy="487561"/>
+          </a:xfrm>
+          <a:prstGeom prst="rect">
+            <a:avLst/>
+          </a:prstGeom>
+          <a:noFill/>
+          <a:ln/>
+        </p:spPr>
+        <p:txBody>
+          <a:bodyPr wrap="square" lIns="0" tIns="0" rIns="0" bIns="0" rtlCol="0" anchor="t"/>
+          <a:lstStyle/>
+          <a:p>
+            <a:pPr algn="l" marL="342900" indent="-342900">
+              <a:lnSpc>
+                <a:spcPts val="1620"/>
+              </a:lnSpc>
+              <a:spcAft>
+                <a:spcPts val="300"/>
+              </a:spcAft>
+              <a:buSzPct val="100000"/>
+              <a:buChar char="•"/>
+            </a:pPr>
+            <a:r>
+              <a:rPr lang="en-US" sz="1200" dirty="0">
+                <a:solidFill>
+                  <a:srgbClr val="1C2833"/>
+                </a:solidFill>
+                <a:latin typeface="Arial" pitchFamily="34" charset="0"/>
+                <a:ea typeface="Arial" pitchFamily="34" charset="-122"/>
+                <a:cs typeface="Arial" pitchFamily="34" charset="-120"/>
+              </a:rPr>
+              <a:t>At each station, they answer in one sentence: </a:t>
+            </a:r>
+            <a:pPr algn="l" indent="0" marL="0">
+              <a:lnSpc>
+                <a:spcPts val="1620"/>
+              </a:lnSpc>
+              <a:spcAft>
+                <a:spcPts val="300"/>
+              </a:spcAft>
+              <a:buNone/>
+            </a:pPr>
+            <a:r>
+              <a:rPr lang="en-US" sz="1200" i="1" dirty="0">
+                <a:solidFill>
+                  <a:srgbClr val="1C2833"/>
+                </a:solidFill>
+                <a:latin typeface="Arial" pitchFamily="34" charset="0"/>
+                <a:ea typeface="Arial" pitchFamily="34" charset="-122"/>
+                <a:cs typeface="Arial" pitchFamily="34" charset="-120"/>
+              </a:rPr>
+              <a:t>"What did I perceive? What other element could I perceive at the same time?"</a:t>
+            </a:r>
+            <a:pPr algn="l" indent="0" marL="0">
+              <a:lnSpc>
+                <a:spcPts val="1620"/>
+              </a:lnSpc>
+              <a:spcAft>
+                <a:spcPts val="300"/>
+              </a:spcAft>
+              <a:buNone/>
+            </a:pPr>
+            <a:r>
+              <a:rPr lang="en-US" sz="1200" dirty="0">
+                <a:solidFill>
+                  <a:srgbClr val="1C2833"/>
+                </a:solidFill>
+                <a:latin typeface="Arial" pitchFamily="34" charset="0"/>
+                <a:ea typeface="Arial" pitchFamily="34" charset="-122"/>
+                <a:cs typeface="Arial" pitchFamily="34" charset="-120"/>
+              </a:rPr>
+              <a:t> (E.g. at the bell station: heard the sound — also felt the vibration if they touched the bell.)</a:t>
+            </a:r>
+            <a:endParaRPr lang="en-US" sz="1200" dirty="0"/>
+          </a:p>
+        </p:txBody>
+      </p:sp>
+      <p:sp>
+        <p:nvSpPr>
+          <p:cNvPr id="5" name="Text 3"/>
+          <p:cNvSpPr/>
+          <p:nvPr/>
+        </p:nvSpPr>
+        <p:spPr>
+          <a:xfrm>
+            <a:off x="634901" y="1472654"/>
+            <a:ext cx="8102798" cy="487561"/>
+          </a:xfrm>
+          <a:prstGeom prst="rect">
+            <a:avLst/>
+          </a:prstGeom>
+          <a:noFill/>
+          <a:ln/>
+        </p:spPr>
+        <p:txBody>
+          <a:bodyPr wrap="square" lIns="0" tIns="0" rIns="0" bIns="0" rtlCol="0" anchor="t"/>
+          <a:lstStyle/>
+          <a:p>
+            <a:pPr algn="l" marL="342900" indent="-342900">
+              <a:lnSpc>
+                <a:spcPts val="1620"/>
+              </a:lnSpc>
+              <a:spcAft>
+                <a:spcPts val="300"/>
+              </a:spcAft>
+              <a:buSzPct val="100000"/>
+              <a:buChar char="•"/>
+            </a:pPr>
+            <a:r>
+              <a:rPr lang="en-US" sz="1200" b="1" dirty="0">
+                <a:solidFill>
+                  <a:srgbClr val="1C2833"/>
+                </a:solidFill>
+                <a:latin typeface="Arial" pitchFamily="34" charset="0"/>
+                <a:ea typeface="Arial" pitchFamily="34" charset="-122"/>
+                <a:cs typeface="Arial" pitchFamily="34" charset="-120"/>
+              </a:rPr>
+              <a:t>End-of-rotation discussion (3 min):</a:t>
+            </a:r>
+            <a:pPr algn="l" indent="0" marL="0">
+              <a:lnSpc>
+                <a:spcPts val="1620"/>
+              </a:lnSpc>
+              <a:spcAft>
+                <a:spcPts val="300"/>
+              </a:spcAft>
+              <a:buNone/>
+            </a:pPr>
+            <a:r>
+              <a:rPr lang="en-US" sz="1200" dirty="0">
+                <a:solidFill>
+                  <a:srgbClr val="1C2833"/>
+                </a:solidFill>
+                <a:latin typeface="Arial" pitchFamily="34" charset="0"/>
+                <a:ea typeface="Arial" pitchFamily="34" charset="-122"/>
+                <a:cs typeface="Arial" pitchFamily="34" charset="-120"/>
+              </a:rPr>
+              <a:t> Did any sample give you </a:t>
+            </a:r>
+            <a:pPr algn="l" indent="0" marL="0">
+              <a:lnSpc>
+                <a:spcPts val="1620"/>
+              </a:lnSpc>
+              <a:spcAft>
+                <a:spcPts val="300"/>
+              </a:spcAft>
+              <a:buNone/>
+            </a:pPr>
+            <a:r>
+              <a:rPr lang="en-US" sz="1200" i="1" dirty="0">
+                <a:solidFill>
+                  <a:srgbClr val="1C2833"/>
+                </a:solidFill>
+                <a:latin typeface="Arial" pitchFamily="34" charset="0"/>
+                <a:ea typeface="Arial" pitchFamily="34" charset="-122"/>
+                <a:cs typeface="Arial" pitchFamily="34" charset="-120"/>
+              </a:rPr>
+              <a:t>more than one</a:t>
+            </a:r>
+            <a:pPr algn="l" indent="0" marL="0">
+              <a:lnSpc>
+                <a:spcPts val="1620"/>
+              </a:lnSpc>
+              <a:spcAft>
+                <a:spcPts val="300"/>
+              </a:spcAft>
+              <a:buNone/>
+            </a:pPr>
+            <a:r>
+              <a:rPr lang="en-US" sz="1200" dirty="0">
+                <a:solidFill>
+                  <a:srgbClr val="1C2833"/>
+                </a:solidFill>
+                <a:latin typeface="Arial" pitchFamily="34" charset="0"/>
+                <a:ea typeface="Arial" pitchFamily="34" charset="-122"/>
+                <a:cs typeface="Arial" pitchFamily="34" charset="-120"/>
+              </a:rPr>
+              <a:t> perception? Which? What does that tell us about how the elements overlap in the real world?</a:t>
+            </a:r>
+            <a:endParaRPr lang="en-US" sz="1200" dirty="0"/>
+          </a:p>
+        </p:txBody>
+      </p:sp>
+      <p:sp>
+        <p:nvSpPr>
+          <p:cNvPr id="6" name="Text 4"/>
+          <p:cNvSpPr/>
+          <p:nvPr/>
+        </p:nvSpPr>
+        <p:spPr>
+          <a:xfrm>
+            <a:off x="406301" y="4434929"/>
+            <a:ext cx="8498026" cy="213271"/>
+          </a:xfrm>
+          <a:prstGeom prst="rect">
+            <a:avLst/>
+          </a:prstGeom>
+          <a:noFill/>
+          <a:ln/>
+        </p:spPr>
+        <p:txBody>
+          <a:bodyPr wrap="square" lIns="0" tIns="0" rIns="0" bIns="0" rtlCol="0" anchor="t"/>
+          <a:lstStyle/>
+          <a:p>
+            <a:pPr algn="l" indent="0" marL="0">
+              <a:lnSpc>
+                <a:spcPts val="1680"/>
+              </a:lnSpc>
+              <a:spcBef>
+                <a:spcPts val="300"/>
+              </a:spcBef>
+              <a:spcAft>
+                <a:spcPts val="300"/>
+              </a:spcAft>
+              <a:buNone/>
+            </a:pPr>
+            <a:r>
+              <a:rPr lang="en-US" sz="1200" dirty="0">
+                <a:solidFill>
+                  <a:srgbClr val="1C2833"/>
+                </a:solidFill>
+                <a:latin typeface="Arial" pitchFamily="34" charset="0"/>
+                <a:ea typeface="Arial" pitchFamily="34" charset="-122"/>
+                <a:cs typeface="Arial" pitchFamily="34" charset="-120"/>
+              </a:rPr>
+              <a:t>Middle ·  · IKS Curriculum</a:t>
+            </a:r>
+            <a:endParaRPr lang="en-US" sz="1200" dirty="0"/>
+          </a:p>
+        </p:txBody>
+      </p:sp>
+    </p:spTree>
+  </p:cSld>
+  <p:clrMapOvr>
+    <a:masterClrMapping/>
+  </p:clrMapOvr>
+</p:sld>
+</file>
+
+<file path=ppt/slides/slide14.xml><?xml version="1.0" encoding="utf-8"?>
+<p:sld xmlns:a="http://schemas.openxmlformats.org/drawingml/2006/main" xmlns:r="http://schemas.openxmlformats.org/officeDocument/2006/relationships" xmlns:p="http://schemas.openxmlformats.org/presentationml/2006/main">
+  <p:cSld name="Slide 14">
+    <p:bg>
+      <p:bgPr>
+        <a:solidFill>
+          <a:srgbClr val="FFFFFF"/>
+        </a:solidFill>
+      </p:bgPr>
+    </p:bg>
+    <p:spTree>
+      <p:nvGrpSpPr>
+        <p:cNvPr id="1" name=""/>
+        <p:cNvGrpSpPr/>
+        <p:nvPr/>
+      </p:nvGrpSpPr>
+      <p:grpSpPr>
+        <a:xfrm>
+          <a:off x="0" y="0"/>
+          <a:ext cx="0" cy="0"/>
+          <a:chOff x="0" y="0"/>
+          <a:chExt cx="0" cy="0"/>
+        </a:xfrm>
+      </p:grpSpPr>
+      <p:sp>
+        <p:nvSpPr>
+          <p:cNvPr id="2" name="Text 0"/>
+          <p:cNvSpPr/>
+          <p:nvPr/>
+        </p:nvSpPr>
+        <p:spPr>
+          <a:xfrm>
+            <a:off x="0" y="0"/>
+            <a:ext cx="9144000" cy="101501"/>
+          </a:xfrm>
+          <a:prstGeom prst="rect">
+            <a:avLst/>
+          </a:prstGeom>
+          <a:solidFill>
+            <a:srgbClr val="277884"/>
+          </a:solidFill>
+          <a:ln/>
+        </p:spPr>
+        <p:txBody>
+          <a:bodyPr wrap="square" rtlCol="0" anchor="ctr"/>
+          <a:lstStyle/>
+          <a:p>
+            <a:pPr indent="0" marL="0">
+              <a:buNone/>
+            </a:pPr>
+            <a:endParaRPr lang="en-US" dirty="0"/>
+          </a:p>
+        </p:txBody>
+      </p:sp>
+      <p:sp>
+        <p:nvSpPr>
+          <p:cNvPr id="3" name="Text 1"/>
+          <p:cNvSpPr/>
+          <p:nvPr/>
+        </p:nvSpPr>
+        <p:spPr>
+          <a:xfrm>
+            <a:off x="406301" y="457051"/>
+            <a:ext cx="8498026" cy="274290"/>
+          </a:xfrm>
+          <a:prstGeom prst="rect">
+            <a:avLst/>
+          </a:prstGeom>
+          <a:noFill/>
+          <a:ln/>
+        </p:spPr>
+        <p:txBody>
+          <a:bodyPr wrap="square" lIns="0" tIns="0" rIns="0" bIns="0" rtlCol="0" anchor="t"/>
+          <a:lstStyle/>
+          <a:p>
+            <a:pPr algn="l" indent="0" marL="0">
+              <a:lnSpc>
+                <a:spcPts val="2160"/>
+              </a:lnSpc>
+              <a:spcBef>
+                <a:spcPts val="600"/>
+              </a:spcBef>
+              <a:spcAft>
+                <a:spcPts val="800"/>
+              </a:spcAft>
+              <a:buNone/>
+            </a:pPr>
+            <a:r>
+              <a:rPr lang="en-US" sz="1800" b="1" dirty="0">
+                <a:solidFill>
+                  <a:srgbClr val="FE4447"/>
+                </a:solidFill>
+                <a:latin typeface="Georgia" pitchFamily="34" charset="0"/>
+                <a:ea typeface="Georgia" pitchFamily="34" charset="-122"/>
+                <a:cs typeface="Georgia" pitchFamily="34" charset="-120"/>
+              </a:rPr>
+              <a:t>Wrap-up (5 min)</a:t>
+            </a:r>
+            <a:endParaRPr lang="en-US" sz="1800" dirty="0"/>
+          </a:p>
+        </p:txBody>
+      </p:sp>
+      <p:sp>
+        <p:nvSpPr>
+          <p:cNvPr id="4" name="Text 2"/>
+          <p:cNvSpPr/>
+          <p:nvPr/>
+        </p:nvSpPr>
+        <p:spPr>
+          <a:xfrm>
+            <a:off x="634901" y="883593"/>
+            <a:ext cx="8102798" cy="544711"/>
+          </a:xfrm>
+          <a:prstGeom prst="rect">
+            <a:avLst/>
+          </a:prstGeom>
+          <a:noFill/>
+          <a:ln/>
+        </p:spPr>
+        <p:txBody>
+          <a:bodyPr wrap="square" lIns="0" tIns="0" rIns="0" bIns="0" rtlCol="0" anchor="t"/>
+          <a:lstStyle/>
+          <a:p>
+            <a:pPr algn="l" marL="342900" indent="-342900">
+              <a:lnSpc>
+                <a:spcPts val="1620"/>
+              </a:lnSpc>
+              <a:spcAft>
+                <a:spcPts val="300"/>
+              </a:spcAft>
+              <a:buSzPct val="100000"/>
+              <a:buChar char="•"/>
+            </a:pPr>
+            <a:r>
+              <a:rPr lang="en-US" sz="1200" b="1" dirty="0">
+                <a:solidFill>
+                  <a:srgbClr val="1C2833"/>
+                </a:solidFill>
+                <a:latin typeface="Arial" pitchFamily="34" charset="0"/>
+                <a:ea typeface="Arial" pitchFamily="34" charset="-122"/>
+                <a:cs typeface="Arial" pitchFamily="34" charset="-120"/>
+              </a:rPr>
+              <a:t>Formative quiz on a slip of paper (5 questions, 3 min)</a:t>
+            </a:r>
+            <a:pPr algn="l" indent="0" marL="0">
+              <a:lnSpc>
+                <a:spcPts val="1620"/>
+              </a:lnSpc>
+              <a:spcAft>
+                <a:spcPts val="300"/>
+              </a:spcAft>
+              <a:buNone/>
+            </a:pPr>
+            <a:r>
+              <a:rPr lang="en-US" sz="1200" dirty="0">
+                <a:solidFill>
+                  <a:srgbClr val="1C2833"/>
+                </a:solidFill>
+                <a:latin typeface="Arial" pitchFamily="34" charset="0"/>
+                <a:ea typeface="Arial" pitchFamily="34" charset="-122"/>
+                <a:cs typeface="Arial" pitchFamily="34" charset="-120"/>
+              </a:rPr>
+              <a:t> — see </a:t>
+            </a:r>
+            <a:pPr algn="l" indent="0" marL="0">
+              <a:lnSpc>
+                <a:spcPts val="1620"/>
+              </a:lnSpc>
+              <a:spcAft>
+                <a:spcPts val="300"/>
+              </a:spcAft>
+              <a:buNone/>
+            </a:pPr>
+            <a:r>
+              <a:rPr lang="en-US" sz="1200" dirty="0">
+                <a:solidFill>
+                  <a:srgbClr val="1C2833"/>
+                </a:solidFill>
+                <a:latin typeface="Arial" pitchFamily="34" charset="0"/>
+                <a:ea typeface="Arial" pitchFamily="34" charset="-122"/>
+                <a:cs typeface="Arial" pitchFamily="34" charset="-120"/>
+              </a:rPr>
+              <a:t>quizzes/formative.md</a:t>
+            </a:r>
+            <a:pPr algn="l" indent="0" marL="0">
+              <a:lnSpc>
+                <a:spcPts val="1620"/>
+              </a:lnSpc>
+              <a:spcAft>
+                <a:spcPts val="300"/>
+              </a:spcAft>
+              <a:buNone/>
+            </a:pPr>
+            <a:r>
+              <a:rPr lang="en-US" sz="1200" dirty="0">
+                <a:solidFill>
+                  <a:srgbClr val="1C2833"/>
+                </a:solidFill>
+                <a:latin typeface="Arial" pitchFamily="34" charset="0"/>
+                <a:ea typeface="Arial" pitchFamily="34" charset="-122"/>
+                <a:cs typeface="Arial" pitchFamily="34" charset="-120"/>
+              </a:rPr>
+              <a:t> Part A.</a:t>
+            </a:r>
+            <a:endParaRPr lang="en-US" sz="1200" dirty="0"/>
+          </a:p>
+          <a:p>
+            <a:pPr algn="l" marL="342900" indent="-342900">
+              <a:lnSpc>
+                <a:spcPts val="1620"/>
+              </a:lnSpc>
+              <a:spcAft>
+                <a:spcPts val="300"/>
+              </a:spcAft>
+              <a:buSzPct val="100000"/>
+              <a:buChar char="•"/>
+            </a:pPr>
+            <a:r>
+              <a:rPr lang="en-US" sz="1200" dirty="0">
+                <a:solidFill>
+                  <a:srgbClr val="1C2833"/>
+                </a:solidFill>
+                <a:latin typeface="Arial" pitchFamily="34" charset="0"/>
+                <a:ea typeface="Arial" pitchFamily="34" charset="-122"/>
+                <a:cs typeface="Arial" pitchFamily="34" charset="-120"/>
+              </a:rPr>
+              <a:t>Collect for grading; the next day's class includes the result.</a:t>
+            </a:r>
+            <a:endParaRPr lang="en-US" sz="1200" dirty="0"/>
+          </a:p>
+        </p:txBody>
+      </p:sp>
+      <p:sp>
+        <p:nvSpPr>
+          <p:cNvPr id="5" name="Text 3"/>
+          <p:cNvSpPr/>
+          <p:nvPr/>
+        </p:nvSpPr>
+        <p:spPr>
+          <a:xfrm>
+            <a:off x="406301" y="4434929"/>
+            <a:ext cx="8498026" cy="213271"/>
+          </a:xfrm>
+          <a:prstGeom prst="rect">
+            <a:avLst/>
+          </a:prstGeom>
+          <a:noFill/>
+          <a:ln/>
+        </p:spPr>
+        <p:txBody>
+          <a:bodyPr wrap="square" lIns="0" tIns="0" rIns="0" bIns="0" rtlCol="0" anchor="t"/>
+          <a:lstStyle/>
+          <a:p>
+            <a:pPr algn="l" indent="0" marL="0">
+              <a:lnSpc>
+                <a:spcPts val="1680"/>
+              </a:lnSpc>
+              <a:spcBef>
+                <a:spcPts val="300"/>
+              </a:spcBef>
+              <a:spcAft>
+                <a:spcPts val="300"/>
+              </a:spcAft>
+              <a:buNone/>
+            </a:pPr>
+            <a:r>
+              <a:rPr lang="en-US" sz="1200" dirty="0">
+                <a:solidFill>
+                  <a:srgbClr val="1C2833"/>
+                </a:solidFill>
+                <a:latin typeface="Arial" pitchFamily="34" charset="0"/>
+                <a:ea typeface="Arial" pitchFamily="34" charset="-122"/>
+                <a:cs typeface="Arial" pitchFamily="34" charset="-120"/>
+              </a:rPr>
+              <a:t>Middle ·  · IKS Curriculum</a:t>
+            </a:r>
+            <a:endParaRPr lang="en-US" sz="1200" dirty="0"/>
+          </a:p>
+        </p:txBody>
+      </p:sp>
+    </p:spTree>
+  </p:cSld>
+  <p:clrMapOvr>
+    <a:masterClrMapping/>
+  </p:clrMapOvr>
+</p:sld>
+</file>
+
+<file path=ppt/slides/slide15.xml><?xml version="1.0" encoding="utf-8"?>
+<p:sld xmlns:a="http://schemas.openxmlformats.org/drawingml/2006/main" xmlns:r="http://schemas.openxmlformats.org/officeDocument/2006/relationships" xmlns:p="http://schemas.openxmlformats.org/presentationml/2006/main">
+  <p:cSld name="Slide 15">
+    <p:bg>
+      <p:bgPr>
+        <a:solidFill>
+          <a:srgbClr val="FFFFFF"/>
+        </a:solidFill>
+      </p:bgPr>
+    </p:bg>
+    <p:spTree>
+      <p:nvGrpSpPr>
+        <p:cNvPr id="1" name=""/>
+        <p:cNvGrpSpPr/>
+        <p:nvPr/>
+      </p:nvGrpSpPr>
+      <p:grpSpPr>
+        <a:xfrm>
+          <a:off x="0" y="0"/>
+          <a:ext cx="0" cy="0"/>
+          <a:chOff x="0" y="0"/>
+          <a:chExt cx="0" cy="0"/>
+        </a:xfrm>
+      </p:grpSpPr>
+      <p:sp>
+        <p:nvSpPr>
+          <p:cNvPr id="2" name="Text 0"/>
+          <p:cNvSpPr/>
+          <p:nvPr/>
+        </p:nvSpPr>
+        <p:spPr>
+          <a:xfrm>
+            <a:off x="0" y="0"/>
+            <a:ext cx="9144000" cy="101501"/>
+          </a:xfrm>
+          <a:prstGeom prst="rect">
+            <a:avLst/>
+          </a:prstGeom>
+          <a:solidFill>
+            <a:srgbClr val="277884"/>
+          </a:solidFill>
+          <a:ln/>
+        </p:spPr>
+        <p:txBody>
+          <a:bodyPr wrap="square" rtlCol="0" anchor="ctr"/>
+          <a:lstStyle/>
+          <a:p>
+            <a:pPr indent="0" marL="0">
+              <a:buNone/>
+            </a:pPr>
+            <a:endParaRPr lang="en-US" dirty="0"/>
+          </a:p>
+        </p:txBody>
+      </p:sp>
+      <p:sp>
+        <p:nvSpPr>
+          <p:cNvPr id="3" name="Text 1"/>
+          <p:cNvSpPr/>
+          <p:nvPr/>
+        </p:nvSpPr>
+        <p:spPr>
+          <a:xfrm>
+            <a:off x="406301" y="457051"/>
+            <a:ext cx="8498026" cy="274290"/>
+          </a:xfrm>
+          <a:prstGeom prst="rect">
+            <a:avLst/>
+          </a:prstGeom>
+          <a:noFill/>
+          <a:ln/>
+        </p:spPr>
+        <p:txBody>
+          <a:bodyPr wrap="square" lIns="0" tIns="0" rIns="0" bIns="0" rtlCol="0" anchor="t"/>
+          <a:lstStyle/>
+          <a:p>
+            <a:pPr algn="l" indent="0" marL="0">
+              <a:lnSpc>
+                <a:spcPts val="2160"/>
+              </a:lnSpc>
+              <a:spcBef>
+                <a:spcPts val="600"/>
+              </a:spcBef>
+              <a:spcAft>
+                <a:spcPts val="800"/>
+              </a:spcAft>
+              <a:buNone/>
+            </a:pPr>
+            <a:r>
+              <a:rPr lang="en-US" sz="1800" b="1" dirty="0">
+                <a:solidFill>
+                  <a:srgbClr val="FE4447"/>
+                </a:solidFill>
+                <a:latin typeface="Georgia" pitchFamily="34" charset="0"/>
+                <a:ea typeface="Georgia" pitchFamily="34" charset="-122"/>
+                <a:cs typeface="Georgia" pitchFamily="34" charset="-120"/>
+              </a:rPr>
+              <a:t>Student-facing content</a:t>
+            </a:r>
+            <a:endParaRPr lang="en-US" sz="1800" dirty="0"/>
+          </a:p>
+        </p:txBody>
+      </p:sp>
+      <p:sp>
+        <p:nvSpPr>
+          <p:cNvPr id="4" name="Text 2"/>
+          <p:cNvSpPr/>
+          <p:nvPr/>
+        </p:nvSpPr>
+        <p:spPr>
+          <a:xfrm>
+            <a:off x="406301" y="883593"/>
+            <a:ext cx="8331398" cy="2343150"/>
+          </a:xfrm>
+          <a:prstGeom prst="rect">
+            <a:avLst/>
+          </a:prstGeom>
+          <a:solidFill>
+            <a:srgbClr val="F4F8F9"/>
+          </a:solidFill>
+          <a:ln/>
+        </p:spPr>
+        <p:txBody>
+          <a:bodyPr wrap="square" rtlCol="0" anchor="ctr"/>
+          <a:lstStyle/>
+          <a:p>
+            <a:pPr indent="0" marL="0">
+              <a:buNone/>
+            </a:pPr>
+            <a:endParaRPr lang="en-US" dirty="0"/>
+          </a:p>
+        </p:txBody>
+      </p:sp>
+      <p:sp>
+        <p:nvSpPr>
+          <p:cNvPr id="5" name="Shape 3"/>
+          <p:cNvSpPr/>
+          <p:nvPr/>
+        </p:nvSpPr>
+        <p:spPr>
+          <a:xfrm>
+            <a:off x="434876" y="883593"/>
+            <a:ext cx="0" cy="2343150"/>
+          </a:xfrm>
+          <a:prstGeom prst="line">
+            <a:avLst/>
+          </a:prstGeom>
+          <a:noFill/>
+          <a:ln w="57150">
+            <a:solidFill>
+              <a:srgbClr val="FE4447"/>
+            </a:solidFill>
+            <a:prstDash val="solid"/>
+          </a:ln>
+        </p:spPr>
+      </p:sp>
+      <p:sp>
+        <p:nvSpPr>
+          <p:cNvPr id="6" name="Text 4"/>
+          <p:cNvSpPr/>
+          <p:nvPr/>
+        </p:nvSpPr>
+        <p:spPr>
+          <a:xfrm>
+            <a:off x="692051" y="1074093"/>
+            <a:ext cx="7973389" cy="230981"/>
+          </a:xfrm>
+          <a:prstGeom prst="rect">
+            <a:avLst/>
+          </a:prstGeom>
+          <a:noFill/>
+          <a:ln/>
+        </p:spPr>
+        <p:txBody>
+          <a:bodyPr wrap="square" lIns="0" tIns="0" rIns="0" bIns="0" rtlCol="0" anchor="t"/>
+          <a:lstStyle/>
+          <a:p>
+            <a:pPr algn="l" indent="0" marL="0">
+              <a:lnSpc>
+                <a:spcPts val="1820"/>
+              </a:lnSpc>
+              <a:spcBef>
+                <a:spcPts val="300"/>
+              </a:spcBef>
+              <a:spcAft>
+                <a:spcPts val="300"/>
+              </a:spcAft>
+              <a:buNone/>
+            </a:pPr>
+            <a:r>
+              <a:rPr lang="en-US" sz="1300" b="1" i="1" dirty="0">
+                <a:solidFill>
+                  <a:srgbClr val="1C2833"/>
+                </a:solidFill>
+                <a:latin typeface="Georgia" pitchFamily="34" charset="0"/>
+                <a:ea typeface="Georgia" pitchFamily="34" charset="-122"/>
+                <a:cs typeface="Georgia" pitchFamily="34" charset="-120"/>
+              </a:rPr>
+              <a:t>Each element has a quality. Each quality is perceived by a sense.</a:t>
+            </a:r>
+            <a:endParaRPr lang="en-US" sz="1300" dirty="0"/>
+          </a:p>
+        </p:txBody>
+      </p:sp>
+      <p:sp>
+        <p:nvSpPr>
+          <p:cNvPr id="7" name="Text 5"/>
+          <p:cNvSpPr/>
+          <p:nvPr/>
+        </p:nvSpPr>
+        <p:spPr>
+          <a:xfrm>
+            <a:off x="692051" y="1343174"/>
+            <a:ext cx="7973389" cy="692944"/>
+          </a:xfrm>
+          <a:prstGeom prst="rect">
+            <a:avLst/>
+          </a:prstGeom>
+          <a:noFill/>
+          <a:ln/>
+        </p:spPr>
+        <p:txBody>
+          <a:bodyPr wrap="square" lIns="0" tIns="0" rIns="0" bIns="0" rtlCol="0" anchor="t"/>
+          <a:lstStyle/>
+          <a:p>
+            <a:pPr algn="l" indent="0" marL="0">
+              <a:lnSpc>
+                <a:spcPts val="1820"/>
+              </a:lnSpc>
+              <a:spcBef>
+                <a:spcPts val="300"/>
+              </a:spcBef>
+              <a:spcAft>
+                <a:spcPts val="300"/>
+              </a:spcAft>
+              <a:buNone/>
+            </a:pPr>
+            <a:r>
+              <a:rPr lang="en-US" sz="1300" dirty="0">
+                <a:solidFill>
+                  <a:srgbClr val="1C2833"/>
+                </a:solidFill>
+                <a:latin typeface="Georgia" pitchFamily="34" charset="0"/>
+                <a:ea typeface="Georgia" pitchFamily="34" charset="-122"/>
+                <a:cs typeface="Georgia" pitchFamily="34" charset="-120"/>
+              </a:rPr>
+              <a:t>| Element | Quality (</a:t>
+            </a:r>
+            <a:pPr algn="l" indent="0" marL="0">
+              <a:lnSpc>
+                <a:spcPts val="1820"/>
+              </a:lnSpc>
+              <a:spcBef>
+                <a:spcPts val="300"/>
+              </a:spcBef>
+              <a:spcAft>
+                <a:spcPts val="300"/>
+              </a:spcAft>
+              <a:buNone/>
+            </a:pPr>
+            <a:r>
+              <a:rPr lang="en-US" sz="1300" i="1" dirty="0">
+                <a:solidFill>
+                  <a:srgbClr val="1C2833"/>
+                </a:solidFill>
+                <a:latin typeface="Georgia" pitchFamily="34" charset="0"/>
+                <a:ea typeface="Georgia" pitchFamily="34" charset="-122"/>
+                <a:cs typeface="Georgia" pitchFamily="34" charset="-120"/>
+              </a:rPr>
+              <a:t>tanmātra</a:t>
+            </a:r>
+            <a:pPr algn="l" indent="0" marL="0">
+              <a:lnSpc>
+                <a:spcPts val="1820"/>
+              </a:lnSpc>
+              <a:spcBef>
+                <a:spcPts val="300"/>
+              </a:spcBef>
+              <a:spcAft>
+                <a:spcPts val="300"/>
+              </a:spcAft>
+              <a:buNone/>
+            </a:pPr>
+            <a:r>
+              <a:rPr lang="en-US" sz="1300" dirty="0">
+                <a:solidFill>
+                  <a:srgbClr val="1C2833"/>
+                </a:solidFill>
+                <a:latin typeface="Georgia" pitchFamily="34" charset="0"/>
+                <a:ea typeface="Georgia" pitchFamily="34" charset="-122"/>
+                <a:cs typeface="Georgia" pitchFamily="34" charset="-120"/>
+              </a:rPr>
+              <a:t>) | Perceived by | |---|---|---| | </a:t>
+            </a:r>
+            <a:pPr algn="l" indent="0" marL="0">
+              <a:lnSpc>
+                <a:spcPts val="1820"/>
+              </a:lnSpc>
+              <a:spcBef>
+                <a:spcPts val="300"/>
+              </a:spcBef>
+              <a:spcAft>
+                <a:spcPts val="300"/>
+              </a:spcAft>
+              <a:buNone/>
+            </a:pPr>
+            <a:r>
+              <a:rPr lang="en-US" sz="1300" i="1" dirty="0">
+                <a:solidFill>
+                  <a:srgbClr val="1C2833"/>
+                </a:solidFill>
+                <a:latin typeface="Georgia" pitchFamily="34" charset="0"/>
+                <a:ea typeface="Georgia" pitchFamily="34" charset="-122"/>
+                <a:cs typeface="Georgia" pitchFamily="34" charset="-120"/>
+              </a:rPr>
+              <a:t>ākāśa</a:t>
+            </a:r>
+            <a:pPr algn="l" indent="0" marL="0">
+              <a:lnSpc>
+                <a:spcPts val="1820"/>
+              </a:lnSpc>
+              <a:spcBef>
+                <a:spcPts val="300"/>
+              </a:spcBef>
+              <a:spcAft>
+                <a:spcPts val="300"/>
+              </a:spcAft>
+              <a:buNone/>
+            </a:pPr>
+            <a:r>
+              <a:rPr lang="en-US" sz="1300" dirty="0">
+                <a:solidFill>
+                  <a:srgbClr val="1C2833"/>
+                </a:solidFill>
+                <a:latin typeface="Georgia" pitchFamily="34" charset="0"/>
+                <a:ea typeface="Georgia" pitchFamily="34" charset="-122"/>
+                <a:cs typeface="Georgia" pitchFamily="34" charset="-120"/>
+              </a:rPr>
+              <a:t> (space) | </a:t>
+            </a:r>
+            <a:pPr algn="l" indent="0" marL="0">
+              <a:lnSpc>
+                <a:spcPts val="1820"/>
+              </a:lnSpc>
+              <a:spcBef>
+                <a:spcPts val="300"/>
+              </a:spcBef>
+              <a:spcAft>
+                <a:spcPts val="300"/>
+              </a:spcAft>
+              <a:buNone/>
+            </a:pPr>
+            <a:r>
+              <a:rPr lang="en-US" sz="1300" i="1" dirty="0">
+                <a:solidFill>
+                  <a:srgbClr val="1C2833"/>
+                </a:solidFill>
+                <a:latin typeface="Georgia" pitchFamily="34" charset="0"/>
+                <a:ea typeface="Georgia" pitchFamily="34" charset="-122"/>
+                <a:cs typeface="Georgia" pitchFamily="34" charset="-120"/>
+              </a:rPr>
+              <a:t>śabda</a:t>
+            </a:r>
+            <a:pPr algn="l" indent="0" marL="0">
+              <a:lnSpc>
+                <a:spcPts val="1820"/>
+              </a:lnSpc>
+              <a:spcBef>
+                <a:spcPts val="300"/>
+              </a:spcBef>
+              <a:spcAft>
+                <a:spcPts val="300"/>
+              </a:spcAft>
+              <a:buNone/>
+            </a:pPr>
+            <a:r>
+              <a:rPr lang="en-US" sz="1300" dirty="0">
+                <a:solidFill>
+                  <a:srgbClr val="1C2833"/>
+                </a:solidFill>
+                <a:latin typeface="Georgia" pitchFamily="34" charset="0"/>
+                <a:ea typeface="Georgia" pitchFamily="34" charset="-122"/>
+                <a:cs typeface="Georgia" pitchFamily="34" charset="-120"/>
+              </a:rPr>
+              <a:t> (sound) | ear | | </a:t>
+            </a:r>
+            <a:pPr algn="l" indent="0" marL="0">
+              <a:lnSpc>
+                <a:spcPts val="1820"/>
+              </a:lnSpc>
+              <a:spcBef>
+                <a:spcPts val="300"/>
+              </a:spcBef>
+              <a:spcAft>
+                <a:spcPts val="300"/>
+              </a:spcAft>
+              <a:buNone/>
+            </a:pPr>
+            <a:r>
+              <a:rPr lang="en-US" sz="1300" i="1" dirty="0">
+                <a:solidFill>
+                  <a:srgbClr val="1C2833"/>
+                </a:solidFill>
+                <a:latin typeface="Georgia" pitchFamily="34" charset="0"/>
+                <a:ea typeface="Georgia" pitchFamily="34" charset="-122"/>
+                <a:cs typeface="Georgia" pitchFamily="34" charset="-120"/>
+              </a:rPr>
+              <a:t>vāyu</a:t>
+            </a:r>
+            <a:pPr algn="l" indent="0" marL="0">
+              <a:lnSpc>
+                <a:spcPts val="1820"/>
+              </a:lnSpc>
+              <a:spcBef>
+                <a:spcPts val="300"/>
+              </a:spcBef>
+              <a:spcAft>
+                <a:spcPts val="300"/>
+              </a:spcAft>
+              <a:buNone/>
+            </a:pPr>
+            <a:r>
+              <a:rPr lang="en-US" sz="1300" dirty="0">
+                <a:solidFill>
+                  <a:srgbClr val="1C2833"/>
+                </a:solidFill>
+                <a:latin typeface="Georgia" pitchFamily="34" charset="0"/>
+                <a:ea typeface="Georgia" pitchFamily="34" charset="-122"/>
+                <a:cs typeface="Georgia" pitchFamily="34" charset="-120"/>
+              </a:rPr>
+              <a:t> (air) | </a:t>
+            </a:r>
+            <a:pPr algn="l" indent="0" marL="0">
+              <a:lnSpc>
+                <a:spcPts val="1820"/>
+              </a:lnSpc>
+              <a:spcBef>
+                <a:spcPts val="300"/>
+              </a:spcBef>
+              <a:spcAft>
+                <a:spcPts val="300"/>
+              </a:spcAft>
+              <a:buNone/>
+            </a:pPr>
+            <a:r>
+              <a:rPr lang="en-US" sz="1300" i="1" dirty="0">
+                <a:solidFill>
+                  <a:srgbClr val="1C2833"/>
+                </a:solidFill>
+                <a:latin typeface="Georgia" pitchFamily="34" charset="0"/>
+                <a:ea typeface="Georgia" pitchFamily="34" charset="-122"/>
+                <a:cs typeface="Georgia" pitchFamily="34" charset="-120"/>
+              </a:rPr>
+              <a:t>sparśa</a:t>
+            </a:r>
+            <a:pPr algn="l" indent="0" marL="0">
+              <a:lnSpc>
+                <a:spcPts val="1820"/>
+              </a:lnSpc>
+              <a:spcBef>
+                <a:spcPts val="300"/>
+              </a:spcBef>
+              <a:spcAft>
+                <a:spcPts val="300"/>
+              </a:spcAft>
+              <a:buNone/>
+            </a:pPr>
+            <a:r>
+              <a:rPr lang="en-US" sz="1300" dirty="0">
+                <a:solidFill>
+                  <a:srgbClr val="1C2833"/>
+                </a:solidFill>
+                <a:latin typeface="Georgia" pitchFamily="34" charset="0"/>
+                <a:ea typeface="Georgia" pitchFamily="34" charset="-122"/>
+                <a:cs typeface="Georgia" pitchFamily="34" charset="-120"/>
+              </a:rPr>
+              <a:t> (touch) | skin | | </a:t>
+            </a:r>
+            <a:pPr algn="l" indent="0" marL="0">
+              <a:lnSpc>
+                <a:spcPts val="1820"/>
+              </a:lnSpc>
+              <a:spcBef>
+                <a:spcPts val="300"/>
+              </a:spcBef>
+              <a:spcAft>
+                <a:spcPts val="300"/>
+              </a:spcAft>
+              <a:buNone/>
+            </a:pPr>
+            <a:r>
+              <a:rPr lang="en-US" sz="1300" i="1" dirty="0">
+                <a:solidFill>
+                  <a:srgbClr val="1C2833"/>
+                </a:solidFill>
+                <a:latin typeface="Georgia" pitchFamily="34" charset="0"/>
+                <a:ea typeface="Georgia" pitchFamily="34" charset="-122"/>
+                <a:cs typeface="Georgia" pitchFamily="34" charset="-120"/>
+              </a:rPr>
+              <a:t>tejas</a:t>
+            </a:r>
+            <a:pPr algn="l" indent="0" marL="0">
+              <a:lnSpc>
+                <a:spcPts val="1820"/>
+              </a:lnSpc>
+              <a:spcBef>
+                <a:spcPts val="300"/>
+              </a:spcBef>
+              <a:spcAft>
+                <a:spcPts val="300"/>
+              </a:spcAft>
+              <a:buNone/>
+            </a:pPr>
+            <a:r>
+              <a:rPr lang="en-US" sz="1300" dirty="0">
+                <a:solidFill>
+                  <a:srgbClr val="1C2833"/>
+                </a:solidFill>
+                <a:latin typeface="Georgia" pitchFamily="34" charset="0"/>
+                <a:ea typeface="Georgia" pitchFamily="34" charset="-122"/>
+                <a:cs typeface="Georgia" pitchFamily="34" charset="-120"/>
+              </a:rPr>
+              <a:t> (fire) | </a:t>
+            </a:r>
+            <a:pPr algn="l" indent="0" marL="0">
+              <a:lnSpc>
+                <a:spcPts val="1820"/>
+              </a:lnSpc>
+              <a:spcBef>
+                <a:spcPts val="300"/>
+              </a:spcBef>
+              <a:spcAft>
+                <a:spcPts val="300"/>
+              </a:spcAft>
+              <a:buNone/>
+            </a:pPr>
+            <a:r>
+              <a:rPr lang="en-US" sz="1300" i="1" dirty="0">
+                <a:solidFill>
+                  <a:srgbClr val="1C2833"/>
+                </a:solidFill>
+                <a:latin typeface="Georgia" pitchFamily="34" charset="0"/>
+                <a:ea typeface="Georgia" pitchFamily="34" charset="-122"/>
+                <a:cs typeface="Georgia" pitchFamily="34" charset="-120"/>
+              </a:rPr>
+              <a:t>rūpa</a:t>
+            </a:r>
+            <a:pPr algn="l" indent="0" marL="0">
+              <a:lnSpc>
+                <a:spcPts val="1820"/>
+              </a:lnSpc>
+              <a:spcBef>
+                <a:spcPts val="300"/>
+              </a:spcBef>
+              <a:spcAft>
+                <a:spcPts val="300"/>
+              </a:spcAft>
+              <a:buNone/>
+            </a:pPr>
+            <a:r>
+              <a:rPr lang="en-US" sz="1300" dirty="0">
+                <a:solidFill>
+                  <a:srgbClr val="1C2833"/>
+                </a:solidFill>
+                <a:latin typeface="Georgia" pitchFamily="34" charset="0"/>
+                <a:ea typeface="Georgia" pitchFamily="34" charset="-122"/>
+                <a:cs typeface="Georgia" pitchFamily="34" charset="-120"/>
+              </a:rPr>
+              <a:t> (form, colour) | eye | | </a:t>
+            </a:r>
+            <a:pPr algn="l" indent="0" marL="0">
+              <a:lnSpc>
+                <a:spcPts val="1820"/>
+              </a:lnSpc>
+              <a:spcBef>
+                <a:spcPts val="300"/>
+              </a:spcBef>
+              <a:spcAft>
+                <a:spcPts val="300"/>
+              </a:spcAft>
+              <a:buNone/>
+            </a:pPr>
+            <a:r>
+              <a:rPr lang="en-US" sz="1300" i="1" dirty="0">
+                <a:solidFill>
+                  <a:srgbClr val="1C2833"/>
+                </a:solidFill>
+                <a:latin typeface="Georgia" pitchFamily="34" charset="0"/>
+                <a:ea typeface="Georgia" pitchFamily="34" charset="-122"/>
+                <a:cs typeface="Georgia" pitchFamily="34" charset="-120"/>
+              </a:rPr>
+              <a:t>ap</a:t>
+            </a:r>
+            <a:pPr algn="l" indent="0" marL="0">
+              <a:lnSpc>
+                <a:spcPts val="1820"/>
+              </a:lnSpc>
+              <a:spcBef>
+                <a:spcPts val="300"/>
+              </a:spcBef>
+              <a:spcAft>
+                <a:spcPts val="300"/>
+              </a:spcAft>
+              <a:buNone/>
+            </a:pPr>
+            <a:r>
+              <a:rPr lang="en-US" sz="1300" dirty="0">
+                <a:solidFill>
+                  <a:srgbClr val="1C2833"/>
+                </a:solidFill>
+                <a:latin typeface="Georgia" pitchFamily="34" charset="0"/>
+                <a:ea typeface="Georgia" pitchFamily="34" charset="-122"/>
+                <a:cs typeface="Georgia" pitchFamily="34" charset="-120"/>
+              </a:rPr>
+              <a:t> (water) | </a:t>
+            </a:r>
+            <a:pPr algn="l" indent="0" marL="0">
+              <a:lnSpc>
+                <a:spcPts val="1820"/>
+              </a:lnSpc>
+              <a:spcBef>
+                <a:spcPts val="300"/>
+              </a:spcBef>
+              <a:spcAft>
+                <a:spcPts val="300"/>
+              </a:spcAft>
+              <a:buNone/>
+            </a:pPr>
+            <a:r>
+              <a:rPr lang="en-US" sz="1300" i="1" dirty="0">
+                <a:solidFill>
+                  <a:srgbClr val="1C2833"/>
+                </a:solidFill>
+                <a:latin typeface="Georgia" pitchFamily="34" charset="0"/>
+                <a:ea typeface="Georgia" pitchFamily="34" charset="-122"/>
+                <a:cs typeface="Georgia" pitchFamily="34" charset="-120"/>
+              </a:rPr>
+              <a:t>rasa</a:t>
+            </a:r>
+            <a:pPr algn="l" indent="0" marL="0">
+              <a:lnSpc>
+                <a:spcPts val="1820"/>
+              </a:lnSpc>
+              <a:spcBef>
+                <a:spcPts val="300"/>
+              </a:spcBef>
+              <a:spcAft>
+                <a:spcPts val="300"/>
+              </a:spcAft>
+              <a:buNone/>
+            </a:pPr>
+            <a:r>
+              <a:rPr lang="en-US" sz="1300" dirty="0">
+                <a:solidFill>
+                  <a:srgbClr val="1C2833"/>
+                </a:solidFill>
+                <a:latin typeface="Georgia" pitchFamily="34" charset="0"/>
+                <a:ea typeface="Georgia" pitchFamily="34" charset="-122"/>
+                <a:cs typeface="Georgia" pitchFamily="34" charset="-120"/>
+              </a:rPr>
+              <a:t> (taste) | tongue | | </a:t>
+            </a:r>
+            <a:pPr algn="l" indent="0" marL="0">
+              <a:lnSpc>
+                <a:spcPts val="1820"/>
+              </a:lnSpc>
+              <a:spcBef>
+                <a:spcPts val="300"/>
+              </a:spcBef>
+              <a:spcAft>
+                <a:spcPts val="300"/>
+              </a:spcAft>
+              <a:buNone/>
+            </a:pPr>
+            <a:r>
+              <a:rPr lang="en-US" sz="1300" i="1" dirty="0">
+                <a:solidFill>
+                  <a:srgbClr val="1C2833"/>
+                </a:solidFill>
+                <a:latin typeface="Georgia" pitchFamily="34" charset="0"/>
+                <a:ea typeface="Georgia" pitchFamily="34" charset="-122"/>
+                <a:cs typeface="Georgia" pitchFamily="34" charset="-120"/>
+              </a:rPr>
+              <a:t>pṛthvī</a:t>
+            </a:r>
+            <a:pPr algn="l" indent="0" marL="0">
+              <a:lnSpc>
+                <a:spcPts val="1820"/>
+              </a:lnSpc>
+              <a:spcBef>
+                <a:spcPts val="300"/>
+              </a:spcBef>
+              <a:spcAft>
+                <a:spcPts val="300"/>
+              </a:spcAft>
+              <a:buNone/>
+            </a:pPr>
+            <a:r>
+              <a:rPr lang="en-US" sz="1300" dirty="0">
+                <a:solidFill>
+                  <a:srgbClr val="1C2833"/>
+                </a:solidFill>
+                <a:latin typeface="Georgia" pitchFamily="34" charset="0"/>
+                <a:ea typeface="Georgia" pitchFamily="34" charset="-122"/>
+                <a:cs typeface="Georgia" pitchFamily="34" charset="-120"/>
+              </a:rPr>
+              <a:t> (earth) | </a:t>
+            </a:r>
+            <a:pPr algn="l" indent="0" marL="0">
+              <a:lnSpc>
+                <a:spcPts val="1820"/>
+              </a:lnSpc>
+              <a:spcBef>
+                <a:spcPts val="300"/>
+              </a:spcBef>
+              <a:spcAft>
+                <a:spcPts val="300"/>
+              </a:spcAft>
+              <a:buNone/>
+            </a:pPr>
+            <a:r>
+              <a:rPr lang="en-US" sz="1300" i="1" dirty="0">
+                <a:solidFill>
+                  <a:srgbClr val="1C2833"/>
+                </a:solidFill>
+                <a:latin typeface="Georgia" pitchFamily="34" charset="0"/>
+                <a:ea typeface="Georgia" pitchFamily="34" charset="-122"/>
+                <a:cs typeface="Georgia" pitchFamily="34" charset="-120"/>
+              </a:rPr>
+              <a:t>gandha</a:t>
+            </a:r>
+            <a:pPr algn="l" indent="0" marL="0">
+              <a:lnSpc>
+                <a:spcPts val="1820"/>
+              </a:lnSpc>
+              <a:spcBef>
+                <a:spcPts val="300"/>
+              </a:spcBef>
+              <a:spcAft>
+                <a:spcPts val="300"/>
+              </a:spcAft>
+              <a:buNone/>
+            </a:pPr>
+            <a:r>
+              <a:rPr lang="en-US" sz="1300" dirty="0">
+                <a:solidFill>
+                  <a:srgbClr val="1C2833"/>
+                </a:solidFill>
+                <a:latin typeface="Georgia" pitchFamily="34" charset="0"/>
+                <a:ea typeface="Georgia" pitchFamily="34" charset="-122"/>
+                <a:cs typeface="Georgia" pitchFamily="34" charset="-120"/>
+              </a:rPr>
+              <a:t> (smell) | nose |</a:t>
+            </a:r>
+            <a:endParaRPr lang="en-US" sz="1300" dirty="0"/>
+          </a:p>
+        </p:txBody>
+      </p:sp>
+      <p:sp>
+        <p:nvSpPr>
+          <p:cNvPr id="8" name="Text 6"/>
+          <p:cNvSpPr/>
+          <p:nvPr/>
+        </p:nvSpPr>
+        <p:spPr>
+          <a:xfrm>
+            <a:off x="692051" y="2074218"/>
+            <a:ext cx="7973389" cy="461963"/>
+          </a:xfrm>
+          <a:prstGeom prst="rect">
+            <a:avLst/>
+          </a:prstGeom>
+          <a:noFill/>
+          <a:ln/>
+        </p:spPr>
+        <p:txBody>
+          <a:bodyPr wrap="square" lIns="0" tIns="0" rIns="0" bIns="0" rtlCol="0" anchor="t"/>
+          <a:lstStyle/>
+          <a:p>
+            <a:pPr algn="l" indent="0" marL="0">
+              <a:lnSpc>
+                <a:spcPts val="1820"/>
+              </a:lnSpc>
+              <a:spcBef>
+                <a:spcPts val="300"/>
+              </a:spcBef>
+              <a:spcAft>
+                <a:spcPts val="300"/>
+              </a:spcAft>
+              <a:buNone/>
+            </a:pPr>
+            <a:r>
+              <a:rPr lang="en-US" sz="1300" i="1" dirty="0">
+                <a:solidFill>
+                  <a:srgbClr val="1C2833"/>
+                </a:solidFill>
+                <a:latin typeface="Georgia" pitchFamily="34" charset="0"/>
+                <a:ea typeface="Georgia" pitchFamily="34" charset="-122"/>
+                <a:cs typeface="Georgia" pitchFamily="34" charset="-120"/>
+              </a:rPr>
+              <a:t>Earth has all five qualities. That's why you can hear soil shift, feel its texture, see its colour, taste its mineral content (you've all chewed sand in childhood — admit it), and smell it after rain.</a:t>
+            </a:r>
+            <a:endParaRPr lang="en-US" sz="1300" dirty="0"/>
+          </a:p>
+        </p:txBody>
+      </p:sp>
+      <p:sp>
+        <p:nvSpPr>
+          <p:cNvPr id="9" name="Text 7"/>
+          <p:cNvSpPr/>
+          <p:nvPr/>
+        </p:nvSpPr>
+        <p:spPr>
+          <a:xfrm>
+            <a:off x="692051" y="2574280"/>
+            <a:ext cx="7973389" cy="461963"/>
+          </a:xfrm>
+          <a:prstGeom prst="rect">
+            <a:avLst/>
+          </a:prstGeom>
+          <a:noFill/>
+          <a:ln/>
+        </p:spPr>
+        <p:txBody>
+          <a:bodyPr wrap="square" lIns="0" tIns="0" rIns="0" bIns="0" rtlCol="0" anchor="t"/>
+          <a:lstStyle/>
+          <a:p>
+            <a:pPr algn="l" indent="0" marL="0">
+              <a:lnSpc>
+                <a:spcPts val="1820"/>
+              </a:lnSpc>
+              <a:spcBef>
+                <a:spcPts val="300"/>
+              </a:spcBef>
+              <a:spcAft>
+                <a:spcPts val="300"/>
+              </a:spcAft>
+              <a:buNone/>
+            </a:pPr>
+            <a:r>
+              <a:rPr lang="en-US" sz="1300" i="1" dirty="0">
+                <a:solidFill>
+                  <a:srgbClr val="1C2833"/>
+                </a:solidFill>
+                <a:latin typeface="Georgia" pitchFamily="34" charset="0"/>
+                <a:ea typeface="Georgia" pitchFamily="34" charset="-122"/>
+                <a:cs typeface="Georgia" pitchFamily="34" charset="-120"/>
+              </a:rPr>
+              <a:t>&gt; "Softness, hardness, cold and heat are the qualities of touch, the subtle attribute of air." &gt; — Śrīmad-Bhāgavatam 3.26.36</a:t>
+            </a:r>
+            <a:endParaRPr lang="en-US" sz="1300" dirty="0"/>
+          </a:p>
+        </p:txBody>
+      </p:sp>
+      <p:sp>
+        <p:nvSpPr>
+          <p:cNvPr id="10" name="Text 8"/>
+          <p:cNvSpPr/>
+          <p:nvPr/>
+        </p:nvSpPr>
+        <p:spPr>
+          <a:xfrm>
+            <a:off x="406301" y="4434929"/>
+            <a:ext cx="8498026" cy="213271"/>
+          </a:xfrm>
+          <a:prstGeom prst="rect">
+            <a:avLst/>
+          </a:prstGeom>
+          <a:noFill/>
+          <a:ln/>
+        </p:spPr>
+        <p:txBody>
+          <a:bodyPr wrap="square" lIns="0" tIns="0" rIns="0" bIns="0" rtlCol="0" anchor="t"/>
+          <a:lstStyle/>
+          <a:p>
+            <a:pPr algn="l" indent="0" marL="0">
+              <a:lnSpc>
+                <a:spcPts val="1680"/>
+              </a:lnSpc>
+              <a:spcBef>
+                <a:spcPts val="300"/>
+              </a:spcBef>
+              <a:spcAft>
+                <a:spcPts val="300"/>
+              </a:spcAft>
+              <a:buNone/>
+            </a:pPr>
+            <a:r>
+              <a:rPr lang="en-US" sz="1200" dirty="0">
+                <a:solidFill>
+                  <a:srgbClr val="1C2833"/>
+                </a:solidFill>
+                <a:latin typeface="Arial" pitchFamily="34" charset="0"/>
+                <a:ea typeface="Arial" pitchFamily="34" charset="-122"/>
+                <a:cs typeface="Arial" pitchFamily="34" charset="-120"/>
+              </a:rPr>
+              <a:t>Middle ·  · IKS Curriculum</a:t>
+            </a:r>
+            <a:endParaRPr lang="en-US" sz="1200" dirty="0"/>
+          </a:p>
+        </p:txBody>
+      </p:sp>
+    </p:spTree>
+  </p:cSld>
+  <p:clrMapOvr>
+    <a:masterClrMapping/>
+  </p:clrMapOvr>
+</p:sld>
+</file>
+
+<file path=ppt/slides/slide16.xml><?xml version="1.0" encoding="utf-8"?>
+<p:sld xmlns:a="http://schemas.openxmlformats.org/drawingml/2006/main" xmlns:r="http://schemas.openxmlformats.org/officeDocument/2006/relationships" xmlns:p="http://schemas.openxmlformats.org/presentationml/2006/main">
+  <p:cSld name="Slide 16">
+    <p:bg>
+      <p:bgPr>
+        <a:solidFill>
+          <a:srgbClr val="FFFFFF"/>
+        </a:solidFill>
+      </p:bgPr>
+    </p:bg>
+    <p:spTree>
+      <p:nvGrpSpPr>
+        <p:cNvPr id="1" name=""/>
+        <p:cNvGrpSpPr/>
+        <p:nvPr/>
+      </p:nvGrpSpPr>
+      <p:grpSpPr>
+        <a:xfrm>
+          <a:off x="0" y="0"/>
+          <a:ext cx="0" cy="0"/>
+          <a:chOff x="0" y="0"/>
+          <a:chExt cx="0" cy="0"/>
+        </a:xfrm>
+      </p:grpSpPr>
+      <p:sp>
+        <p:nvSpPr>
+          <p:cNvPr id="2" name="Text 0"/>
+          <p:cNvSpPr/>
+          <p:nvPr/>
+        </p:nvSpPr>
+        <p:spPr>
+          <a:xfrm>
+            <a:off x="0" y="0"/>
+            <a:ext cx="9144000" cy="101501"/>
+          </a:xfrm>
+          <a:prstGeom prst="rect">
+            <a:avLst/>
+          </a:prstGeom>
+          <a:solidFill>
+            <a:srgbClr val="277884"/>
+          </a:solidFill>
+          <a:ln/>
+        </p:spPr>
+        <p:txBody>
+          <a:bodyPr wrap="square" rtlCol="0" anchor="ctr"/>
+          <a:lstStyle/>
+          <a:p>
+            <a:pPr indent="0" marL="0">
+              <a:buNone/>
+            </a:pPr>
+            <a:endParaRPr lang="en-US" dirty="0"/>
+          </a:p>
+        </p:txBody>
+      </p:sp>
+      <p:sp>
+        <p:nvSpPr>
+          <p:cNvPr id="3" name="Text 1"/>
+          <p:cNvSpPr/>
+          <p:nvPr/>
+        </p:nvSpPr>
+        <p:spPr>
+          <a:xfrm>
+            <a:off x="406301" y="457051"/>
+            <a:ext cx="8498026" cy="274290"/>
+          </a:xfrm>
+          <a:prstGeom prst="rect">
+            <a:avLst/>
+          </a:prstGeom>
+          <a:noFill/>
+          <a:ln/>
+        </p:spPr>
+        <p:txBody>
+          <a:bodyPr wrap="square" lIns="0" tIns="0" rIns="0" bIns="0" rtlCol="0" anchor="t"/>
+          <a:lstStyle/>
+          <a:p>
+            <a:pPr algn="l" indent="0" marL="0">
+              <a:lnSpc>
+                <a:spcPts val="2160"/>
+              </a:lnSpc>
+              <a:spcBef>
+                <a:spcPts val="600"/>
+              </a:spcBef>
+              <a:spcAft>
+                <a:spcPts val="800"/>
+              </a:spcAft>
+              <a:buNone/>
+            </a:pPr>
+            <a:r>
+              <a:rPr lang="en-US" sz="1800" b="1" dirty="0">
+                <a:solidFill>
+                  <a:srgbClr val="FE4447"/>
+                </a:solidFill>
+                <a:latin typeface="Georgia" pitchFamily="34" charset="0"/>
+                <a:ea typeface="Georgia" pitchFamily="34" charset="-122"/>
+                <a:cs typeface="Georgia" pitchFamily="34" charset="-120"/>
+              </a:rPr>
+              <a:t>Homework</a:t>
+            </a:r>
+            <a:endParaRPr lang="en-US" sz="1800" dirty="0"/>
+          </a:p>
+        </p:txBody>
+      </p:sp>
+      <p:sp>
+        <p:nvSpPr>
+          <p:cNvPr id="4" name="Text 2"/>
+          <p:cNvSpPr/>
+          <p:nvPr/>
+        </p:nvSpPr>
+        <p:spPr>
+          <a:xfrm>
+            <a:off x="634901" y="883593"/>
+            <a:ext cx="8102798" cy="487561"/>
+          </a:xfrm>
+          <a:prstGeom prst="rect">
+            <a:avLst/>
+          </a:prstGeom>
+          <a:noFill/>
+          <a:ln/>
+        </p:spPr>
+        <p:txBody>
+          <a:bodyPr wrap="square" lIns="0" tIns="0" rIns="0" bIns="0" rtlCol="0" anchor="t"/>
+          <a:lstStyle/>
+          <a:p>
+            <a:pPr algn="l" marL="342900" indent="-342900">
+              <a:lnSpc>
+                <a:spcPts val="1620"/>
+              </a:lnSpc>
+              <a:spcAft>
+                <a:spcPts val="300"/>
+              </a:spcAft>
+              <a:buSzPct val="100000"/>
+              <a:buChar char="•"/>
+            </a:pPr>
+            <a:r>
+              <a:rPr lang="en-US" sz="1200" dirty="0">
+                <a:solidFill>
+                  <a:srgbClr val="1C2833"/>
+                </a:solidFill>
+                <a:latin typeface="Arial" pitchFamily="34" charset="0"/>
+                <a:ea typeface="Arial" pitchFamily="34" charset="-122"/>
+                <a:cs typeface="Arial" pitchFamily="34" charset="-120"/>
+              </a:rPr>
+              <a:t>For each of your three home-objects (which you'll bring on Day 4), figure out the </a:t>
+            </a:r>
+            <a:pPr algn="l" indent="0" marL="0">
+              <a:lnSpc>
+                <a:spcPts val="1620"/>
+              </a:lnSpc>
+              <a:spcAft>
+                <a:spcPts val="300"/>
+              </a:spcAft>
+              <a:buNone/>
+            </a:pPr>
+            <a:r>
+              <a:rPr lang="en-US" sz="1200" i="1" dirty="0">
+                <a:solidFill>
+                  <a:srgbClr val="1C2833"/>
+                </a:solidFill>
+                <a:latin typeface="Arial" pitchFamily="34" charset="0"/>
+                <a:ea typeface="Arial" pitchFamily="34" charset="-122"/>
+                <a:cs typeface="Arial" pitchFamily="34" charset="-120"/>
+              </a:rPr>
+              <a:t>dominant</a:t>
+            </a:r>
+            <a:pPr algn="l" indent="0" marL="0">
+              <a:lnSpc>
+                <a:spcPts val="1620"/>
+              </a:lnSpc>
+              <a:spcAft>
+                <a:spcPts val="300"/>
+              </a:spcAft>
+              <a:buNone/>
+            </a:pPr>
+            <a:r>
+              <a:rPr lang="en-US" sz="1200" dirty="0">
+                <a:solidFill>
+                  <a:srgbClr val="1C2833"/>
+                </a:solidFill>
+                <a:latin typeface="Arial" pitchFamily="34" charset="0"/>
+                <a:ea typeface="Arial" pitchFamily="34" charset="-122"/>
+                <a:cs typeface="Arial" pitchFamily="34" charset="-120"/>
+              </a:rPr>
+              <a:t> element and the </a:t>
+            </a:r>
+            <a:pPr algn="l" indent="0" marL="0">
+              <a:lnSpc>
+                <a:spcPts val="1620"/>
+              </a:lnSpc>
+              <a:spcAft>
+                <a:spcPts val="300"/>
+              </a:spcAft>
+              <a:buNone/>
+            </a:pPr>
+            <a:r>
+              <a:rPr lang="en-US" sz="1200" i="1" dirty="0">
+                <a:solidFill>
+                  <a:srgbClr val="1C2833"/>
+                </a:solidFill>
+                <a:latin typeface="Arial" pitchFamily="34" charset="0"/>
+                <a:ea typeface="Arial" pitchFamily="34" charset="-122"/>
+                <a:cs typeface="Arial" pitchFamily="34" charset="-120"/>
+              </a:rPr>
+              <a:t>dominant tanmātra</a:t>
+            </a:r>
+            <a:pPr algn="l" indent="0" marL="0">
+              <a:lnSpc>
+                <a:spcPts val="1620"/>
+              </a:lnSpc>
+              <a:spcAft>
+                <a:spcPts val="300"/>
+              </a:spcAft>
+              <a:buNone/>
+            </a:pPr>
+            <a:r>
+              <a:rPr lang="en-US" sz="1200" dirty="0">
+                <a:solidFill>
+                  <a:srgbClr val="1C2833"/>
+                </a:solidFill>
+                <a:latin typeface="Arial" pitchFamily="34" charset="0"/>
+                <a:ea typeface="Arial" pitchFamily="34" charset="-122"/>
+                <a:cs typeface="Arial" pitchFamily="34" charset="-120"/>
+              </a:rPr>
+              <a:t>. Write one line per object.</a:t>
+            </a:r>
+            <a:endParaRPr lang="en-US" sz="1200" dirty="0"/>
+          </a:p>
+        </p:txBody>
+      </p:sp>
+      <p:sp>
+        <p:nvSpPr>
+          <p:cNvPr id="5" name="Text 3"/>
+          <p:cNvSpPr/>
+          <p:nvPr/>
+        </p:nvSpPr>
+        <p:spPr>
+          <a:xfrm>
+            <a:off x="406301" y="4434929"/>
+            <a:ext cx="8498026" cy="213271"/>
+          </a:xfrm>
+          <a:prstGeom prst="rect">
+            <a:avLst/>
+          </a:prstGeom>
+          <a:noFill/>
+          <a:ln/>
+        </p:spPr>
+        <p:txBody>
+          <a:bodyPr wrap="square" lIns="0" tIns="0" rIns="0" bIns="0" rtlCol="0" anchor="t"/>
+          <a:lstStyle/>
+          <a:p>
+            <a:pPr algn="l" indent="0" marL="0">
+              <a:lnSpc>
+                <a:spcPts val="1680"/>
+              </a:lnSpc>
+              <a:spcBef>
+                <a:spcPts val="300"/>
+              </a:spcBef>
+              <a:spcAft>
+                <a:spcPts val="300"/>
+              </a:spcAft>
+              <a:buNone/>
+            </a:pPr>
+            <a:r>
+              <a:rPr lang="en-US" sz="1200" dirty="0">
+                <a:solidFill>
+                  <a:srgbClr val="1C2833"/>
+                </a:solidFill>
+                <a:latin typeface="Arial" pitchFamily="34" charset="0"/>
+                <a:ea typeface="Arial" pitchFamily="34" charset="-122"/>
+                <a:cs typeface="Arial" pitchFamily="34" charset="-120"/>
+              </a:rPr>
+              <a:t>Middle ·  · IKS Curriculum</a:t>
+            </a:r>
+            <a:endParaRPr lang="en-US" sz="1200" dirty="0"/>
+          </a:p>
+        </p:txBody>
+      </p:sp>
+    </p:spTree>
+  </p:cSld>
+  <p:clrMapOvr>
+    <a:masterClrMapping/>
+  </p:clrMapOvr>
+</p:sld>
+</file>
+
+<file path=ppt/slides/slide17.xml><?xml version="1.0" encoding="utf-8"?>
+<p:sld xmlns:a="http://schemas.openxmlformats.org/drawingml/2006/main" xmlns:r="http://schemas.openxmlformats.org/officeDocument/2006/relationships" xmlns:p="http://schemas.openxmlformats.org/presentationml/2006/main">
+  <p:cSld name="Slide 17">
+    <p:bg>
+      <p:bgPr>
+        <a:solidFill>
+          <a:srgbClr val="FFFFFF"/>
+        </a:solidFill>
+      </p:bgPr>
+    </p:bg>
+    <p:spTree>
+      <p:nvGrpSpPr>
+        <p:cNvPr id="1" name=""/>
+        <p:cNvGrpSpPr/>
+        <p:nvPr/>
+      </p:nvGrpSpPr>
+      <p:grpSpPr>
+        <a:xfrm>
+          <a:off x="0" y="0"/>
+          <a:ext cx="0" cy="0"/>
+          <a:chOff x="0" y="0"/>
+          <a:chExt cx="0" cy="0"/>
+        </a:xfrm>
+      </p:grpSpPr>
+      <p:sp>
+        <p:nvSpPr>
+          <p:cNvPr id="2" name="Text 0"/>
+          <p:cNvSpPr/>
+          <p:nvPr/>
+        </p:nvSpPr>
+        <p:spPr>
+          <a:xfrm>
+            <a:off x="0" y="0"/>
+            <a:ext cx="9144000" cy="101501"/>
+          </a:xfrm>
+          <a:prstGeom prst="rect">
+            <a:avLst/>
+          </a:prstGeom>
+          <a:solidFill>
+            <a:srgbClr val="277884"/>
+          </a:solidFill>
+          <a:ln/>
+        </p:spPr>
+        <p:txBody>
+          <a:bodyPr wrap="square" rtlCol="0" anchor="ctr"/>
+          <a:lstStyle/>
+          <a:p>
+            <a:pPr indent="0" marL="0">
+              <a:buNone/>
+            </a:pPr>
+            <a:endParaRPr lang="en-US" dirty="0"/>
+          </a:p>
+        </p:txBody>
+      </p:sp>
+      <p:sp>
+        <p:nvSpPr>
+          <p:cNvPr id="3" name="Text 1"/>
+          <p:cNvSpPr/>
+          <p:nvPr/>
+        </p:nvSpPr>
+        <p:spPr>
+          <a:xfrm>
+            <a:off x="406301" y="457051"/>
+            <a:ext cx="8498026" cy="274290"/>
+          </a:xfrm>
+          <a:prstGeom prst="rect">
+            <a:avLst/>
+          </a:prstGeom>
+          <a:noFill/>
+          <a:ln/>
+        </p:spPr>
+        <p:txBody>
+          <a:bodyPr wrap="square" lIns="0" tIns="0" rIns="0" bIns="0" rtlCol="0" anchor="t"/>
+          <a:lstStyle/>
+          <a:p>
+            <a:pPr algn="l" indent="0" marL="0">
+              <a:lnSpc>
+                <a:spcPts val="2160"/>
+              </a:lnSpc>
+              <a:spcBef>
+                <a:spcPts val="600"/>
+              </a:spcBef>
+              <a:spcAft>
+                <a:spcPts val="800"/>
+              </a:spcAft>
+              <a:buNone/>
+            </a:pPr>
+            <a:r>
+              <a:rPr lang="en-US" sz="1800" b="1" dirty="0">
+                <a:solidFill>
+                  <a:srgbClr val="FE4447"/>
+                </a:solidFill>
+                <a:latin typeface="Georgia" pitchFamily="34" charset="0"/>
+                <a:ea typeface="Georgia" pitchFamily="34" charset="-122"/>
+                <a:cs typeface="Georgia" pitchFamily="34" charset="-120"/>
+              </a:rPr>
+              <a:t>Differentiation</a:t>
+            </a:r>
+            <a:endParaRPr lang="en-US" sz="1800" dirty="0"/>
+          </a:p>
+        </p:txBody>
+      </p:sp>
+      <p:sp>
+        <p:nvSpPr>
+          <p:cNvPr id="4" name="Text 2"/>
+          <p:cNvSpPr/>
+          <p:nvPr/>
+        </p:nvSpPr>
+        <p:spPr>
+          <a:xfrm>
+            <a:off x="634901" y="883593"/>
+            <a:ext cx="8102798" cy="937022"/>
+          </a:xfrm>
+          <a:prstGeom prst="rect">
+            <a:avLst/>
+          </a:prstGeom>
+          <a:noFill/>
+          <a:ln/>
+        </p:spPr>
+        <p:txBody>
+          <a:bodyPr wrap="square" lIns="0" tIns="0" rIns="0" bIns="0" rtlCol="0" anchor="t"/>
+          <a:lstStyle/>
+          <a:p>
+            <a:pPr algn="l" marL="342900" indent="-342900">
+              <a:lnSpc>
+                <a:spcPts val="1620"/>
+              </a:lnSpc>
+              <a:spcAft>
+                <a:spcPts val="300"/>
+              </a:spcAft>
+              <a:buSzPct val="100000"/>
+              <a:buChar char="•"/>
+            </a:pPr>
+            <a:r>
+              <a:rPr lang="en-US" sz="1200" b="1" dirty="0">
+                <a:solidFill>
+                  <a:srgbClr val="1C2833"/>
+                </a:solidFill>
+                <a:latin typeface="Arial" pitchFamily="34" charset="0"/>
+                <a:ea typeface="Arial" pitchFamily="34" charset="-122"/>
+                <a:cs typeface="Arial" pitchFamily="34" charset="-120"/>
+              </a:rPr>
+              <a:t>One tier up:</a:t>
+            </a:r>
+            <a:pPr algn="l" indent="0" marL="0">
+              <a:lnSpc>
+                <a:spcPts val="1620"/>
+              </a:lnSpc>
+              <a:spcAft>
+                <a:spcPts val="300"/>
+              </a:spcAft>
+              <a:buNone/>
+            </a:pPr>
+            <a:r>
+              <a:rPr lang="en-US" sz="1200" dirty="0">
+                <a:solidFill>
+                  <a:srgbClr val="1C2833"/>
+                </a:solidFill>
+                <a:latin typeface="Arial" pitchFamily="34" charset="0"/>
+                <a:ea typeface="Arial" pitchFamily="34" charset="-122"/>
+                <a:cs typeface="Arial" pitchFamily="34" charset="-120"/>
+              </a:rPr>
+              <a:t> What about ultrasonic sound (above 20,000 Hz) — humans can't hear it, but bats can. Does it still belong to </a:t>
+            </a:r>
+            <a:pPr algn="l" indent="0" marL="0">
+              <a:lnSpc>
+                <a:spcPts val="1620"/>
+              </a:lnSpc>
+              <a:spcAft>
+                <a:spcPts val="300"/>
+              </a:spcAft>
+              <a:buNone/>
+            </a:pPr>
+            <a:r>
+              <a:rPr lang="en-US" sz="1200" i="1" dirty="0">
+                <a:solidFill>
+                  <a:srgbClr val="1C2833"/>
+                </a:solidFill>
+                <a:latin typeface="Arial" pitchFamily="34" charset="0"/>
+                <a:ea typeface="Arial" pitchFamily="34" charset="-122"/>
+                <a:cs typeface="Arial" pitchFamily="34" charset="-120"/>
+              </a:rPr>
+              <a:t>ākāśa</a:t>
+            </a:r>
+            <a:pPr algn="l" indent="0" marL="0">
+              <a:lnSpc>
+                <a:spcPts val="1620"/>
+              </a:lnSpc>
+              <a:spcAft>
+                <a:spcPts val="300"/>
+              </a:spcAft>
+              <a:buNone/>
+            </a:pPr>
+            <a:r>
+              <a:rPr lang="en-US" sz="1200" dirty="0">
+                <a:solidFill>
+                  <a:srgbClr val="1C2833"/>
+                </a:solidFill>
+                <a:latin typeface="Arial" pitchFamily="34" charset="0"/>
+                <a:ea typeface="Arial" pitchFamily="34" charset="-122"/>
+                <a:cs typeface="Arial" pitchFamily="34" charset="-120"/>
+              </a:rPr>
+              <a:t>? What about magnetic fields, which no human sense can detect directly?</a:t>
+            </a:r>
+            <a:endParaRPr lang="en-US" sz="1200" dirty="0"/>
+          </a:p>
+          <a:p>
+            <a:pPr algn="l" marL="342900" indent="-342900">
+              <a:lnSpc>
+                <a:spcPts val="1620"/>
+              </a:lnSpc>
+              <a:spcAft>
+                <a:spcPts val="300"/>
+              </a:spcAft>
+              <a:buSzPct val="100000"/>
+              <a:buChar char="•"/>
+            </a:pPr>
+            <a:r>
+              <a:rPr lang="en-US" sz="1200" b="1" dirty="0">
+                <a:solidFill>
+                  <a:srgbClr val="1C2833"/>
+                </a:solidFill>
+                <a:latin typeface="Arial" pitchFamily="34" charset="0"/>
+                <a:ea typeface="Arial" pitchFamily="34" charset="-122"/>
+                <a:cs typeface="Arial" pitchFamily="34" charset="-120"/>
+              </a:rPr>
+              <a:t>One tier down:</a:t>
+            </a:r>
+            <a:pPr algn="l" indent="0" marL="0">
+              <a:lnSpc>
+                <a:spcPts val="1620"/>
+              </a:lnSpc>
+              <a:spcAft>
+                <a:spcPts val="300"/>
+              </a:spcAft>
+              <a:buNone/>
+            </a:pPr>
+            <a:r>
+              <a:rPr lang="en-US" sz="1200" dirty="0">
+                <a:solidFill>
+                  <a:srgbClr val="1C2833"/>
+                </a:solidFill>
+                <a:latin typeface="Arial" pitchFamily="34" charset="0"/>
+                <a:ea typeface="Arial" pitchFamily="34" charset="-122"/>
+                <a:cs typeface="Arial" pitchFamily="34" charset="-120"/>
+              </a:rPr>
+              <a:t> Focus on memorising the table. The "why does this match the order of creation?" question can come later.</a:t>
+            </a:r>
+            <a:endParaRPr lang="en-US" sz="1200" dirty="0"/>
+          </a:p>
+        </p:txBody>
+      </p:sp>
+      <p:sp>
+        <p:nvSpPr>
+          <p:cNvPr id="5" name="Text 3"/>
+          <p:cNvSpPr/>
+          <p:nvPr/>
+        </p:nvSpPr>
+        <p:spPr>
+          <a:xfrm>
+            <a:off x="406301" y="4434929"/>
+            <a:ext cx="8498026" cy="213271"/>
+          </a:xfrm>
+          <a:prstGeom prst="rect">
+            <a:avLst/>
+          </a:prstGeom>
+          <a:noFill/>
+          <a:ln/>
+        </p:spPr>
+        <p:txBody>
+          <a:bodyPr wrap="square" lIns="0" tIns="0" rIns="0" bIns="0" rtlCol="0" anchor="t"/>
+          <a:lstStyle/>
+          <a:p>
+            <a:pPr algn="l" indent="0" marL="0">
+              <a:lnSpc>
+                <a:spcPts val="1680"/>
+              </a:lnSpc>
+              <a:spcBef>
+                <a:spcPts val="300"/>
+              </a:spcBef>
+              <a:spcAft>
+                <a:spcPts val="300"/>
+              </a:spcAft>
+              <a:buNone/>
+            </a:pPr>
+            <a:r>
+              <a:rPr lang="en-US" sz="1200" dirty="0">
+                <a:solidFill>
+                  <a:srgbClr val="1C2833"/>
+                </a:solidFill>
+                <a:latin typeface="Arial" pitchFamily="34" charset="0"/>
+                <a:ea typeface="Arial" pitchFamily="34" charset="-122"/>
+                <a:cs typeface="Arial" pitchFamily="34" charset="-120"/>
+              </a:rPr>
+              <a:t>Middle ·  · IKS Curriculum</a:t>
+            </a:r>
+            <a:endParaRPr lang="en-US" sz="1200" dirty="0"/>
+          </a:p>
+        </p:txBody>
+      </p:sp>
+    </p:spTree>
+  </p:cSld>
+  <p:clrMapOvr>
+    <a:masterClrMapping/>
+  </p:clrMapOvr>
+</p:sld>
+</file>
+
+<file path=ppt/slides/slide18.xml><?xml version="1.0" encoding="utf-8"?>
+<p:sld xmlns:a="http://schemas.openxmlformats.org/drawingml/2006/main" xmlns:r="http://schemas.openxmlformats.org/officeDocument/2006/relationships" xmlns:p="http://schemas.openxmlformats.org/presentationml/2006/main">
+  <p:cSld name="Slide 18">
+    <p:bg>
+      <p:bgPr>
+        <a:solidFill>
+          <a:srgbClr val="FFFFFF"/>
+        </a:solidFill>
+      </p:bgPr>
+    </p:bg>
+    <p:spTree>
+      <p:nvGrpSpPr>
+        <p:cNvPr id="1" name=""/>
+        <p:cNvGrpSpPr/>
+        <p:nvPr/>
+      </p:nvGrpSpPr>
+      <p:grpSpPr>
+        <a:xfrm>
+          <a:off x="0" y="0"/>
+          <a:ext cx="0" cy="0"/>
+          <a:chOff x="0" y="0"/>
+          <a:chExt cx="0" cy="0"/>
+        </a:xfrm>
+      </p:grpSpPr>
+      <p:sp>
+        <p:nvSpPr>
+          <p:cNvPr id="2" name="Text 0"/>
+          <p:cNvSpPr/>
+          <p:nvPr/>
+        </p:nvSpPr>
+        <p:spPr>
+          <a:xfrm>
+            <a:off x="0" y="0"/>
+            <a:ext cx="9144000" cy="101501"/>
+          </a:xfrm>
+          <a:prstGeom prst="rect">
+            <a:avLst/>
+          </a:prstGeom>
+          <a:solidFill>
+            <a:srgbClr val="277884"/>
+          </a:solidFill>
+          <a:ln/>
+        </p:spPr>
+        <p:txBody>
+          <a:bodyPr wrap="square" rtlCol="0" anchor="ctr"/>
+          <a:lstStyle/>
+          <a:p>
+            <a:pPr indent="0" marL="0">
+              <a:buNone/>
+            </a:pPr>
+            <a:endParaRPr lang="en-US" dirty="0"/>
+          </a:p>
+        </p:txBody>
+      </p:sp>
+      <p:sp>
+        <p:nvSpPr>
+          <p:cNvPr id="3" name="Text 1"/>
+          <p:cNvSpPr/>
+          <p:nvPr/>
+        </p:nvSpPr>
+        <p:spPr>
+          <a:xfrm>
+            <a:off x="406301" y="457051"/>
+            <a:ext cx="8498026" cy="274290"/>
+          </a:xfrm>
+          <a:prstGeom prst="rect">
+            <a:avLst/>
+          </a:prstGeom>
+          <a:noFill/>
+          <a:ln/>
+        </p:spPr>
+        <p:txBody>
+          <a:bodyPr wrap="square" lIns="0" tIns="0" rIns="0" bIns="0" rtlCol="0" anchor="t"/>
+          <a:lstStyle/>
+          <a:p>
+            <a:pPr algn="l" indent="0" marL="0">
+              <a:lnSpc>
+                <a:spcPts val="2160"/>
+              </a:lnSpc>
+              <a:spcBef>
+                <a:spcPts val="600"/>
+              </a:spcBef>
+              <a:spcAft>
+                <a:spcPts val="800"/>
+              </a:spcAft>
+              <a:buNone/>
+            </a:pPr>
+            <a:r>
+              <a:rPr lang="en-US" sz="1800" b="1" dirty="0">
+                <a:solidFill>
+                  <a:srgbClr val="FE4447"/>
+                </a:solidFill>
+                <a:latin typeface="Georgia" pitchFamily="34" charset="0"/>
+                <a:ea typeface="Georgia" pitchFamily="34" charset="-122"/>
+                <a:cs typeface="Georgia" pitchFamily="34" charset="-120"/>
+              </a:rPr>
+              <a:t>Teacher notes</a:t>
+            </a:r>
+            <a:endParaRPr lang="en-US" sz="1800" dirty="0"/>
+          </a:p>
+        </p:txBody>
+      </p:sp>
+      <p:sp>
+        <p:nvSpPr>
+          <p:cNvPr id="4" name="Text 2"/>
+          <p:cNvSpPr/>
+          <p:nvPr/>
+        </p:nvSpPr>
+        <p:spPr>
+          <a:xfrm>
+            <a:off x="634901" y="883593"/>
+            <a:ext cx="8102798" cy="1386483"/>
+          </a:xfrm>
+          <a:prstGeom prst="rect">
+            <a:avLst/>
+          </a:prstGeom>
+          <a:noFill/>
+          <a:ln/>
+        </p:spPr>
+        <p:txBody>
+          <a:bodyPr wrap="square" lIns="0" tIns="0" rIns="0" bIns="0" rtlCol="0" anchor="t"/>
+          <a:lstStyle/>
+          <a:p>
+            <a:pPr algn="l" marL="342900" indent="-342900">
+              <a:lnSpc>
+                <a:spcPts val="1620"/>
+              </a:lnSpc>
+              <a:spcAft>
+                <a:spcPts val="300"/>
+              </a:spcAft>
+              <a:buSzPct val="100000"/>
+              <a:buChar char="•"/>
+            </a:pPr>
+            <a:r>
+              <a:rPr lang="en-US" sz="1200" dirty="0">
+                <a:solidFill>
+                  <a:srgbClr val="1C2833"/>
+                </a:solidFill>
+                <a:latin typeface="Arial" pitchFamily="34" charset="0"/>
+                <a:ea typeface="Arial" pitchFamily="34" charset="-122"/>
+                <a:cs typeface="Arial" pitchFamily="34" charset="-120"/>
+              </a:rPr>
+              <a:t>Some students will challenge "fire = form/colour." Walk them through: the </a:t>
+            </a:r>
+            <a:pPr algn="l" indent="0" marL="0">
+              <a:lnSpc>
+                <a:spcPts val="1620"/>
+              </a:lnSpc>
+              <a:spcAft>
+                <a:spcPts val="300"/>
+              </a:spcAft>
+              <a:buNone/>
+            </a:pPr>
+            <a:r>
+              <a:rPr lang="en-US" sz="1200" i="1" dirty="0">
+                <a:solidFill>
+                  <a:srgbClr val="1C2833"/>
+                </a:solidFill>
+                <a:latin typeface="Arial" pitchFamily="34" charset="0"/>
+                <a:ea typeface="Arial" pitchFamily="34" charset="-122"/>
+                <a:cs typeface="Arial" pitchFamily="34" charset="-120"/>
+              </a:rPr>
+              <a:t>defining</a:t>
+            </a:r>
+            <a:pPr algn="l" indent="0" marL="0">
+              <a:lnSpc>
+                <a:spcPts val="1620"/>
+              </a:lnSpc>
+              <a:spcAft>
+                <a:spcPts val="300"/>
+              </a:spcAft>
+              <a:buNone/>
+            </a:pPr>
+            <a:r>
+              <a:rPr lang="en-US" sz="1200" dirty="0">
+                <a:solidFill>
+                  <a:srgbClr val="1C2833"/>
+                </a:solidFill>
+                <a:latin typeface="Arial" pitchFamily="34" charset="0"/>
+                <a:ea typeface="Arial" pitchFamily="34" charset="-122"/>
+                <a:cs typeface="Arial" pitchFamily="34" charset="-120"/>
+              </a:rPr>
+              <a:t> perception of fire is what we </a:t>
+            </a:r>
+            <a:pPr algn="l" indent="0" marL="0">
+              <a:lnSpc>
+                <a:spcPts val="1620"/>
+              </a:lnSpc>
+              <a:spcAft>
+                <a:spcPts val="300"/>
+              </a:spcAft>
+              <a:buNone/>
+            </a:pPr>
+            <a:r>
+              <a:rPr lang="en-US" sz="1200" i="1" dirty="0">
+                <a:solidFill>
+                  <a:srgbClr val="1C2833"/>
+                </a:solidFill>
+                <a:latin typeface="Arial" pitchFamily="34" charset="0"/>
+                <a:ea typeface="Arial" pitchFamily="34" charset="-122"/>
+                <a:cs typeface="Arial" pitchFamily="34" charset="-120"/>
+              </a:rPr>
+              <a:t>see</a:t>
+            </a:r>
+            <a:pPr algn="l" indent="0" marL="0">
+              <a:lnSpc>
+                <a:spcPts val="1620"/>
+              </a:lnSpc>
+              <a:spcAft>
+                <a:spcPts val="300"/>
+              </a:spcAft>
+              <a:buNone/>
+            </a:pPr>
+            <a:r>
+              <a:rPr lang="en-US" sz="1200" dirty="0">
+                <a:solidFill>
+                  <a:srgbClr val="1C2833"/>
+                </a:solidFill>
+                <a:latin typeface="Arial" pitchFamily="34" charset="0"/>
+                <a:ea typeface="Arial" pitchFamily="34" charset="-122"/>
+                <a:cs typeface="Arial" pitchFamily="34" charset="-120"/>
+              </a:rPr>
+              <a:t> — light, colour. We feel heat from fire, but that's borrowed from </a:t>
+            </a:r>
+            <a:pPr algn="l" indent="0" marL="0">
+              <a:lnSpc>
+                <a:spcPts val="1620"/>
+              </a:lnSpc>
+              <a:spcAft>
+                <a:spcPts val="300"/>
+              </a:spcAft>
+              <a:buNone/>
+            </a:pPr>
+            <a:r>
+              <a:rPr lang="en-US" sz="1200" i="1" dirty="0">
+                <a:solidFill>
+                  <a:srgbClr val="1C2833"/>
+                </a:solidFill>
+                <a:latin typeface="Arial" pitchFamily="34" charset="0"/>
+                <a:ea typeface="Arial" pitchFamily="34" charset="-122"/>
+                <a:cs typeface="Arial" pitchFamily="34" charset="-120"/>
+              </a:rPr>
+              <a:t>vāyu</a:t>
+            </a:r>
+            <a:pPr algn="l" indent="0" marL="0">
+              <a:lnSpc>
+                <a:spcPts val="1620"/>
+              </a:lnSpc>
+              <a:spcAft>
+                <a:spcPts val="300"/>
+              </a:spcAft>
+              <a:buNone/>
+            </a:pPr>
+            <a:r>
+              <a:rPr lang="en-US" sz="1200" dirty="0">
+                <a:solidFill>
+                  <a:srgbClr val="1C2833"/>
+                </a:solidFill>
+                <a:latin typeface="Arial" pitchFamily="34" charset="0"/>
+                <a:ea typeface="Arial" pitchFamily="34" charset="-122"/>
+                <a:cs typeface="Arial" pitchFamily="34" charset="-120"/>
+              </a:rPr>
+              <a:t>'s tanmātra of touch (heat). The mapping is about the </a:t>
+            </a:r>
+            <a:pPr algn="l" indent="0" marL="0">
+              <a:lnSpc>
+                <a:spcPts val="1620"/>
+              </a:lnSpc>
+              <a:spcAft>
+                <a:spcPts val="300"/>
+              </a:spcAft>
+              <a:buNone/>
+            </a:pPr>
+            <a:r>
+              <a:rPr lang="en-US" sz="1200" i="1" dirty="0">
+                <a:solidFill>
+                  <a:srgbClr val="1C2833"/>
+                </a:solidFill>
+                <a:latin typeface="Arial" pitchFamily="34" charset="0"/>
+                <a:ea typeface="Arial" pitchFamily="34" charset="-122"/>
+                <a:cs typeface="Arial" pitchFamily="34" charset="-120"/>
+              </a:rPr>
+              <a:t>new</a:t>
+            </a:r>
+            <a:pPr algn="l" indent="0" marL="0">
+              <a:lnSpc>
+                <a:spcPts val="1620"/>
+              </a:lnSpc>
+              <a:spcAft>
+                <a:spcPts val="300"/>
+              </a:spcAft>
+              <a:buNone/>
+            </a:pPr>
+            <a:r>
+              <a:rPr lang="en-US" sz="1200" dirty="0">
+                <a:solidFill>
+                  <a:srgbClr val="1C2833"/>
+                </a:solidFill>
+                <a:latin typeface="Arial" pitchFamily="34" charset="0"/>
+                <a:ea typeface="Arial" pitchFamily="34" charset="-122"/>
+                <a:cs typeface="Arial" pitchFamily="34" charset="-120"/>
+              </a:rPr>
+              <a:t> quality each element introduces.</a:t>
+            </a:r>
+            <a:endParaRPr lang="en-US" sz="1200" dirty="0"/>
+          </a:p>
+          <a:p>
+            <a:pPr algn="l" marL="342900" indent="-342900">
+              <a:lnSpc>
+                <a:spcPts val="1620"/>
+              </a:lnSpc>
+              <a:spcAft>
+                <a:spcPts val="300"/>
+              </a:spcAft>
+              <a:buSzPct val="100000"/>
+              <a:buChar char="•"/>
+            </a:pPr>
+            <a:r>
+              <a:rPr lang="en-US" sz="1200" dirty="0">
+                <a:solidFill>
+                  <a:srgbClr val="1C2833"/>
+                </a:solidFill>
+                <a:latin typeface="Arial" pitchFamily="34" charset="0"/>
+                <a:ea typeface="Arial" pitchFamily="34" charset="-122"/>
+                <a:cs typeface="Arial" pitchFamily="34" charset="-120"/>
+              </a:rPr>
+              <a:t>Watch for the smell-station: students will spend most of their time there. That's fine. Give them 30 extra seconds and pull them along.</a:t>
+            </a:r>
+            <a:endParaRPr lang="en-US" sz="1200" dirty="0"/>
+          </a:p>
+          <a:p>
+            <a:pPr algn="l" marL="342900" indent="-342900">
+              <a:lnSpc>
+                <a:spcPts val="1620"/>
+              </a:lnSpc>
+              <a:spcAft>
+                <a:spcPts val="300"/>
+              </a:spcAft>
+              <a:buSzPct val="100000"/>
+              <a:buChar char="•"/>
+            </a:pPr>
+            <a:r>
+              <a:rPr lang="en-US" sz="1200" dirty="0">
+                <a:solidFill>
+                  <a:srgbClr val="1C2833"/>
+                </a:solidFill>
+                <a:latin typeface="Arial" pitchFamily="34" charset="0"/>
+                <a:ea typeface="Arial" pitchFamily="34" charset="-122"/>
+                <a:cs typeface="Arial" pitchFamily="34" charset="-120"/>
+              </a:rPr>
+              <a:t>If using jaggery / sweets — check for diabetic students. Substitute with salt or a non-edible smell-only sample.</a:t>
+            </a:r>
+            <a:endParaRPr lang="en-US" sz="1200" dirty="0"/>
+          </a:p>
+        </p:txBody>
+      </p:sp>
+      <p:sp>
+        <p:nvSpPr>
+          <p:cNvPr id="5" name="Text 3"/>
+          <p:cNvSpPr/>
+          <p:nvPr/>
+        </p:nvSpPr>
+        <p:spPr>
+          <a:xfrm>
+            <a:off x="406301" y="4434929"/>
+            <a:ext cx="8498026" cy="213271"/>
+          </a:xfrm>
+          <a:prstGeom prst="rect">
+            <a:avLst/>
+          </a:prstGeom>
+          <a:noFill/>
+          <a:ln/>
+        </p:spPr>
+        <p:txBody>
+          <a:bodyPr wrap="square" lIns="0" tIns="0" rIns="0" bIns="0" rtlCol="0" anchor="t"/>
+          <a:lstStyle/>
+          <a:p>
+            <a:pPr algn="l" indent="0" marL="0">
+              <a:lnSpc>
+                <a:spcPts val="1680"/>
+              </a:lnSpc>
+              <a:spcBef>
+                <a:spcPts val="300"/>
+              </a:spcBef>
+              <a:spcAft>
+                <a:spcPts val="300"/>
+              </a:spcAft>
+              <a:buNone/>
+            </a:pPr>
+            <a:r>
+              <a:rPr lang="en-US" sz="1200" dirty="0">
+                <a:solidFill>
+                  <a:srgbClr val="1C2833"/>
+                </a:solidFill>
+                <a:latin typeface="Arial" pitchFamily="34" charset="0"/>
+                <a:ea typeface="Arial" pitchFamily="34" charset="-122"/>
+                <a:cs typeface="Arial" pitchFamily="34" charset="-120"/>
+              </a:rPr>
+              <a:t>Middle ·  · IKS Curriculum</a:t>
+            </a:r>
+            <a:endParaRPr lang="en-US" sz="1200" dirty="0"/>
+          </a:p>
+        </p:txBody>
+      </p:sp>
+    </p:spTree>
+  </p:cSld>
+  <p:clrMapOvr>
+    <a:masterClrMapping/>
+  </p:clrMapOvr>
+</p:sld>
+</file>
+
+<file path=ppt/slides/slide19.xml><?xml version="1.0" encoding="utf-8"?>
+<p:sld xmlns:a="http://schemas.openxmlformats.org/drawingml/2006/main" xmlns:r="http://schemas.openxmlformats.org/officeDocument/2006/relationships" xmlns:p="http://schemas.openxmlformats.org/presentationml/2006/main">
+  <p:cSld name="Slide 19">
+    <p:bg>
+      <p:bgPr>
+        <a:solidFill>
+          <a:srgbClr val="FFFFFF"/>
+        </a:solidFill>
+      </p:bgPr>
+    </p:bg>
+    <p:spTree>
+      <p:nvGrpSpPr>
+        <p:cNvPr id="1" name=""/>
+        <p:cNvGrpSpPr/>
+        <p:nvPr/>
+      </p:nvGrpSpPr>
+      <p:grpSpPr>
+        <a:xfrm>
+          <a:off x="0" y="0"/>
+          <a:ext cx="0" cy="0"/>
+          <a:chOff x="0" y="0"/>
+          <a:chExt cx="0" cy="0"/>
+        </a:xfrm>
+      </p:grpSpPr>
+      <p:sp>
+        <p:nvSpPr>
+          <p:cNvPr id="2" name="Text 0"/>
+          <p:cNvSpPr/>
+          <p:nvPr/>
+        </p:nvSpPr>
+        <p:spPr>
+          <a:xfrm>
+            <a:off x="0" y="0"/>
+            <a:ext cx="9144000" cy="101501"/>
+          </a:xfrm>
+          <a:prstGeom prst="rect">
+            <a:avLst/>
+          </a:prstGeom>
+          <a:solidFill>
+            <a:srgbClr val="277884"/>
+          </a:solidFill>
+          <a:ln/>
+        </p:spPr>
+        <p:txBody>
+          <a:bodyPr wrap="square" rtlCol="0" anchor="ctr"/>
+          <a:lstStyle/>
+          <a:p>
+            <a:pPr indent="0" marL="0">
+              <a:buNone/>
+            </a:pPr>
+            <a:endParaRPr lang="en-US" dirty="0"/>
+          </a:p>
+        </p:txBody>
+      </p:sp>
+      <p:sp>
+        <p:nvSpPr>
+          <p:cNvPr id="3" name="Text 1"/>
+          <p:cNvSpPr/>
+          <p:nvPr/>
+        </p:nvSpPr>
+        <p:spPr>
+          <a:xfrm>
+            <a:off x="406301" y="457051"/>
+            <a:ext cx="8498026" cy="274290"/>
+          </a:xfrm>
+          <a:prstGeom prst="rect">
+            <a:avLst/>
+          </a:prstGeom>
+          <a:noFill/>
+          <a:ln/>
+        </p:spPr>
+        <p:txBody>
+          <a:bodyPr wrap="square" lIns="0" tIns="0" rIns="0" bIns="0" rtlCol="0" anchor="t"/>
+          <a:lstStyle/>
+          <a:p>
+            <a:pPr algn="l" indent="0" marL="0">
+              <a:lnSpc>
+                <a:spcPts val="2160"/>
+              </a:lnSpc>
+              <a:spcBef>
+                <a:spcPts val="600"/>
+              </a:spcBef>
+              <a:spcAft>
+                <a:spcPts val="800"/>
+              </a:spcAft>
+              <a:buNone/>
+            </a:pPr>
+            <a:r>
+              <a:rPr lang="en-US" sz="1800" b="1" dirty="0">
+                <a:solidFill>
+                  <a:srgbClr val="FE4447"/>
+                </a:solidFill>
+                <a:latin typeface="Georgia" pitchFamily="34" charset="0"/>
+                <a:ea typeface="Georgia" pitchFamily="34" charset="-122"/>
+                <a:cs typeface="Georgia" pitchFamily="34" charset="-120"/>
+              </a:rPr>
               <a:t>Citation(s) used in this lesson</a:t>
             </a:r>
             <a:endParaRPr lang="en-US" sz="1800" dirty="0"/>
@@ -3779,7 +6899,7 @@
                 <a:ea typeface="Georgia" pitchFamily="34" charset="-122"/>
                 <a:cs typeface="Georgia" pitchFamily="34" charset="-120"/>
               </a:rPr>
-              <a:t>Materials</a:t>
+              <a:t>Learning objective</a:t>
             </a:r>
             <a:endParaRPr lang="en-US" sz="1800" dirty="0"/>
           </a:p>
@@ -3794,7 +6914,7 @@
         <p:spPr>
           <a:xfrm>
             <a:off x="406301" y="870942"/>
-            <a:ext cx="8498026" cy="639812"/>
+            <a:ext cx="8498026" cy="426541"/>
           </a:xfrm>
           <a:prstGeom prst="rect">
             <a:avLst/>
@@ -3827,7 +6947,53 @@
                 <a:ea typeface="Arial" pitchFamily="34" charset="-122"/>
                 <a:cs typeface="Arial" pitchFamily="34" charset="-120"/>
               </a:rPr>
-              <a:t>– Board with a blank 3-column table ready – Optional: small samples for the senses station — a bell (sound), a piece of cotton (touch), a coloured leaf (form), a piece of jaggery or salt crystal (taste), a sprig of mint or a slice of orange peel (smell) – Notebook, pen</a:t>
+              <a:t>By the end of this lesson, students will match each </a:t>
+            </a:r>
+            <a:pPr algn="l" indent="0" marL="0">
+              <a:lnSpc>
+                <a:spcPts val="1680"/>
+              </a:lnSpc>
+              <a:spcBef>
+                <a:spcPts val="300"/>
+              </a:spcBef>
+              <a:spcAft>
+                <a:spcPts val="300"/>
+              </a:spcAft>
+              <a:buNone/>
+            </a:pPr>
+            <a:r>
+              <a:rPr lang="en-US" sz="1200" i="1" dirty="0">
+                <a:solidFill>
+                  <a:srgbClr val="1C2833"/>
+                </a:solidFill>
+                <a:latin typeface="Arial" pitchFamily="34" charset="0"/>
+                <a:ea typeface="Arial" pitchFamily="34" charset="-122"/>
+                <a:cs typeface="Arial" pitchFamily="34" charset="-120"/>
+              </a:rPr>
+              <a:t>tanmātra</a:t>
+            </a:r>
+            <a:pPr algn="l" indent="0" marL="0">
+              <a:lnSpc>
+                <a:spcPts val="1680"/>
+              </a:lnSpc>
+              <a:spcBef>
+                <a:spcPts val="300"/>
+              </a:spcBef>
+              <a:spcAft>
+                <a:spcPts val="300"/>
+              </a:spcAft>
+              <a:buNone/>
+            </a:pPr>
+            <a:r>
+              <a:rPr lang="en-US" sz="1200" dirty="0">
+                <a:solidFill>
+                  <a:srgbClr val="1C2833"/>
+                </a:solidFill>
+                <a:latin typeface="Arial" pitchFamily="34" charset="0"/>
+                <a:ea typeface="Arial" pitchFamily="34" charset="-122"/>
+                <a:cs typeface="Arial" pitchFamily="34" charset="-120"/>
+              </a:rPr>
+              <a:t> (subtle quality) to its element and to the sense organ that perceives it, and explain why this mapping is symmetric.</a:t>
             </a:r>
             <a:endParaRPr lang="en-US" sz="1200" dirty="0"/>
           </a:p>
@@ -3985,7 +7151,7 @@
                 <a:ea typeface="Georgia" pitchFamily="34" charset="-122"/>
                 <a:cs typeface="Georgia" pitchFamily="34" charset="-120"/>
               </a:rPr>
-              <a:t>Vocabulary introduced today</a:t>
+              <a:t>Materials</a:t>
             </a:r>
             <a:endParaRPr lang="en-US" sz="1800" dirty="0"/>
           </a:p>
@@ -4000,7 +7166,7 @@
         <p:spPr>
           <a:xfrm>
             <a:off x="634901" y="883593"/>
-            <a:ext cx="8102798" cy="487561"/>
+            <a:ext cx="8102798" cy="975122"/>
           </a:xfrm>
           <a:prstGeom prst="rect">
             <a:avLst/>
@@ -4023,26 +7189,6 @@
               <a:buChar char="•"/>
             </a:pPr>
             <a:r>
-              <a:rPr lang="en-US" sz="1200" i="1" dirty="0">
-                <a:solidFill>
-                  <a:srgbClr val="1C2833"/>
-                </a:solidFill>
-                <a:latin typeface="Arial" pitchFamily="34" charset="0"/>
-                <a:ea typeface="Arial" pitchFamily="34" charset="-122"/>
-                <a:cs typeface="Arial" pitchFamily="34" charset="-120"/>
-              </a:rPr>
-              <a:t>tanmātra</a:t>
-            </a:r>
-            <a:pPr algn="l" indent="0" marL="0">
-              <a:lnSpc>
-                <a:spcPts val="1620"/>
-              </a:lnSpc>
-              <a:spcAft>
-                <a:spcPts val="300"/>
-              </a:spcAft>
-              <a:buNone/>
-            </a:pPr>
-            <a:r>
               <a:rPr lang="en-US" sz="1200" dirty="0">
                 <a:solidFill>
                   <a:srgbClr val="1C2833"/>
@@ -4051,36 +7197,20 @@
                 <a:ea typeface="Arial" pitchFamily="34" charset="-122"/>
                 <a:cs typeface="Arial" pitchFamily="34" charset="-120"/>
               </a:rPr>
-              <a:t> (IAST: tanmātra; lit. "that-much, subtle essence") — the perceptual quality that "belongs" to each element. Five of them: </a:t>
-            </a:r>
-            <a:pPr algn="l" indent="0" marL="0">
-              <a:lnSpc>
-                <a:spcPts val="1620"/>
-              </a:lnSpc>
-              <a:spcAft>
-                <a:spcPts val="300"/>
-              </a:spcAft>
-              <a:buNone/>
-            </a:pPr>
-            <a:r>
-              <a:rPr lang="en-US" sz="1200" i="1" dirty="0">
-                <a:solidFill>
-                  <a:srgbClr val="1C2833"/>
-                </a:solidFill>
-                <a:latin typeface="Arial" pitchFamily="34" charset="0"/>
-                <a:ea typeface="Arial" pitchFamily="34" charset="-122"/>
-                <a:cs typeface="Arial" pitchFamily="34" charset="-120"/>
-              </a:rPr>
-              <a:t>śabda</a:t>
-            </a:r>
-            <a:pPr algn="l" indent="0" marL="0">
-              <a:lnSpc>
-                <a:spcPts val="1620"/>
-              </a:lnSpc>
-              <a:spcAft>
-                <a:spcPts val="300"/>
-              </a:spcAft>
-              <a:buNone/>
+              <a:t>Board with a blank 3-column table ready</a:t>
+            </a:r>
+            <a:endParaRPr lang="en-US" sz="1200" dirty="0"/>
+          </a:p>
+          <a:p>
+            <a:pPr algn="l" marL="342900" indent="-342900">
+              <a:lnSpc>
+                <a:spcPts val="1620"/>
+              </a:lnSpc>
+              <a:spcAft>
+                <a:spcPts val="300"/>
+              </a:spcAft>
+              <a:buSzPct val="100000"/>
+              <a:buChar char="•"/>
             </a:pPr>
             <a:r>
               <a:rPr lang="en-US" sz="1200" dirty="0">
@@ -4091,36 +7221,20 @@
                 <a:ea typeface="Arial" pitchFamily="34" charset="-122"/>
                 <a:cs typeface="Arial" pitchFamily="34" charset="-120"/>
               </a:rPr>
-              <a:t> (sound), </a:t>
-            </a:r>
-            <a:pPr algn="l" indent="0" marL="0">
-              <a:lnSpc>
-                <a:spcPts val="1620"/>
-              </a:lnSpc>
-              <a:spcAft>
-                <a:spcPts val="300"/>
-              </a:spcAft>
-              <a:buNone/>
-            </a:pPr>
-            <a:r>
-              <a:rPr lang="en-US" sz="1200" i="1" dirty="0">
-                <a:solidFill>
-                  <a:srgbClr val="1C2833"/>
-                </a:solidFill>
-                <a:latin typeface="Arial" pitchFamily="34" charset="0"/>
-                <a:ea typeface="Arial" pitchFamily="34" charset="-122"/>
-                <a:cs typeface="Arial" pitchFamily="34" charset="-120"/>
-              </a:rPr>
-              <a:t>sparśa</a:t>
-            </a:r>
-            <a:pPr algn="l" indent="0" marL="0">
-              <a:lnSpc>
-                <a:spcPts val="1620"/>
-              </a:lnSpc>
-              <a:spcAft>
-                <a:spcPts val="300"/>
-              </a:spcAft>
-              <a:buNone/>
+              <a:t>Optional: small samples for the senses station — a bell (sound), a piece of cotton (touch), a coloured leaf (form), a piece of jaggery or salt crystal (taste), a sprig of mint or a slice of orange peel (smell)</a:t>
+            </a:r>
+            <a:endParaRPr lang="en-US" sz="1200" dirty="0"/>
+          </a:p>
+          <a:p>
+            <a:pPr algn="l" marL="342900" indent="-342900">
+              <a:lnSpc>
+                <a:spcPts val="1620"/>
+              </a:lnSpc>
+              <a:spcAft>
+                <a:spcPts val="300"/>
+              </a:spcAft>
+              <a:buSzPct val="100000"/>
+              <a:buChar char="•"/>
             </a:pPr>
             <a:r>
               <a:rPr lang="en-US" sz="1200" dirty="0">
@@ -4131,127 +7245,7 @@
                 <a:ea typeface="Arial" pitchFamily="34" charset="-122"/>
                 <a:cs typeface="Arial" pitchFamily="34" charset="-120"/>
               </a:rPr>
-              <a:t> (touch), </a:t>
-            </a:r>
-            <a:pPr algn="l" indent="0" marL="0">
-              <a:lnSpc>
-                <a:spcPts val="1620"/>
-              </a:lnSpc>
-              <a:spcAft>
-                <a:spcPts val="300"/>
-              </a:spcAft>
-              <a:buNone/>
-            </a:pPr>
-            <a:r>
-              <a:rPr lang="en-US" sz="1200" i="1" dirty="0">
-                <a:solidFill>
-                  <a:srgbClr val="1C2833"/>
-                </a:solidFill>
-                <a:latin typeface="Arial" pitchFamily="34" charset="0"/>
-                <a:ea typeface="Arial" pitchFamily="34" charset="-122"/>
-                <a:cs typeface="Arial" pitchFamily="34" charset="-120"/>
-              </a:rPr>
-              <a:t>rūpa</a:t>
-            </a:r>
-            <a:pPr algn="l" indent="0" marL="0">
-              <a:lnSpc>
-                <a:spcPts val="1620"/>
-              </a:lnSpc>
-              <a:spcAft>
-                <a:spcPts val="300"/>
-              </a:spcAft>
-              <a:buNone/>
-            </a:pPr>
-            <a:r>
-              <a:rPr lang="en-US" sz="1200" dirty="0">
-                <a:solidFill>
-                  <a:srgbClr val="1C2833"/>
-                </a:solidFill>
-                <a:latin typeface="Arial" pitchFamily="34" charset="0"/>
-                <a:ea typeface="Arial" pitchFamily="34" charset="-122"/>
-                <a:cs typeface="Arial" pitchFamily="34" charset="-120"/>
-              </a:rPr>
-              <a:t> (form), </a:t>
-            </a:r>
-            <a:pPr algn="l" indent="0" marL="0">
-              <a:lnSpc>
-                <a:spcPts val="1620"/>
-              </a:lnSpc>
-              <a:spcAft>
-                <a:spcPts val="300"/>
-              </a:spcAft>
-              <a:buNone/>
-            </a:pPr>
-            <a:r>
-              <a:rPr lang="en-US" sz="1200" i="1" dirty="0">
-                <a:solidFill>
-                  <a:srgbClr val="1C2833"/>
-                </a:solidFill>
-                <a:latin typeface="Arial" pitchFamily="34" charset="0"/>
-                <a:ea typeface="Arial" pitchFamily="34" charset="-122"/>
-                <a:cs typeface="Arial" pitchFamily="34" charset="-120"/>
-              </a:rPr>
-              <a:t>rasa</a:t>
-            </a:r>
-            <a:pPr algn="l" indent="0" marL="0">
-              <a:lnSpc>
-                <a:spcPts val="1620"/>
-              </a:lnSpc>
-              <a:spcAft>
-                <a:spcPts val="300"/>
-              </a:spcAft>
-              <a:buNone/>
-            </a:pPr>
-            <a:r>
-              <a:rPr lang="en-US" sz="1200" dirty="0">
-                <a:solidFill>
-                  <a:srgbClr val="1C2833"/>
-                </a:solidFill>
-                <a:latin typeface="Arial" pitchFamily="34" charset="0"/>
-                <a:ea typeface="Arial" pitchFamily="34" charset="-122"/>
-                <a:cs typeface="Arial" pitchFamily="34" charset="-120"/>
-              </a:rPr>
-              <a:t> (taste), </a:t>
-            </a:r>
-            <a:pPr algn="l" indent="0" marL="0">
-              <a:lnSpc>
-                <a:spcPts val="1620"/>
-              </a:lnSpc>
-              <a:spcAft>
-                <a:spcPts val="300"/>
-              </a:spcAft>
-              <a:buNone/>
-            </a:pPr>
-            <a:r>
-              <a:rPr lang="en-US" sz="1200" i="1" dirty="0">
-                <a:solidFill>
-                  <a:srgbClr val="1C2833"/>
-                </a:solidFill>
-                <a:latin typeface="Arial" pitchFamily="34" charset="0"/>
-                <a:ea typeface="Arial" pitchFamily="34" charset="-122"/>
-                <a:cs typeface="Arial" pitchFamily="34" charset="-120"/>
-              </a:rPr>
-              <a:t>gandha</a:t>
-            </a:r>
-            <a:pPr algn="l" indent="0" marL="0">
-              <a:lnSpc>
-                <a:spcPts val="1620"/>
-              </a:lnSpc>
-              <a:spcAft>
-                <a:spcPts val="300"/>
-              </a:spcAft>
-              <a:buNone/>
-            </a:pPr>
-            <a:r>
-              <a:rPr lang="en-US" sz="1200" dirty="0">
-                <a:solidFill>
-                  <a:srgbClr val="1C2833"/>
-                </a:solidFill>
-                <a:latin typeface="Arial" pitchFamily="34" charset="0"/>
-                <a:ea typeface="Arial" pitchFamily="34" charset="-122"/>
-                <a:cs typeface="Arial" pitchFamily="34" charset="-120"/>
-              </a:rPr>
-              <a:t> (smell).</a:t>
+              <a:t>Notebook, pen</a:t>
             </a:r>
             <a:endParaRPr lang="en-US" sz="1200" dirty="0"/>
           </a:p>
@@ -4409,7 +7403,7 @@
                 <a:ea typeface="Georgia" pitchFamily="34" charset="-122"/>
                 <a:cs typeface="Georgia" pitchFamily="34" charset="-120"/>
               </a:rPr>
-              <a:t>Lesson flow</a:t>
+              <a:t>Vocabulary introduced today</a:t>
             </a:r>
             <a:endParaRPr lang="en-US" sz="1800" dirty="0"/>
           </a:p>
@@ -4418,6 +7412,272 @@
       <p:sp>
         <p:nvSpPr>
           <p:cNvPr id="4" name="Text 2"/>
+          <p:cNvSpPr/>
+          <p:nvPr/>
+        </p:nvSpPr>
+        <p:spPr>
+          <a:xfrm>
+            <a:off x="634901" y="883593"/>
+            <a:ext cx="8102798" cy="487561"/>
+          </a:xfrm>
+          <a:prstGeom prst="rect">
+            <a:avLst/>
+          </a:prstGeom>
+          <a:noFill/>
+          <a:ln/>
+        </p:spPr>
+        <p:txBody>
+          <a:bodyPr wrap="square" lIns="0" tIns="0" rIns="0" bIns="0" rtlCol="0" anchor="t"/>
+          <a:lstStyle/>
+          <a:p>
+            <a:pPr algn="l" marL="342900" indent="-342900">
+              <a:lnSpc>
+                <a:spcPts val="1620"/>
+              </a:lnSpc>
+              <a:spcAft>
+                <a:spcPts val="300"/>
+              </a:spcAft>
+              <a:buSzPct val="100000"/>
+              <a:buChar char="•"/>
+            </a:pPr>
+            <a:r>
+              <a:rPr lang="en-US" sz="1200" i="1" dirty="0">
+                <a:solidFill>
+                  <a:srgbClr val="1C2833"/>
+                </a:solidFill>
+                <a:latin typeface="Arial" pitchFamily="34" charset="0"/>
+                <a:ea typeface="Arial" pitchFamily="34" charset="-122"/>
+                <a:cs typeface="Arial" pitchFamily="34" charset="-120"/>
+              </a:rPr>
+              <a:t>tanmātra</a:t>
+            </a:r>
+            <a:pPr algn="l" indent="0" marL="0">
+              <a:lnSpc>
+                <a:spcPts val="1620"/>
+              </a:lnSpc>
+              <a:spcAft>
+                <a:spcPts val="300"/>
+              </a:spcAft>
+              <a:buNone/>
+            </a:pPr>
+            <a:r>
+              <a:rPr lang="en-US" sz="1200" dirty="0">
+                <a:solidFill>
+                  <a:srgbClr val="1C2833"/>
+                </a:solidFill>
+                <a:latin typeface="Arial" pitchFamily="34" charset="0"/>
+                <a:ea typeface="Arial" pitchFamily="34" charset="-122"/>
+                <a:cs typeface="Arial" pitchFamily="34" charset="-120"/>
+              </a:rPr>
+              <a:t> (IAST: tanmātra; lit. "that-much, subtle essence") — the perceptual quality that "belongs" to each element. Five of them: </a:t>
+            </a:r>
+            <a:pPr algn="l" indent="0" marL="0">
+              <a:lnSpc>
+                <a:spcPts val="1620"/>
+              </a:lnSpc>
+              <a:spcAft>
+                <a:spcPts val="300"/>
+              </a:spcAft>
+              <a:buNone/>
+            </a:pPr>
+            <a:r>
+              <a:rPr lang="en-US" sz="1200" i="1" dirty="0">
+                <a:solidFill>
+                  <a:srgbClr val="1C2833"/>
+                </a:solidFill>
+                <a:latin typeface="Arial" pitchFamily="34" charset="0"/>
+                <a:ea typeface="Arial" pitchFamily="34" charset="-122"/>
+                <a:cs typeface="Arial" pitchFamily="34" charset="-120"/>
+              </a:rPr>
+              <a:t>śabda</a:t>
+            </a:r>
+            <a:pPr algn="l" indent="0" marL="0">
+              <a:lnSpc>
+                <a:spcPts val="1620"/>
+              </a:lnSpc>
+              <a:spcAft>
+                <a:spcPts val="300"/>
+              </a:spcAft>
+              <a:buNone/>
+            </a:pPr>
+            <a:r>
+              <a:rPr lang="en-US" sz="1200" dirty="0">
+                <a:solidFill>
+                  <a:srgbClr val="1C2833"/>
+                </a:solidFill>
+                <a:latin typeface="Arial" pitchFamily="34" charset="0"/>
+                <a:ea typeface="Arial" pitchFamily="34" charset="-122"/>
+                <a:cs typeface="Arial" pitchFamily="34" charset="-120"/>
+              </a:rPr>
+              <a:t> (sound), </a:t>
+            </a:r>
+            <a:pPr algn="l" indent="0" marL="0">
+              <a:lnSpc>
+                <a:spcPts val="1620"/>
+              </a:lnSpc>
+              <a:spcAft>
+                <a:spcPts val="300"/>
+              </a:spcAft>
+              <a:buNone/>
+            </a:pPr>
+            <a:r>
+              <a:rPr lang="en-US" sz="1200" i="1" dirty="0">
+                <a:solidFill>
+                  <a:srgbClr val="1C2833"/>
+                </a:solidFill>
+                <a:latin typeface="Arial" pitchFamily="34" charset="0"/>
+                <a:ea typeface="Arial" pitchFamily="34" charset="-122"/>
+                <a:cs typeface="Arial" pitchFamily="34" charset="-120"/>
+              </a:rPr>
+              <a:t>sparśa</a:t>
+            </a:r>
+            <a:pPr algn="l" indent="0" marL="0">
+              <a:lnSpc>
+                <a:spcPts val="1620"/>
+              </a:lnSpc>
+              <a:spcAft>
+                <a:spcPts val="300"/>
+              </a:spcAft>
+              <a:buNone/>
+            </a:pPr>
+            <a:r>
+              <a:rPr lang="en-US" sz="1200" dirty="0">
+                <a:solidFill>
+                  <a:srgbClr val="1C2833"/>
+                </a:solidFill>
+                <a:latin typeface="Arial" pitchFamily="34" charset="0"/>
+                <a:ea typeface="Arial" pitchFamily="34" charset="-122"/>
+                <a:cs typeface="Arial" pitchFamily="34" charset="-120"/>
+              </a:rPr>
+              <a:t> (touch), </a:t>
+            </a:r>
+            <a:pPr algn="l" indent="0" marL="0">
+              <a:lnSpc>
+                <a:spcPts val="1620"/>
+              </a:lnSpc>
+              <a:spcAft>
+                <a:spcPts val="300"/>
+              </a:spcAft>
+              <a:buNone/>
+            </a:pPr>
+            <a:r>
+              <a:rPr lang="en-US" sz="1200" i="1" dirty="0">
+                <a:solidFill>
+                  <a:srgbClr val="1C2833"/>
+                </a:solidFill>
+                <a:latin typeface="Arial" pitchFamily="34" charset="0"/>
+                <a:ea typeface="Arial" pitchFamily="34" charset="-122"/>
+                <a:cs typeface="Arial" pitchFamily="34" charset="-120"/>
+              </a:rPr>
+              <a:t>rūpa</a:t>
+            </a:r>
+            <a:pPr algn="l" indent="0" marL="0">
+              <a:lnSpc>
+                <a:spcPts val="1620"/>
+              </a:lnSpc>
+              <a:spcAft>
+                <a:spcPts val="300"/>
+              </a:spcAft>
+              <a:buNone/>
+            </a:pPr>
+            <a:r>
+              <a:rPr lang="en-US" sz="1200" dirty="0">
+                <a:solidFill>
+                  <a:srgbClr val="1C2833"/>
+                </a:solidFill>
+                <a:latin typeface="Arial" pitchFamily="34" charset="0"/>
+                <a:ea typeface="Arial" pitchFamily="34" charset="-122"/>
+                <a:cs typeface="Arial" pitchFamily="34" charset="-120"/>
+              </a:rPr>
+              <a:t> (form), </a:t>
+            </a:r>
+            <a:pPr algn="l" indent="0" marL="0">
+              <a:lnSpc>
+                <a:spcPts val="1620"/>
+              </a:lnSpc>
+              <a:spcAft>
+                <a:spcPts val="300"/>
+              </a:spcAft>
+              <a:buNone/>
+            </a:pPr>
+            <a:r>
+              <a:rPr lang="en-US" sz="1200" i="1" dirty="0">
+                <a:solidFill>
+                  <a:srgbClr val="1C2833"/>
+                </a:solidFill>
+                <a:latin typeface="Arial" pitchFamily="34" charset="0"/>
+                <a:ea typeface="Arial" pitchFamily="34" charset="-122"/>
+                <a:cs typeface="Arial" pitchFamily="34" charset="-120"/>
+              </a:rPr>
+              <a:t>rasa</a:t>
+            </a:r>
+            <a:pPr algn="l" indent="0" marL="0">
+              <a:lnSpc>
+                <a:spcPts val="1620"/>
+              </a:lnSpc>
+              <a:spcAft>
+                <a:spcPts val="300"/>
+              </a:spcAft>
+              <a:buNone/>
+            </a:pPr>
+            <a:r>
+              <a:rPr lang="en-US" sz="1200" dirty="0">
+                <a:solidFill>
+                  <a:srgbClr val="1C2833"/>
+                </a:solidFill>
+                <a:latin typeface="Arial" pitchFamily="34" charset="0"/>
+                <a:ea typeface="Arial" pitchFamily="34" charset="-122"/>
+                <a:cs typeface="Arial" pitchFamily="34" charset="-120"/>
+              </a:rPr>
+              <a:t> (taste), </a:t>
+            </a:r>
+            <a:pPr algn="l" indent="0" marL="0">
+              <a:lnSpc>
+                <a:spcPts val="1620"/>
+              </a:lnSpc>
+              <a:spcAft>
+                <a:spcPts val="300"/>
+              </a:spcAft>
+              <a:buNone/>
+            </a:pPr>
+            <a:r>
+              <a:rPr lang="en-US" sz="1200" i="1" dirty="0">
+                <a:solidFill>
+                  <a:srgbClr val="1C2833"/>
+                </a:solidFill>
+                <a:latin typeface="Arial" pitchFamily="34" charset="0"/>
+                <a:ea typeface="Arial" pitchFamily="34" charset="-122"/>
+                <a:cs typeface="Arial" pitchFamily="34" charset="-120"/>
+              </a:rPr>
+              <a:t>gandha</a:t>
+            </a:r>
+            <a:pPr algn="l" indent="0" marL="0">
+              <a:lnSpc>
+                <a:spcPts val="1620"/>
+              </a:lnSpc>
+              <a:spcAft>
+                <a:spcPts val="300"/>
+              </a:spcAft>
+              <a:buNone/>
+            </a:pPr>
+            <a:r>
+              <a:rPr lang="en-US" sz="1200" dirty="0">
+                <a:solidFill>
+                  <a:srgbClr val="1C2833"/>
+                </a:solidFill>
+                <a:latin typeface="Arial" pitchFamily="34" charset="0"/>
+                <a:ea typeface="Arial" pitchFamily="34" charset="-122"/>
+                <a:cs typeface="Arial" pitchFamily="34" charset="-120"/>
+              </a:rPr>
+              <a:t> (smell).</a:t>
+            </a:r>
+            <a:endParaRPr lang="en-US" sz="1200" dirty="0"/>
+          </a:p>
+        </p:txBody>
+      </p:sp>
+      <p:sp>
+        <p:nvSpPr>
+          <p:cNvPr id="5" name="Text 3"/>
           <p:cNvSpPr/>
           <p:nvPr/>
         </p:nvSpPr>
@@ -4567,7 +7827,7 @@
                 <a:ea typeface="Georgia" pitchFamily="34" charset="-122"/>
                 <a:cs typeface="Georgia" pitchFamily="34" charset="-120"/>
               </a:rPr>
-              <a:t>Warm-up (5 min)</a:t>
+              <a:t>Lesson flow</a:t>
             </a:r>
             <a:endParaRPr lang="en-US" sz="1800" dirty="0"/>
           </a:p>
@@ -4576,212 +7836,6 @@
       <p:sp>
         <p:nvSpPr>
           <p:cNvPr id="4" name="Text 2"/>
-          <p:cNvSpPr/>
-          <p:nvPr/>
-        </p:nvSpPr>
-        <p:spPr>
-          <a:xfrm>
-            <a:off x="406301" y="870942"/>
-            <a:ext cx="8498026" cy="426541"/>
-          </a:xfrm>
-          <a:prstGeom prst="rect">
-            <a:avLst/>
-          </a:prstGeom>
-          <a:noFill/>
-          <a:ln/>
-        </p:spPr>
-        <p:txBody>
-          <a:bodyPr wrap="square" lIns="0" tIns="0" rIns="0" bIns="0" rtlCol="0" anchor="t"/>
-          <a:lstStyle/>
-          <a:p>
-            <a:pPr algn="l" indent="0" marL="0">
-              <a:lnSpc>
-                <a:spcPts val="1680"/>
-              </a:lnSpc>
-              <a:spcBef>
-                <a:spcPts val="300"/>
-              </a:spcBef>
-              <a:spcAft>
-                <a:spcPts val="300"/>
-              </a:spcAft>
-              <a:buNone/>
-            </a:pPr>
-            <a:r>
-              <a:rPr lang="en-US" sz="1200" dirty="0">
-                <a:solidFill>
-                  <a:srgbClr val="1C2833"/>
-                </a:solidFill>
-                <a:latin typeface="Arial" pitchFamily="34" charset="0"/>
-                <a:ea typeface="Arial" pitchFamily="34" charset="-122"/>
-                <a:cs typeface="Arial" pitchFamily="34" charset="-120"/>
-              </a:rPr>
-              <a:t>– Daily prompt: </a:t>
-            </a:r>
-            <a:pPr algn="l" indent="0" marL="0">
-              <a:lnSpc>
-                <a:spcPts val="1680"/>
-              </a:lnSpc>
-              <a:spcBef>
-                <a:spcPts val="300"/>
-              </a:spcBef>
-              <a:spcAft>
-                <a:spcPts val="300"/>
-              </a:spcAft>
-              <a:buNone/>
-            </a:pPr>
-            <a:r>
-              <a:rPr lang="en-US" sz="1200" i="1" dirty="0">
-                <a:solidFill>
-                  <a:srgbClr val="1C2833"/>
-                </a:solidFill>
-                <a:latin typeface="Arial" pitchFamily="34" charset="0"/>
-                <a:ea typeface="Arial" pitchFamily="34" charset="-122"/>
-                <a:cs typeface="Arial" pitchFamily="34" charset="-120"/>
-              </a:rPr>
-              <a:t>"Which element did you notice most yesterday?"</a:t>
-            </a:r>
-            <a:pPr algn="l" indent="0" marL="0">
-              <a:lnSpc>
-                <a:spcPts val="1680"/>
-              </a:lnSpc>
-              <a:spcBef>
-                <a:spcPts val="300"/>
-              </a:spcBef>
-              <a:spcAft>
-                <a:spcPts val="300"/>
-              </a:spcAft>
-              <a:buNone/>
-            </a:pPr>
-            <a:r>
-              <a:rPr lang="en-US" sz="1200" dirty="0">
-                <a:solidFill>
-                  <a:srgbClr val="1C2833"/>
-                </a:solidFill>
-                <a:latin typeface="Arial" pitchFamily="34" charset="0"/>
-                <a:ea typeface="Arial" pitchFamily="34" charset="-122"/>
-                <a:cs typeface="Arial" pitchFamily="34" charset="-120"/>
-              </a:rPr>
-              <a:t> — 2 students share. – Hold up the bell. Ring it once. </a:t>
-            </a:r>
-            <a:pPr algn="l" indent="0" marL="0">
-              <a:lnSpc>
-                <a:spcPts val="1680"/>
-              </a:lnSpc>
-              <a:spcBef>
-                <a:spcPts val="300"/>
-              </a:spcBef>
-              <a:spcAft>
-                <a:spcPts val="300"/>
-              </a:spcAft>
-              <a:buNone/>
-            </a:pPr>
-            <a:r>
-              <a:rPr lang="en-US" sz="1200" i="1" dirty="0">
-                <a:solidFill>
-                  <a:srgbClr val="1C2833"/>
-                </a:solidFill>
-                <a:latin typeface="Arial" pitchFamily="34" charset="0"/>
-                <a:ea typeface="Arial" pitchFamily="34" charset="-122"/>
-                <a:cs typeface="Arial" pitchFamily="34" charset="-120"/>
-              </a:rPr>
-              <a:t>"What did you just perceive?"</a:t>
-            </a:r>
-            <a:pPr algn="l" indent="0" marL="0">
-              <a:lnSpc>
-                <a:spcPts val="1680"/>
-              </a:lnSpc>
-              <a:spcBef>
-                <a:spcPts val="300"/>
-              </a:spcBef>
-              <a:spcAft>
-                <a:spcPts val="300"/>
-              </a:spcAft>
-              <a:buNone/>
-            </a:pPr>
-            <a:r>
-              <a:rPr lang="en-US" sz="1200" dirty="0">
-                <a:solidFill>
-                  <a:srgbClr val="1C2833"/>
-                </a:solidFill>
-                <a:latin typeface="Arial" pitchFamily="34" charset="0"/>
-                <a:ea typeface="Arial" pitchFamily="34" charset="-122"/>
-                <a:cs typeface="Arial" pitchFamily="34" charset="-120"/>
-              </a:rPr>
-              <a:t> (Sound.)</a:t>
-            </a:r>
-            <a:endParaRPr lang="en-US" sz="1200" dirty="0"/>
-          </a:p>
-        </p:txBody>
-      </p:sp>
-      <p:sp>
-        <p:nvSpPr>
-          <p:cNvPr id="5" name="Text 3"/>
-          <p:cNvSpPr/>
-          <p:nvPr/>
-        </p:nvSpPr>
-        <p:spPr>
-          <a:xfrm>
-            <a:off x="634901" y="1386334"/>
-            <a:ext cx="8102798" cy="281880"/>
-          </a:xfrm>
-          <a:prstGeom prst="rect">
-            <a:avLst/>
-          </a:prstGeom>
-          <a:noFill/>
-          <a:ln/>
-        </p:spPr>
-        <p:txBody>
-          <a:bodyPr wrap="square" lIns="0" tIns="0" rIns="0" bIns="0" rtlCol="0" anchor="t"/>
-          <a:lstStyle/>
-          <a:p>
-            <a:pPr algn="l" marL="342900" indent="-342900">
-              <a:lnSpc>
-                <a:spcPts val="1620"/>
-              </a:lnSpc>
-              <a:spcAft>
-                <a:spcPts val="300"/>
-              </a:spcAft>
-              <a:buSzPct val="100000"/>
-              <a:buChar char="•"/>
-            </a:pPr>
-            <a:r>
-              <a:rPr lang="en-US" sz="1200" i="1" dirty="0">
-                <a:solidFill>
-                  <a:srgbClr val="1C2833"/>
-                </a:solidFill>
-                <a:latin typeface="Arial" pitchFamily="34" charset="0"/>
-                <a:ea typeface="Arial" pitchFamily="34" charset="-122"/>
-                <a:cs typeface="Arial" pitchFamily="34" charset="-120"/>
-              </a:rPr>
-              <a:t>"Now — through what element did the sound reach you?"</a:t>
-            </a:r>
-            <a:pPr algn="l" indent="0" marL="0">
-              <a:lnSpc>
-                <a:spcPts val="1620"/>
-              </a:lnSpc>
-              <a:spcAft>
-                <a:spcPts val="300"/>
-              </a:spcAft>
-              <a:buNone/>
-            </a:pPr>
-            <a:r>
-              <a:rPr lang="en-US" sz="1200" dirty="0">
-                <a:solidFill>
-                  <a:srgbClr val="1C2833"/>
-                </a:solidFill>
-                <a:latin typeface="Arial" pitchFamily="34" charset="0"/>
-                <a:ea typeface="Arial" pitchFamily="34" charset="-122"/>
-                <a:cs typeface="Arial" pitchFamily="34" charset="-120"/>
-              </a:rPr>
-              <a:t> (Air, and ultimately space.)</a:t>
-            </a:r>
-            <a:endParaRPr lang="en-US" sz="1200" dirty="0"/>
-          </a:p>
-        </p:txBody>
-      </p:sp>
-      <p:sp>
-        <p:nvSpPr>
-          <p:cNvPr id="6" name="Text 4"/>
           <p:cNvSpPr/>
           <p:nvPr/>
         </p:nvSpPr>
@@ -4931,7 +7985,7 @@
                 <a:ea typeface="Georgia" pitchFamily="34" charset="-122"/>
                 <a:cs typeface="Georgia" pitchFamily="34" charset="-120"/>
               </a:rPr>
-              <a:t>Core (20 min)</a:t>
+              <a:t>Warm-up (5 min)</a:t>
             </a:r>
             <a:endParaRPr lang="en-US" sz="1800" dirty="0"/>
           </a:p>
@@ -4946,7 +8000,7 @@
         <p:spPr>
           <a:xfrm>
             <a:off x="634901" y="883593"/>
-            <a:ext cx="8102798" cy="281880"/>
+            <a:ext cx="8102798" cy="769441"/>
           </a:xfrm>
           <a:prstGeom prst="rect">
             <a:avLst/>
@@ -4969,26 +8023,6 @@
               <a:buChar char="•"/>
             </a:pPr>
             <a:r>
-              <a:rPr lang="en-US" sz="1200" b="1" dirty="0">
-                <a:solidFill>
-                  <a:srgbClr val="1C2833"/>
-                </a:solidFill>
-                <a:latin typeface="Arial" pitchFamily="34" charset="0"/>
-                <a:ea typeface="Arial" pitchFamily="34" charset="-122"/>
-                <a:cs typeface="Arial" pitchFamily="34" charset="-120"/>
-              </a:rPr>
-              <a:t>Build the master table on the board</a:t>
-            </a:r>
-            <a:pPr algn="l" indent="0" marL="0">
-              <a:lnSpc>
-                <a:spcPts val="1620"/>
-              </a:lnSpc>
-              <a:spcAft>
-                <a:spcPts val="300"/>
-              </a:spcAft>
-              <a:buNone/>
-            </a:pPr>
-            <a:r>
               <a:rPr lang="en-US" sz="1200" dirty="0">
                 <a:solidFill>
                   <a:srgbClr val="1C2833"/>
@@ -4997,7 +8031,155 @@
                 <a:ea typeface="Arial" pitchFamily="34" charset="-122"/>
                 <a:cs typeface="Arial" pitchFamily="34" charset="-120"/>
               </a:rPr>
-              <a:t> (one row at a time, asking students to predict the senses):</a:t>
+              <a:t>Daily prompt: </a:t>
+            </a:r>
+            <a:pPr algn="l" indent="0" marL="0">
+              <a:lnSpc>
+                <a:spcPts val="1620"/>
+              </a:lnSpc>
+              <a:spcAft>
+                <a:spcPts val="300"/>
+              </a:spcAft>
+              <a:buNone/>
+            </a:pPr>
+            <a:r>
+              <a:rPr lang="en-US" sz="1200" i="1" dirty="0">
+                <a:solidFill>
+                  <a:srgbClr val="1C2833"/>
+                </a:solidFill>
+                <a:latin typeface="Arial" pitchFamily="34" charset="0"/>
+                <a:ea typeface="Arial" pitchFamily="34" charset="-122"/>
+                <a:cs typeface="Arial" pitchFamily="34" charset="-120"/>
+              </a:rPr>
+              <a:t>"Which element did you notice most yesterday?"</a:t>
+            </a:r>
+            <a:pPr algn="l" indent="0" marL="0">
+              <a:lnSpc>
+                <a:spcPts val="1620"/>
+              </a:lnSpc>
+              <a:spcAft>
+                <a:spcPts val="300"/>
+              </a:spcAft>
+              <a:buNone/>
+            </a:pPr>
+            <a:r>
+              <a:rPr lang="en-US" sz="1200" dirty="0">
+                <a:solidFill>
+                  <a:srgbClr val="1C2833"/>
+                </a:solidFill>
+                <a:latin typeface="Arial" pitchFamily="34" charset="0"/>
+                <a:ea typeface="Arial" pitchFamily="34" charset="-122"/>
+                <a:cs typeface="Arial" pitchFamily="34" charset="-120"/>
+              </a:rPr>
+              <a:t> — 2 students share.</a:t>
+            </a:r>
+            <a:endParaRPr lang="en-US" sz="1200" dirty="0"/>
+          </a:p>
+          <a:p>
+            <a:pPr algn="l" marL="342900" indent="-342900">
+              <a:lnSpc>
+                <a:spcPts val="1620"/>
+              </a:lnSpc>
+              <a:spcAft>
+                <a:spcPts val="300"/>
+              </a:spcAft>
+              <a:buSzPct val="100000"/>
+              <a:buChar char="•"/>
+            </a:pPr>
+            <a:r>
+              <a:rPr lang="en-US" sz="1200" dirty="0">
+                <a:solidFill>
+                  <a:srgbClr val="1C2833"/>
+                </a:solidFill>
+                <a:latin typeface="Arial" pitchFamily="34" charset="0"/>
+                <a:ea typeface="Arial" pitchFamily="34" charset="-122"/>
+                <a:cs typeface="Arial" pitchFamily="34" charset="-120"/>
+              </a:rPr>
+              <a:t>Hold up the bell. Ring it once. </a:t>
+            </a:r>
+            <a:pPr algn="l" indent="0" marL="0">
+              <a:lnSpc>
+                <a:spcPts val="1620"/>
+              </a:lnSpc>
+              <a:spcAft>
+                <a:spcPts val="300"/>
+              </a:spcAft>
+              <a:buNone/>
+            </a:pPr>
+            <a:r>
+              <a:rPr lang="en-US" sz="1200" i="1" dirty="0">
+                <a:solidFill>
+                  <a:srgbClr val="1C2833"/>
+                </a:solidFill>
+                <a:latin typeface="Arial" pitchFamily="34" charset="0"/>
+                <a:ea typeface="Arial" pitchFamily="34" charset="-122"/>
+                <a:cs typeface="Arial" pitchFamily="34" charset="-120"/>
+              </a:rPr>
+              <a:t>"What did you just perceive?"</a:t>
+            </a:r>
+            <a:pPr algn="l" indent="0" marL="0">
+              <a:lnSpc>
+                <a:spcPts val="1620"/>
+              </a:lnSpc>
+              <a:spcAft>
+                <a:spcPts val="300"/>
+              </a:spcAft>
+              <a:buNone/>
+            </a:pPr>
+            <a:r>
+              <a:rPr lang="en-US" sz="1200" dirty="0">
+                <a:solidFill>
+                  <a:srgbClr val="1C2833"/>
+                </a:solidFill>
+                <a:latin typeface="Arial" pitchFamily="34" charset="0"/>
+                <a:ea typeface="Arial" pitchFamily="34" charset="-122"/>
+                <a:cs typeface="Arial" pitchFamily="34" charset="-120"/>
+              </a:rPr>
+              <a:t> (Sound.)</a:t>
+            </a:r>
+            <a:endParaRPr lang="en-US" sz="1200" dirty="0"/>
+          </a:p>
+          <a:p>
+            <a:pPr algn="l" marL="342900" indent="-342900">
+              <a:lnSpc>
+                <a:spcPts val="1620"/>
+              </a:lnSpc>
+              <a:spcAft>
+                <a:spcPts val="300"/>
+              </a:spcAft>
+              <a:buSzPct val="100000"/>
+              <a:buChar char="•"/>
+            </a:pPr>
+            <a:r>
+              <a:rPr lang="en-US" sz="1200" i="1" dirty="0">
+                <a:solidFill>
+                  <a:srgbClr val="1C2833"/>
+                </a:solidFill>
+                <a:latin typeface="Arial" pitchFamily="34" charset="0"/>
+                <a:ea typeface="Arial" pitchFamily="34" charset="-122"/>
+                <a:cs typeface="Arial" pitchFamily="34" charset="-120"/>
+              </a:rPr>
+              <a:t>"Now — through what element did the sound reach you?"</a:t>
+            </a:r>
+            <a:pPr algn="l" indent="0" marL="0">
+              <a:lnSpc>
+                <a:spcPts val="1620"/>
+              </a:lnSpc>
+              <a:spcAft>
+                <a:spcPts val="300"/>
+              </a:spcAft>
+              <a:buNone/>
+            </a:pPr>
+            <a:r>
+              <a:rPr lang="en-US" sz="1200" dirty="0">
+                <a:solidFill>
+                  <a:srgbClr val="1C2833"/>
+                </a:solidFill>
+                <a:latin typeface="Arial" pitchFamily="34" charset="0"/>
+                <a:ea typeface="Arial" pitchFamily="34" charset="-122"/>
+                <a:cs typeface="Arial" pitchFamily="34" charset="-120"/>
+              </a:rPr>
+              <a:t> (Air, and ultimately space.)</a:t>
             </a:r>
             <a:endParaRPr lang="en-US" sz="1200" dirty="0"/>
           </a:p>
@@ -5011,1175 +8193,7 @@
         </p:nvSpPr>
         <p:spPr>
           <a:xfrm>
-            <a:off x="406301" y="1254323"/>
-            <a:ext cx="8498026" cy="213271"/>
-          </a:xfrm>
-          <a:prstGeom prst="rect">
-            <a:avLst/>
-          </a:prstGeom>
-          <a:noFill/>
-          <a:ln/>
-        </p:spPr>
-        <p:txBody>
-          <a:bodyPr wrap="square" lIns="0" tIns="0" rIns="0" bIns="0" rtlCol="0" anchor="t"/>
-          <a:lstStyle/>
-          <a:p>
-            <a:pPr algn="l" indent="0" marL="0">
-              <a:lnSpc>
-                <a:spcPts val="1680"/>
-              </a:lnSpc>
-              <a:spcBef>
-                <a:spcPts val="300"/>
-              </a:spcBef>
-              <a:spcAft>
-                <a:spcPts val="300"/>
-              </a:spcAft>
-              <a:buNone/>
-            </a:pPr>
-            <a:r>
-              <a:rPr lang="en-US" sz="1200" i="1" dirty="0">
-                <a:solidFill>
-                  <a:srgbClr val="1C2833"/>
-                </a:solidFill>
-                <a:latin typeface="Arial" pitchFamily="34" charset="0"/>
-                <a:ea typeface="Arial" pitchFamily="34" charset="-122"/>
-                <a:cs typeface="Arial" pitchFamily="34" charset="-120"/>
-              </a:rPr>
-              <a:t>Each row: Element · Tanmātra (quality) · Sense organ · Test it:.</a:t>
-            </a:r>
-            <a:endParaRPr lang="en-US" sz="1200" dirty="0"/>
-          </a:p>
-        </p:txBody>
-      </p:sp>
-      <p:sp>
-        <p:nvSpPr>
-          <p:cNvPr id="6" name="Text 4"/>
-          <p:cNvSpPr/>
-          <p:nvPr/>
-        </p:nvSpPr>
-        <p:spPr>
-          <a:xfrm>
-            <a:off x="634901" y="1556445"/>
-            <a:ext cx="8102798" cy="1257002"/>
-          </a:xfrm>
-          <a:prstGeom prst="rect">
-            <a:avLst/>
-          </a:prstGeom>
-          <a:noFill/>
-          <a:ln/>
-        </p:spPr>
-        <p:txBody>
-          <a:bodyPr wrap="square" lIns="0" tIns="0" rIns="0" bIns="0" rtlCol="0" anchor="t"/>
-          <a:lstStyle/>
-          <a:p>
-            <a:pPr algn="l" marL="342900" indent="-342900">
-              <a:lnSpc>
-                <a:spcPts val="1620"/>
-              </a:lnSpc>
-              <a:spcAft>
-                <a:spcPts val="300"/>
-              </a:spcAft>
-              <a:buSzPct val="100000"/>
-              <a:buChar char="•"/>
-            </a:pPr>
-            <a:r>
-              <a:rPr lang="en-US" sz="1200" i="1" dirty="0">
-                <a:solidFill>
-                  <a:srgbClr val="1C2833"/>
-                </a:solidFill>
-                <a:latin typeface="Arial" pitchFamily="34" charset="0"/>
-                <a:ea typeface="Arial" pitchFamily="34" charset="-122"/>
-                <a:cs typeface="Arial" pitchFamily="34" charset="-120"/>
-              </a:rPr>
-              <a:t>ākāśa</a:t>
-            </a:r>
-            <a:pPr algn="l" indent="0" marL="0">
-              <a:lnSpc>
-                <a:spcPts val="1620"/>
-              </a:lnSpc>
-              <a:spcAft>
-                <a:spcPts val="300"/>
-              </a:spcAft>
-              <a:buNone/>
-            </a:pPr>
-            <a:r>
-              <a:rPr lang="en-US" sz="1200" dirty="0">
-                <a:solidFill>
-                  <a:srgbClr val="1C2833"/>
-                </a:solidFill>
-                <a:latin typeface="Arial" pitchFamily="34" charset="0"/>
-                <a:ea typeface="Arial" pitchFamily="34" charset="-122"/>
-                <a:cs typeface="Arial" pitchFamily="34" charset="-120"/>
-              </a:rPr>
-              <a:t> (space) — </a:t>
-            </a:r>
-            <a:pPr algn="l" indent="0" marL="0">
-              <a:lnSpc>
-                <a:spcPts val="1620"/>
-              </a:lnSpc>
-              <a:spcAft>
-                <a:spcPts val="300"/>
-              </a:spcAft>
-              <a:buNone/>
-            </a:pPr>
-            <a:r>
-              <a:rPr lang="en-US" sz="1200" i="1" dirty="0">
-                <a:solidFill>
-                  <a:srgbClr val="1C2833"/>
-                </a:solidFill>
-                <a:latin typeface="Arial" pitchFamily="34" charset="0"/>
-                <a:ea typeface="Arial" pitchFamily="34" charset="-122"/>
-                <a:cs typeface="Arial" pitchFamily="34" charset="-120"/>
-              </a:rPr>
-              <a:t>śabda</a:t>
-            </a:r>
-            <a:pPr algn="l" indent="0" marL="0">
-              <a:lnSpc>
-                <a:spcPts val="1620"/>
-              </a:lnSpc>
-              <a:spcAft>
-                <a:spcPts val="300"/>
-              </a:spcAft>
-              <a:buNone/>
-            </a:pPr>
-            <a:r>
-              <a:rPr lang="en-US" sz="1200" dirty="0">
-                <a:solidFill>
-                  <a:srgbClr val="1C2833"/>
-                </a:solidFill>
-                <a:latin typeface="Arial" pitchFamily="34" charset="0"/>
-                <a:ea typeface="Arial" pitchFamily="34" charset="-122"/>
-                <a:cs typeface="Arial" pitchFamily="34" charset="-120"/>
-              </a:rPr>
-              <a:t> (sound) · ear · Ring the bell</a:t>
-            </a:r>
-            <a:endParaRPr lang="en-US" sz="1200" dirty="0"/>
-          </a:p>
-          <a:p>
-            <a:pPr algn="l" marL="342900" indent="-342900">
-              <a:lnSpc>
-                <a:spcPts val="1620"/>
-              </a:lnSpc>
-              <a:spcAft>
-                <a:spcPts val="300"/>
-              </a:spcAft>
-              <a:buSzPct val="100000"/>
-              <a:buChar char="•"/>
-            </a:pPr>
-            <a:r>
-              <a:rPr lang="en-US" sz="1200" i="1" dirty="0">
-                <a:solidFill>
-                  <a:srgbClr val="1C2833"/>
-                </a:solidFill>
-                <a:latin typeface="Arial" pitchFamily="34" charset="0"/>
-                <a:ea typeface="Arial" pitchFamily="34" charset="-122"/>
-                <a:cs typeface="Arial" pitchFamily="34" charset="-120"/>
-              </a:rPr>
-              <a:t>vāyu</a:t>
-            </a:r>
-            <a:pPr algn="l" indent="0" marL="0">
-              <a:lnSpc>
-                <a:spcPts val="1620"/>
-              </a:lnSpc>
-              <a:spcAft>
-                <a:spcPts val="300"/>
-              </a:spcAft>
-              <a:buNone/>
-            </a:pPr>
-            <a:r>
-              <a:rPr lang="en-US" sz="1200" dirty="0">
-                <a:solidFill>
-                  <a:srgbClr val="1C2833"/>
-                </a:solidFill>
-                <a:latin typeface="Arial" pitchFamily="34" charset="0"/>
-                <a:ea typeface="Arial" pitchFamily="34" charset="-122"/>
-                <a:cs typeface="Arial" pitchFamily="34" charset="-120"/>
-              </a:rPr>
-              <a:t> (air) — </a:t>
-            </a:r>
-            <a:pPr algn="l" indent="0" marL="0">
-              <a:lnSpc>
-                <a:spcPts val="1620"/>
-              </a:lnSpc>
-              <a:spcAft>
-                <a:spcPts val="300"/>
-              </a:spcAft>
-              <a:buNone/>
-            </a:pPr>
-            <a:r>
-              <a:rPr lang="en-US" sz="1200" i="1" dirty="0">
-                <a:solidFill>
-                  <a:srgbClr val="1C2833"/>
-                </a:solidFill>
-                <a:latin typeface="Arial" pitchFamily="34" charset="0"/>
-                <a:ea typeface="Arial" pitchFamily="34" charset="-122"/>
-                <a:cs typeface="Arial" pitchFamily="34" charset="-120"/>
-              </a:rPr>
-              <a:t>sparśa</a:t>
-            </a:r>
-            <a:pPr algn="l" indent="0" marL="0">
-              <a:lnSpc>
-                <a:spcPts val="1620"/>
-              </a:lnSpc>
-              <a:spcAft>
-                <a:spcPts val="300"/>
-              </a:spcAft>
-              <a:buNone/>
-            </a:pPr>
-            <a:r>
-              <a:rPr lang="en-US" sz="1200" dirty="0">
-                <a:solidFill>
-                  <a:srgbClr val="1C2833"/>
-                </a:solidFill>
-                <a:latin typeface="Arial" pitchFamily="34" charset="0"/>
-                <a:ea typeface="Arial" pitchFamily="34" charset="-122"/>
-                <a:cs typeface="Arial" pitchFamily="34" charset="-120"/>
-              </a:rPr>
-              <a:t> (touch) · skin · Feel a breeze on your hand</a:t>
-            </a:r>
-            <a:endParaRPr lang="en-US" sz="1200" dirty="0"/>
-          </a:p>
-          <a:p>
-            <a:pPr algn="l" marL="342900" indent="-342900">
-              <a:lnSpc>
-                <a:spcPts val="1620"/>
-              </a:lnSpc>
-              <a:spcAft>
-                <a:spcPts val="300"/>
-              </a:spcAft>
-              <a:buSzPct val="100000"/>
-              <a:buChar char="•"/>
-            </a:pPr>
-            <a:r>
-              <a:rPr lang="en-US" sz="1200" i="1" dirty="0">
-                <a:solidFill>
-                  <a:srgbClr val="1C2833"/>
-                </a:solidFill>
-                <a:latin typeface="Arial" pitchFamily="34" charset="0"/>
-                <a:ea typeface="Arial" pitchFamily="34" charset="-122"/>
-                <a:cs typeface="Arial" pitchFamily="34" charset="-120"/>
-              </a:rPr>
-              <a:t>tejas</a:t>
-            </a:r>
-            <a:pPr algn="l" indent="0" marL="0">
-              <a:lnSpc>
-                <a:spcPts val="1620"/>
-              </a:lnSpc>
-              <a:spcAft>
-                <a:spcPts val="300"/>
-              </a:spcAft>
-              <a:buNone/>
-            </a:pPr>
-            <a:r>
-              <a:rPr lang="en-US" sz="1200" dirty="0">
-                <a:solidFill>
-                  <a:srgbClr val="1C2833"/>
-                </a:solidFill>
-                <a:latin typeface="Arial" pitchFamily="34" charset="0"/>
-                <a:ea typeface="Arial" pitchFamily="34" charset="-122"/>
-                <a:cs typeface="Arial" pitchFamily="34" charset="-120"/>
-              </a:rPr>
-              <a:t> (fire) — </a:t>
-            </a:r>
-            <a:pPr algn="l" indent="0" marL="0">
-              <a:lnSpc>
-                <a:spcPts val="1620"/>
-              </a:lnSpc>
-              <a:spcAft>
-                <a:spcPts val="300"/>
-              </a:spcAft>
-              <a:buNone/>
-            </a:pPr>
-            <a:r>
-              <a:rPr lang="en-US" sz="1200" i="1" dirty="0">
-                <a:solidFill>
-                  <a:srgbClr val="1C2833"/>
-                </a:solidFill>
-                <a:latin typeface="Arial" pitchFamily="34" charset="0"/>
-                <a:ea typeface="Arial" pitchFamily="34" charset="-122"/>
-                <a:cs typeface="Arial" pitchFamily="34" charset="-120"/>
-              </a:rPr>
-              <a:t>rūpa</a:t>
-            </a:r>
-            <a:pPr algn="l" indent="0" marL="0">
-              <a:lnSpc>
-                <a:spcPts val="1620"/>
-              </a:lnSpc>
-              <a:spcAft>
-                <a:spcPts val="300"/>
-              </a:spcAft>
-              <a:buNone/>
-            </a:pPr>
-            <a:r>
-              <a:rPr lang="en-US" sz="1200" dirty="0">
-                <a:solidFill>
-                  <a:srgbClr val="1C2833"/>
-                </a:solidFill>
-                <a:latin typeface="Arial" pitchFamily="34" charset="0"/>
-                <a:ea typeface="Arial" pitchFamily="34" charset="-122"/>
-                <a:cs typeface="Arial" pitchFamily="34" charset="-120"/>
-              </a:rPr>
-              <a:t> (form / colour) · eye · Look at a flame's colour</a:t>
-            </a:r>
-            <a:endParaRPr lang="en-US" sz="1200" dirty="0"/>
-          </a:p>
-          <a:p>
-            <a:pPr algn="l" marL="342900" indent="-342900">
-              <a:lnSpc>
-                <a:spcPts val="1620"/>
-              </a:lnSpc>
-              <a:spcAft>
-                <a:spcPts val="300"/>
-              </a:spcAft>
-              <a:buSzPct val="100000"/>
-              <a:buChar char="•"/>
-            </a:pPr>
-            <a:r>
-              <a:rPr lang="en-US" sz="1200" i="1" dirty="0">
-                <a:solidFill>
-                  <a:srgbClr val="1C2833"/>
-                </a:solidFill>
-                <a:latin typeface="Arial" pitchFamily="34" charset="0"/>
-                <a:ea typeface="Arial" pitchFamily="34" charset="-122"/>
-                <a:cs typeface="Arial" pitchFamily="34" charset="-120"/>
-              </a:rPr>
-              <a:t>ap</a:t>
-            </a:r>
-            <a:pPr algn="l" indent="0" marL="0">
-              <a:lnSpc>
-                <a:spcPts val="1620"/>
-              </a:lnSpc>
-              <a:spcAft>
-                <a:spcPts val="300"/>
-              </a:spcAft>
-              <a:buNone/>
-            </a:pPr>
-            <a:r>
-              <a:rPr lang="en-US" sz="1200" dirty="0">
-                <a:solidFill>
-                  <a:srgbClr val="1C2833"/>
-                </a:solidFill>
-                <a:latin typeface="Arial" pitchFamily="34" charset="0"/>
-                <a:ea typeface="Arial" pitchFamily="34" charset="-122"/>
-                <a:cs typeface="Arial" pitchFamily="34" charset="-120"/>
-              </a:rPr>
-              <a:t> (water) — </a:t>
-            </a:r>
-            <a:pPr algn="l" indent="0" marL="0">
-              <a:lnSpc>
-                <a:spcPts val="1620"/>
-              </a:lnSpc>
-              <a:spcAft>
-                <a:spcPts val="300"/>
-              </a:spcAft>
-              <a:buNone/>
-            </a:pPr>
-            <a:r>
-              <a:rPr lang="en-US" sz="1200" i="1" dirty="0">
-                <a:solidFill>
-                  <a:srgbClr val="1C2833"/>
-                </a:solidFill>
-                <a:latin typeface="Arial" pitchFamily="34" charset="0"/>
-                <a:ea typeface="Arial" pitchFamily="34" charset="-122"/>
-                <a:cs typeface="Arial" pitchFamily="34" charset="-120"/>
-              </a:rPr>
-              <a:t>rasa</a:t>
-            </a:r>
-            <a:pPr algn="l" indent="0" marL="0">
-              <a:lnSpc>
-                <a:spcPts val="1620"/>
-              </a:lnSpc>
-              <a:spcAft>
-                <a:spcPts val="300"/>
-              </a:spcAft>
-              <a:buNone/>
-            </a:pPr>
-            <a:r>
-              <a:rPr lang="en-US" sz="1200" dirty="0">
-                <a:solidFill>
-                  <a:srgbClr val="1C2833"/>
-                </a:solidFill>
-                <a:latin typeface="Arial" pitchFamily="34" charset="0"/>
-                <a:ea typeface="Arial" pitchFamily="34" charset="-122"/>
-                <a:cs typeface="Arial" pitchFamily="34" charset="-120"/>
-              </a:rPr>
-              <a:t> (taste) · tongue · Taste sweetness / saltiness</a:t>
-            </a:r>
-            <a:endParaRPr lang="en-US" sz="1200" dirty="0"/>
-          </a:p>
-          <a:p>
-            <a:pPr algn="l" marL="342900" indent="-342900">
-              <a:lnSpc>
-                <a:spcPts val="1620"/>
-              </a:lnSpc>
-              <a:spcAft>
-                <a:spcPts val="300"/>
-              </a:spcAft>
-              <a:buSzPct val="100000"/>
-              <a:buChar char="•"/>
-            </a:pPr>
-            <a:r>
-              <a:rPr lang="en-US" sz="1200" i="1" dirty="0">
-                <a:solidFill>
-                  <a:srgbClr val="1C2833"/>
-                </a:solidFill>
-                <a:latin typeface="Arial" pitchFamily="34" charset="0"/>
-                <a:ea typeface="Arial" pitchFamily="34" charset="-122"/>
-                <a:cs typeface="Arial" pitchFamily="34" charset="-120"/>
-              </a:rPr>
-              <a:t>pṛthvī</a:t>
-            </a:r>
-            <a:pPr algn="l" indent="0" marL="0">
-              <a:lnSpc>
-                <a:spcPts val="1620"/>
-              </a:lnSpc>
-              <a:spcAft>
-                <a:spcPts val="300"/>
-              </a:spcAft>
-              <a:buNone/>
-            </a:pPr>
-            <a:r>
-              <a:rPr lang="en-US" sz="1200" dirty="0">
-                <a:solidFill>
-                  <a:srgbClr val="1C2833"/>
-                </a:solidFill>
-                <a:latin typeface="Arial" pitchFamily="34" charset="0"/>
-                <a:ea typeface="Arial" pitchFamily="34" charset="-122"/>
-                <a:cs typeface="Arial" pitchFamily="34" charset="-120"/>
-              </a:rPr>
-              <a:t> (earth) — </a:t>
-            </a:r>
-            <a:pPr algn="l" indent="0" marL="0">
-              <a:lnSpc>
-                <a:spcPts val="1620"/>
-              </a:lnSpc>
-              <a:spcAft>
-                <a:spcPts val="300"/>
-              </a:spcAft>
-              <a:buNone/>
-            </a:pPr>
-            <a:r>
-              <a:rPr lang="en-US" sz="1200" i="1" dirty="0">
-                <a:solidFill>
-                  <a:srgbClr val="1C2833"/>
-                </a:solidFill>
-                <a:latin typeface="Arial" pitchFamily="34" charset="0"/>
-                <a:ea typeface="Arial" pitchFamily="34" charset="-122"/>
-                <a:cs typeface="Arial" pitchFamily="34" charset="-120"/>
-              </a:rPr>
-              <a:t>gandha</a:t>
-            </a:r>
-            <a:pPr algn="l" indent="0" marL="0">
-              <a:lnSpc>
-                <a:spcPts val="1620"/>
-              </a:lnSpc>
-              <a:spcAft>
-                <a:spcPts val="300"/>
-              </a:spcAft>
-              <a:buNone/>
-            </a:pPr>
-            <a:r>
-              <a:rPr lang="en-US" sz="1200" dirty="0">
-                <a:solidFill>
-                  <a:srgbClr val="1C2833"/>
-                </a:solidFill>
-                <a:latin typeface="Arial" pitchFamily="34" charset="0"/>
-                <a:ea typeface="Arial" pitchFamily="34" charset="-122"/>
-                <a:cs typeface="Arial" pitchFamily="34" charset="-120"/>
-              </a:rPr>
-              <a:t> (smell) · nose · Smell soil, or jaggery, or peel</a:t>
-            </a:r>
-            <a:endParaRPr lang="en-US" sz="1200" dirty="0"/>
-          </a:p>
-        </p:txBody>
-      </p:sp>
-      <p:sp>
-        <p:nvSpPr>
-          <p:cNvPr id="7" name="Text 5"/>
-          <p:cNvSpPr/>
-          <p:nvPr/>
-        </p:nvSpPr>
-        <p:spPr>
-          <a:xfrm>
-            <a:off x="634901" y="2914948"/>
-            <a:ext cx="8102798" cy="487561"/>
-          </a:xfrm>
-          <a:prstGeom prst="rect">
-            <a:avLst/>
-          </a:prstGeom>
-          <a:noFill/>
-          <a:ln/>
-        </p:spPr>
-        <p:txBody>
-          <a:bodyPr wrap="square" lIns="0" tIns="0" rIns="0" bIns="0" rtlCol="0" anchor="t"/>
-          <a:lstStyle/>
-          <a:p>
-            <a:pPr algn="l" marL="342900" indent="-342900">
-              <a:lnSpc>
-                <a:spcPts val="1620"/>
-              </a:lnSpc>
-              <a:spcAft>
-                <a:spcPts val="300"/>
-              </a:spcAft>
-              <a:buSzPct val="100000"/>
-              <a:buChar char="•"/>
-            </a:pPr>
-            <a:r>
-              <a:rPr lang="en-US" sz="1200" b="1" dirty="0">
-                <a:solidFill>
-                  <a:srgbClr val="1C2833"/>
-                </a:solidFill>
-                <a:latin typeface="Arial" pitchFamily="34" charset="0"/>
-                <a:ea typeface="Arial" pitchFamily="34" charset="-122"/>
-                <a:cs typeface="Arial" pitchFamily="34" charset="-120"/>
-              </a:rPr>
-              <a:t>Connect to yesterday's quality-count rule:</a:t>
-            </a:r>
-            <a:pPr algn="l" indent="0" marL="0">
-              <a:lnSpc>
-                <a:spcPts val="1620"/>
-              </a:lnSpc>
-              <a:spcAft>
-                <a:spcPts val="300"/>
-              </a:spcAft>
-              <a:buNone/>
-            </a:pPr>
-            <a:r>
-              <a:rPr lang="en-US" sz="1200" dirty="0">
-                <a:solidFill>
-                  <a:srgbClr val="1C2833"/>
-                </a:solidFill>
-                <a:latin typeface="Arial" pitchFamily="34" charset="0"/>
-                <a:ea typeface="Arial" pitchFamily="34" charset="-122"/>
-                <a:cs typeface="Arial" pitchFamily="34" charset="-120"/>
-              </a:rPr>
-              <a:t> the </a:t>
-            </a:r>
-            <a:pPr algn="l" indent="0" marL="0">
-              <a:lnSpc>
-                <a:spcPts val="1620"/>
-              </a:lnSpc>
-              <a:spcAft>
-                <a:spcPts val="300"/>
-              </a:spcAft>
-              <a:buNone/>
-            </a:pPr>
-            <a:r>
-              <a:rPr lang="en-US" sz="1200" i="1" dirty="0">
-                <a:solidFill>
-                  <a:srgbClr val="1C2833"/>
-                </a:solidFill>
-                <a:latin typeface="Arial" pitchFamily="34" charset="0"/>
-                <a:ea typeface="Arial" pitchFamily="34" charset="-122"/>
-                <a:cs typeface="Arial" pitchFamily="34" charset="-120"/>
-              </a:rPr>
-              <a:t>tanmātra</a:t>
-            </a:r>
-            <a:pPr algn="l" indent="0" marL="0">
-              <a:lnSpc>
-                <a:spcPts val="1620"/>
-              </a:lnSpc>
-              <a:spcAft>
-                <a:spcPts val="300"/>
-              </a:spcAft>
-              <a:buNone/>
-            </a:pPr>
-            <a:r>
-              <a:rPr lang="en-US" sz="1200" dirty="0">
-                <a:solidFill>
-                  <a:srgbClr val="1C2833"/>
-                </a:solidFill>
-                <a:latin typeface="Arial" pitchFamily="34" charset="0"/>
-                <a:ea typeface="Arial" pitchFamily="34" charset="-122"/>
-                <a:cs typeface="Arial" pitchFamily="34" charset="-120"/>
-              </a:rPr>
-              <a:t> added at each element is the new quality that earth carries all five of. So earth — solid stuff — is the one you can perceive in </a:t>
-            </a:r>
-            <a:pPr algn="l" indent="0" marL="0">
-              <a:lnSpc>
-                <a:spcPts val="1620"/>
-              </a:lnSpc>
-              <a:spcAft>
-                <a:spcPts val="300"/>
-              </a:spcAft>
-              <a:buNone/>
-            </a:pPr>
-            <a:r>
-              <a:rPr lang="en-US" sz="1200" i="1" dirty="0">
-                <a:solidFill>
-                  <a:srgbClr val="1C2833"/>
-                </a:solidFill>
-                <a:latin typeface="Arial" pitchFamily="34" charset="0"/>
-                <a:ea typeface="Arial" pitchFamily="34" charset="-122"/>
-                <a:cs typeface="Arial" pitchFamily="34" charset="-120"/>
-              </a:rPr>
-              <a:t>every</a:t>
-            </a:r>
-            <a:pPr algn="l" indent="0" marL="0">
-              <a:lnSpc>
-                <a:spcPts val="1620"/>
-              </a:lnSpc>
-              <a:spcAft>
-                <a:spcPts val="300"/>
-              </a:spcAft>
-              <a:buNone/>
-            </a:pPr>
-            <a:r>
-              <a:rPr lang="en-US" sz="1200" dirty="0">
-                <a:solidFill>
-                  <a:srgbClr val="1C2833"/>
-                </a:solidFill>
-                <a:latin typeface="Arial" pitchFamily="34" charset="0"/>
-                <a:ea typeface="Arial" pitchFamily="34" charset="-122"/>
-                <a:cs typeface="Arial" pitchFamily="34" charset="-120"/>
-              </a:rPr>
-              <a:t> way.</a:t>
-            </a:r>
-            <a:endParaRPr lang="en-US" sz="1200" dirty="0"/>
-          </a:p>
-        </p:txBody>
-      </p:sp>
-      <p:sp>
-        <p:nvSpPr>
-          <p:cNvPr id="8" name="Text 6"/>
-          <p:cNvSpPr/>
-          <p:nvPr/>
-        </p:nvSpPr>
-        <p:spPr>
-          <a:xfrm>
-            <a:off x="634901" y="3504009"/>
-            <a:ext cx="8102798" cy="281880"/>
-          </a:xfrm>
-          <a:prstGeom prst="rect">
-            <a:avLst/>
-          </a:prstGeom>
-          <a:noFill/>
-          <a:ln/>
-        </p:spPr>
-        <p:txBody>
-          <a:bodyPr wrap="square" lIns="0" tIns="0" rIns="0" bIns="0" rtlCol="0" anchor="t"/>
-          <a:lstStyle/>
-          <a:p>
-            <a:pPr algn="l" marL="342900" indent="-342900">
-              <a:lnSpc>
-                <a:spcPts val="1620"/>
-              </a:lnSpc>
-              <a:spcAft>
-                <a:spcPts val="300"/>
-              </a:spcAft>
-              <a:buSzPct val="100000"/>
-              <a:buChar char="•"/>
-            </a:pPr>
-            <a:r>
-              <a:rPr lang="en-US" sz="1200" b="1" dirty="0">
-                <a:solidFill>
-                  <a:srgbClr val="1C2833"/>
-                </a:solidFill>
-                <a:latin typeface="Arial" pitchFamily="34" charset="0"/>
-                <a:ea typeface="Arial" pitchFamily="34" charset="-122"/>
-                <a:cs typeface="Arial" pitchFamily="34" charset="-120"/>
-              </a:rPr>
-              <a:t>Source check.</a:t>
-            </a:r>
-            <a:pPr algn="l" indent="0" marL="0">
-              <a:lnSpc>
-                <a:spcPts val="1620"/>
-              </a:lnSpc>
-              <a:spcAft>
-                <a:spcPts val="300"/>
-              </a:spcAft>
-              <a:buNone/>
-            </a:pPr>
-            <a:r>
-              <a:rPr lang="en-US" sz="1200" dirty="0">
-                <a:solidFill>
-                  <a:srgbClr val="1C2833"/>
-                </a:solidFill>
-                <a:latin typeface="Arial" pitchFamily="34" charset="0"/>
-                <a:ea typeface="Arial" pitchFamily="34" charset="-122"/>
-                <a:cs typeface="Arial" pitchFamily="34" charset="-120"/>
-              </a:rPr>
-              <a:t> Read (don't memorise):</a:t>
-            </a:r>
-            <a:endParaRPr lang="en-US" sz="1200" dirty="0"/>
-          </a:p>
-        </p:txBody>
-      </p:sp>
-      <p:sp>
-        <p:nvSpPr>
-          <p:cNvPr id="9" name="Text 7"/>
-          <p:cNvSpPr/>
-          <p:nvPr/>
-        </p:nvSpPr>
-        <p:spPr>
-          <a:xfrm>
-            <a:off x="406301" y="3874740"/>
-            <a:ext cx="8498026" cy="639812"/>
-          </a:xfrm>
-          <a:prstGeom prst="rect">
-            <a:avLst/>
-          </a:prstGeom>
-          <a:noFill/>
-          <a:ln/>
-        </p:spPr>
-        <p:txBody>
-          <a:bodyPr wrap="square" lIns="0" tIns="0" rIns="0" bIns="0" rtlCol="0" anchor="t"/>
-          <a:lstStyle/>
-          <a:p>
-            <a:pPr algn="l" indent="0" marL="0">
-              <a:lnSpc>
-                <a:spcPts val="1680"/>
-              </a:lnSpc>
-              <a:spcBef>
-                <a:spcPts val="300"/>
-              </a:spcBef>
-              <a:spcAft>
-                <a:spcPts val="300"/>
-              </a:spcAft>
-              <a:buNone/>
-            </a:pPr>
-            <a:r>
-              <a:rPr lang="en-US" sz="1200" dirty="0">
-                <a:solidFill>
-                  <a:srgbClr val="1C2833"/>
-                </a:solidFill>
-                <a:latin typeface="Arial" pitchFamily="34" charset="0"/>
-                <a:ea typeface="Arial" pitchFamily="34" charset="-122"/>
-                <a:cs typeface="Arial" pitchFamily="34" charset="-120"/>
-              </a:rPr>
-              <a:t>&gt; "</a:t>
-            </a:r>
-            <a:pPr algn="l" indent="0" marL="0">
-              <a:lnSpc>
-                <a:spcPts val="1680"/>
-              </a:lnSpc>
-              <a:spcBef>
-                <a:spcPts val="300"/>
-              </a:spcBef>
-              <a:spcAft>
-                <a:spcPts val="300"/>
-              </a:spcAft>
-              <a:buNone/>
-            </a:pPr>
-            <a:r>
-              <a:rPr lang="en-US" sz="1200" i="1" dirty="0">
-                <a:solidFill>
-                  <a:srgbClr val="1C2833"/>
-                </a:solidFill>
-                <a:latin typeface="Arial" pitchFamily="34" charset="0"/>
-                <a:ea typeface="Arial" pitchFamily="34" charset="-122"/>
-                <a:cs typeface="Arial" pitchFamily="34" charset="-120"/>
-              </a:rPr>
-              <a:t>mṛdutvaṁ kaṭhinatvaṁ ca śaityam uṣṇatvam eva ca / etat sparśasya sparśatvaṁ tanmātratvaṁ nabhasvataḥ</a:t>
-            </a:r>
-            <a:pPr algn="l" indent="0" marL="0">
-              <a:lnSpc>
-                <a:spcPts val="1680"/>
-              </a:lnSpc>
-              <a:spcBef>
-                <a:spcPts val="300"/>
-              </a:spcBef>
-              <a:spcAft>
-                <a:spcPts val="300"/>
-              </a:spcAft>
-              <a:buNone/>
-            </a:pPr>
-            <a:r>
-              <a:rPr lang="en-US" sz="1200" dirty="0">
-                <a:solidFill>
-                  <a:srgbClr val="1C2833"/>
-                </a:solidFill>
-                <a:latin typeface="Arial" pitchFamily="34" charset="0"/>
-                <a:ea typeface="Arial" pitchFamily="34" charset="-122"/>
-                <a:cs typeface="Arial" pitchFamily="34" charset="-120"/>
-              </a:rPr>
-              <a:t>" &gt; "Softness, hardness, cold and heat — these are the qualities of touch, which is the subtle attribute (</a:t>
-            </a:r>
-            <a:pPr algn="l" indent="0" marL="0">
-              <a:lnSpc>
-                <a:spcPts val="1680"/>
-              </a:lnSpc>
-              <a:spcBef>
-                <a:spcPts val="300"/>
-              </a:spcBef>
-              <a:spcAft>
-                <a:spcPts val="300"/>
-              </a:spcAft>
-              <a:buNone/>
-            </a:pPr>
-            <a:r>
-              <a:rPr lang="en-US" sz="1200" i="1" dirty="0">
-                <a:solidFill>
-                  <a:srgbClr val="1C2833"/>
-                </a:solidFill>
-                <a:latin typeface="Arial" pitchFamily="34" charset="0"/>
-                <a:ea typeface="Arial" pitchFamily="34" charset="-122"/>
-                <a:cs typeface="Arial" pitchFamily="34" charset="-120"/>
-              </a:rPr>
-              <a:t>tanmātra</a:t>
-            </a:r>
-            <a:pPr algn="l" indent="0" marL="0">
-              <a:lnSpc>
-                <a:spcPts val="1680"/>
-              </a:lnSpc>
-              <a:spcBef>
-                <a:spcPts val="300"/>
-              </a:spcBef>
-              <a:spcAft>
-                <a:spcPts val="300"/>
-              </a:spcAft>
-              <a:buNone/>
-            </a:pPr>
-            <a:r>
-              <a:rPr lang="en-US" sz="1200" dirty="0">
-                <a:solidFill>
-                  <a:srgbClr val="1C2833"/>
-                </a:solidFill>
-                <a:latin typeface="Arial" pitchFamily="34" charset="0"/>
-                <a:ea typeface="Arial" pitchFamily="34" charset="-122"/>
-                <a:cs typeface="Arial" pitchFamily="34" charset="-120"/>
-              </a:rPr>
-              <a:t>) of air (</a:t>
-            </a:r>
-            <a:pPr algn="l" indent="0" marL="0">
-              <a:lnSpc>
-                <a:spcPts val="1680"/>
-              </a:lnSpc>
-              <a:spcBef>
-                <a:spcPts val="300"/>
-              </a:spcBef>
-              <a:spcAft>
-                <a:spcPts val="300"/>
-              </a:spcAft>
-              <a:buNone/>
-            </a:pPr>
-            <a:r>
-              <a:rPr lang="en-US" sz="1200" i="1" dirty="0">
-                <a:solidFill>
-                  <a:srgbClr val="1C2833"/>
-                </a:solidFill>
-                <a:latin typeface="Arial" pitchFamily="34" charset="0"/>
-                <a:ea typeface="Arial" pitchFamily="34" charset="-122"/>
-                <a:cs typeface="Arial" pitchFamily="34" charset="-120"/>
-              </a:rPr>
-              <a:t>nabhasvat</a:t>
-            </a:r>
-            <a:pPr algn="l" indent="0" marL="0">
-              <a:lnSpc>
-                <a:spcPts val="1680"/>
-              </a:lnSpc>
-              <a:spcBef>
-                <a:spcPts val="300"/>
-              </a:spcBef>
-              <a:spcAft>
-                <a:spcPts val="300"/>
-              </a:spcAft>
-              <a:buNone/>
-            </a:pPr>
-            <a:r>
-              <a:rPr lang="en-US" sz="1200" dirty="0">
-                <a:solidFill>
-                  <a:srgbClr val="1C2833"/>
-                </a:solidFill>
-                <a:latin typeface="Arial" pitchFamily="34" charset="0"/>
-                <a:ea typeface="Arial" pitchFamily="34" charset="-122"/>
-                <a:cs typeface="Arial" pitchFamily="34" charset="-120"/>
-              </a:rPr>
-              <a:t>)." &gt; — Śrīmad-Bhāgavatam 3.26.36</a:t>
-            </a:r>
-            <a:endParaRPr lang="en-US" sz="1200" dirty="0"/>
-          </a:p>
-        </p:txBody>
-      </p:sp>
-      <p:sp>
-        <p:nvSpPr>
-          <p:cNvPr id="10" name="Text 8"/>
-          <p:cNvSpPr/>
-          <p:nvPr/>
-        </p:nvSpPr>
-        <p:spPr>
-          <a:xfrm>
-            <a:off x="406301" y="4590752"/>
-            <a:ext cx="8498026" cy="426541"/>
-          </a:xfrm>
-          <a:prstGeom prst="rect">
-            <a:avLst/>
-          </a:prstGeom>
-          <a:noFill/>
-          <a:ln/>
-        </p:spPr>
-        <p:txBody>
-          <a:bodyPr wrap="square" lIns="0" tIns="0" rIns="0" bIns="0" rtlCol="0" anchor="t"/>
-          <a:lstStyle/>
-          <a:p>
-            <a:pPr algn="l" indent="0" marL="0">
-              <a:lnSpc>
-                <a:spcPts val="1680"/>
-              </a:lnSpc>
-              <a:spcBef>
-                <a:spcPts val="300"/>
-              </a:spcBef>
-              <a:spcAft>
-                <a:spcPts val="300"/>
-              </a:spcAft>
-              <a:buNone/>
-            </a:pPr>
-            <a:r>
-              <a:rPr lang="en-US" sz="1200" dirty="0">
-                <a:solidFill>
-                  <a:srgbClr val="1C2833"/>
-                </a:solidFill>
-                <a:latin typeface="Arial" pitchFamily="34" charset="0"/>
-                <a:ea typeface="Arial" pitchFamily="34" charset="-122"/>
-                <a:cs typeface="Arial" pitchFamily="34" charset="-120"/>
-              </a:rPr>
-              <a:t>"Notice what the </a:t>
-            </a:r>
-            <a:pPr algn="l" indent="0" marL="0">
-              <a:lnSpc>
-                <a:spcPts val="1680"/>
-              </a:lnSpc>
-              <a:spcBef>
-                <a:spcPts val="300"/>
-              </a:spcBef>
-              <a:spcAft>
-                <a:spcPts val="300"/>
-              </a:spcAft>
-              <a:buNone/>
-            </a:pPr>
-            <a:r>
-              <a:rPr lang="en-US" sz="1200" i="1" dirty="0">
-                <a:solidFill>
-                  <a:srgbClr val="1C2833"/>
-                </a:solidFill>
-                <a:latin typeface="Arial" pitchFamily="34" charset="0"/>
-                <a:ea typeface="Arial" pitchFamily="34" charset="-122"/>
-                <a:cs typeface="Arial" pitchFamily="34" charset="-120"/>
-              </a:rPr>
-              <a:t>tanmātra</a:t>
-            </a:r>
-            <a:pPr algn="l" indent="0" marL="0">
-              <a:lnSpc>
-                <a:spcPts val="1680"/>
-              </a:lnSpc>
-              <a:spcBef>
-                <a:spcPts val="300"/>
-              </a:spcBef>
-              <a:spcAft>
-                <a:spcPts val="300"/>
-              </a:spcAft>
-              <a:buNone/>
-            </a:pPr>
-            <a:r>
-              <a:rPr lang="en-US" sz="1200" dirty="0">
-                <a:solidFill>
-                  <a:srgbClr val="1C2833"/>
-                </a:solidFill>
-                <a:latin typeface="Arial" pitchFamily="34" charset="0"/>
-                <a:ea typeface="Arial" pitchFamily="34" charset="-122"/>
-                <a:cs typeface="Arial" pitchFamily="34" charset="-120"/>
-              </a:rPr>
-              <a:t> of touch is — not just 'softness' but also 'cold and heat.' The tradition is sorting </a:t>
-            </a:r>
-            <a:pPr algn="l" indent="0" marL="0">
-              <a:lnSpc>
-                <a:spcPts val="1680"/>
-              </a:lnSpc>
-              <a:spcBef>
-                <a:spcPts val="300"/>
-              </a:spcBef>
-              <a:spcAft>
-                <a:spcPts val="300"/>
-              </a:spcAft>
-              <a:buNone/>
-            </a:pPr>
-            <a:r>
-              <a:rPr lang="en-US" sz="1200" i="1" dirty="0">
-                <a:solidFill>
-                  <a:srgbClr val="1C2833"/>
-                </a:solidFill>
-                <a:latin typeface="Arial" pitchFamily="34" charset="0"/>
-                <a:ea typeface="Arial" pitchFamily="34" charset="-122"/>
-                <a:cs typeface="Arial" pitchFamily="34" charset="-120"/>
-              </a:rPr>
-              <a:t>physical sensations</a:t>
-            </a:r>
-            <a:pPr algn="l" indent="0" marL="0">
-              <a:lnSpc>
-                <a:spcPts val="1680"/>
-              </a:lnSpc>
-              <a:spcBef>
-                <a:spcPts val="300"/>
-              </a:spcBef>
-              <a:spcAft>
-                <a:spcPts val="300"/>
-              </a:spcAft>
-              <a:buNone/>
-            </a:pPr>
-            <a:r>
-              <a:rPr lang="en-US" sz="1200" dirty="0">
-                <a:solidFill>
-                  <a:srgbClr val="1C2833"/>
-                </a:solidFill>
-                <a:latin typeface="Arial" pitchFamily="34" charset="0"/>
-                <a:ea typeface="Arial" pitchFamily="34" charset="-122"/>
-                <a:cs typeface="Arial" pitchFamily="34" charset="-120"/>
-              </a:rPr>
-              <a:t> into the air-element bucket. Does that surprise you?"</a:t>
-            </a:r>
-            <a:endParaRPr lang="en-US" sz="1200" dirty="0"/>
-          </a:p>
-        </p:txBody>
-      </p:sp>
-      <p:sp>
-        <p:nvSpPr>
-          <p:cNvPr id="11" name="Text 9"/>
-          <p:cNvSpPr/>
-          <p:nvPr/>
-        </p:nvSpPr>
-        <p:spPr>
-          <a:xfrm>
-            <a:off x="634901" y="5106144"/>
-            <a:ext cx="8102798" cy="281880"/>
-          </a:xfrm>
-          <a:prstGeom prst="rect">
-            <a:avLst/>
-          </a:prstGeom>
-          <a:noFill/>
-          <a:ln/>
-        </p:spPr>
-        <p:txBody>
-          <a:bodyPr wrap="square" lIns="0" tIns="0" rIns="0" bIns="0" rtlCol="0" anchor="t"/>
-          <a:lstStyle/>
-          <a:p>
-            <a:pPr algn="l" marL="342900" indent="-342900">
-              <a:lnSpc>
-                <a:spcPts val="1620"/>
-              </a:lnSpc>
-              <a:spcAft>
-                <a:spcPts val="300"/>
-              </a:spcAft>
-              <a:buSzPct val="100000"/>
-              <a:buChar char="•"/>
-            </a:pPr>
-            <a:r>
-              <a:rPr lang="en-US" sz="1200" b="1" dirty="0">
-                <a:solidFill>
-                  <a:srgbClr val="1C2833"/>
-                </a:solidFill>
-                <a:latin typeface="Arial" pitchFamily="34" charset="0"/>
-                <a:ea typeface="Arial" pitchFamily="34" charset="-122"/>
-                <a:cs typeface="Arial" pitchFamily="34" charset="-120"/>
-              </a:rPr>
-              <a:t>Modern parallel (one sentence each, no deep dive yet — that's Day 6):</a:t>
-            </a:r>
-            <a:endParaRPr lang="en-US" sz="1200" dirty="0"/>
-          </a:p>
-        </p:txBody>
-      </p:sp>
-      <p:sp>
-        <p:nvSpPr>
-          <p:cNvPr id="12" name="Text 10"/>
-          <p:cNvSpPr/>
-          <p:nvPr/>
-        </p:nvSpPr>
-        <p:spPr>
-          <a:xfrm>
-            <a:off x="406301" y="5476875"/>
-            <a:ext cx="8498026" cy="853083"/>
-          </a:xfrm>
-          <a:prstGeom prst="rect">
-            <a:avLst/>
-          </a:prstGeom>
-          <a:noFill/>
-          <a:ln/>
-        </p:spPr>
-        <p:txBody>
-          <a:bodyPr wrap="square" lIns="0" tIns="0" rIns="0" bIns="0" rtlCol="0" anchor="t"/>
-          <a:lstStyle/>
-          <a:p>
-            <a:pPr algn="l" indent="0" marL="0">
-              <a:lnSpc>
-                <a:spcPts val="1680"/>
-              </a:lnSpc>
-              <a:spcBef>
-                <a:spcPts val="300"/>
-              </a:spcBef>
-              <a:spcAft>
-                <a:spcPts val="300"/>
-              </a:spcAft>
-              <a:buNone/>
-            </a:pPr>
-            <a:r>
-              <a:rPr lang="en-US" sz="1200" dirty="0">
-                <a:solidFill>
-                  <a:srgbClr val="1C2833"/>
-                </a:solidFill>
-                <a:latin typeface="Arial" pitchFamily="34" charset="0"/>
-                <a:ea typeface="Arial" pitchFamily="34" charset="-122"/>
-                <a:cs typeface="Arial" pitchFamily="34" charset="-120"/>
-              </a:rPr>
-              <a:t>– Modern physiology: sound = pressure waves transmitted through a medium → ear drum. Touch = mechanoreceptors in skin. Form = light reflected off objects → retina. Taste = chemical receptors on tongue. Smell = airborne molecules → olfactory receptors. – Both systems are sorting our perception. The Indian system asks "what kind of </a:t>
-            </a:r>
-            <a:pPr algn="l" indent="0" marL="0">
-              <a:lnSpc>
-                <a:spcPts val="1680"/>
-              </a:lnSpc>
-              <a:spcBef>
-                <a:spcPts val="300"/>
-              </a:spcBef>
-              <a:spcAft>
-                <a:spcPts val="300"/>
-              </a:spcAft>
-              <a:buNone/>
-            </a:pPr>
-            <a:r>
-              <a:rPr lang="en-US" sz="1200" i="1" dirty="0">
-                <a:solidFill>
-                  <a:srgbClr val="1C2833"/>
-                </a:solidFill>
-                <a:latin typeface="Arial" pitchFamily="34" charset="0"/>
-                <a:ea typeface="Arial" pitchFamily="34" charset="-122"/>
-                <a:cs typeface="Arial" pitchFamily="34" charset="-120"/>
-              </a:rPr>
-              <a:t>stuff</a:t>
-            </a:r>
-            <a:pPr algn="l" indent="0" marL="0">
-              <a:lnSpc>
-                <a:spcPts val="1680"/>
-              </a:lnSpc>
-              <a:spcBef>
-                <a:spcPts val="300"/>
-              </a:spcBef>
-              <a:spcAft>
-                <a:spcPts val="300"/>
-              </a:spcAft>
-              <a:buNone/>
-            </a:pPr>
-            <a:r>
-              <a:rPr lang="en-US" sz="1200" dirty="0">
-                <a:solidFill>
-                  <a:srgbClr val="1C2833"/>
-                </a:solidFill>
-                <a:latin typeface="Arial" pitchFamily="34" charset="0"/>
-                <a:ea typeface="Arial" pitchFamily="34" charset="-122"/>
-                <a:cs typeface="Arial" pitchFamily="34" charset="-120"/>
-              </a:rPr>
-              <a:t> does this perception live in?" Modern science asks "what physical process produces this perception?"</a:t>
-            </a:r>
-            <a:endParaRPr lang="en-US" sz="1200" dirty="0"/>
-          </a:p>
-        </p:txBody>
-      </p:sp>
-      <p:sp>
-        <p:nvSpPr>
-          <p:cNvPr id="13" name="Text 11"/>
-          <p:cNvSpPr/>
-          <p:nvPr/>
-        </p:nvSpPr>
-        <p:spPr>
-          <a:xfrm>
-            <a:off x="406301" y="6482358"/>
+            <a:off x="406301" y="4434929"/>
             <a:ext cx="8498026" cy="213271"/>
           </a:xfrm>
           <a:prstGeom prst="rect">
@@ -6323,7 +8337,7 @@
                 <a:ea typeface="Georgia" pitchFamily="34" charset="-122"/>
                 <a:cs typeface="Georgia" pitchFamily="34" charset="-120"/>
               </a:rPr>
-              <a:t>Activity (15 min) — Sense Station Rotation</a:t>
+              <a:t>Core (20 min)</a:t>
             </a:r>
             <a:endParaRPr lang="en-US" sz="1800" dirty="0"/>
           </a:p>
@@ -6337,8 +8351,8 @@
         </p:nvSpPr>
         <p:spPr>
           <a:xfrm>
-            <a:off x="406301" y="870942"/>
-            <a:ext cx="8498026" cy="426541"/>
+            <a:off x="634901" y="883593"/>
+            <a:ext cx="8102798" cy="281880"/>
           </a:xfrm>
           <a:prstGeom prst="rect">
             <a:avLst/>
@@ -6350,13 +8364,31 @@
           <a:bodyPr wrap="square" lIns="0" tIns="0" rIns="0" bIns="0" rtlCol="0" anchor="t"/>
           <a:lstStyle/>
           <a:p>
-            <a:pPr algn="l" indent="0" marL="0">
-              <a:lnSpc>
-                <a:spcPts val="1680"/>
-              </a:lnSpc>
-              <a:spcBef>
-                <a:spcPts val="300"/>
-              </a:spcBef>
+            <a:pPr algn="l" marL="342900" indent="-342900">
+              <a:lnSpc>
+                <a:spcPts val="1620"/>
+              </a:lnSpc>
+              <a:spcAft>
+                <a:spcPts val="300"/>
+              </a:spcAft>
+              <a:buSzPct val="100000"/>
+              <a:buChar char="•"/>
+            </a:pPr>
+            <a:r>
+              <a:rPr lang="en-US" sz="1200" b="1" dirty="0">
+                <a:solidFill>
+                  <a:srgbClr val="1C2833"/>
+                </a:solidFill>
+                <a:latin typeface="Arial" pitchFamily="34" charset="0"/>
+                <a:ea typeface="Arial" pitchFamily="34" charset="-122"/>
+                <a:cs typeface="Arial" pitchFamily="34" charset="-120"/>
+              </a:rPr>
+              <a:t>Build the master table on the board</a:t>
+            </a:r>
+            <a:pPr algn="l" indent="0" marL="0">
+              <a:lnSpc>
+                <a:spcPts val="1620"/>
+              </a:lnSpc>
               <a:spcAft>
                 <a:spcPts val="300"/>
               </a:spcAft>
@@ -6371,7 +8403,7 @@
                 <a:ea typeface="Arial" pitchFamily="34" charset="-122"/>
                 <a:cs typeface="Arial" pitchFamily="34" charset="-120"/>
               </a:rPr>
-              <a:t>– 5 stations around the room (or 5 desks, one per element). Each has:   – A label (Sanskrit + English + tanmātra + sense organ)   – A small sample to perceive (see materials list)   – A worksheet question</a:t>
+              <a:t> (one row at a time, asking students to predict the senses):</a:t>
             </a:r>
             <a:endParaRPr lang="en-US" sz="1200" dirty="0"/>
           </a:p>
@@ -6385,7 +8417,7 @@
         </p:nvSpPr>
         <p:spPr>
           <a:xfrm>
-            <a:off x="406301" y="1373684"/>
+            <a:off x="406301" y="1254323"/>
             <a:ext cx="8498026" cy="213271"/>
           </a:xfrm>
           <a:prstGeom prst="rect">
@@ -6411,15 +8443,15 @@
               <a:buNone/>
             </a:pPr>
             <a:r>
-              <a:rPr lang="en-US" sz="1200" dirty="0">
-                <a:solidFill>
-                  <a:srgbClr val="1C2833"/>
-                </a:solidFill>
-                <a:latin typeface="Arial" pitchFamily="34" charset="0"/>
-                <a:ea typeface="Arial" pitchFamily="34" charset="-122"/>
-                <a:cs typeface="Arial" pitchFamily="34" charset="-120"/>
-              </a:rPr>
-              <a:t>– Students work in pairs. 2 minutes per station. They rotate clockwise.</a:t>
+              <a:rPr lang="en-US" sz="1200" i="1" dirty="0">
+                <a:solidFill>
+                  <a:srgbClr val="1C2833"/>
+                </a:solidFill>
+                <a:latin typeface="Arial" pitchFamily="34" charset="0"/>
+                <a:ea typeface="Arial" pitchFamily="34" charset="-122"/>
+                <a:cs typeface="Arial" pitchFamily="34" charset="-120"/>
+              </a:rPr>
+              <a:t>Each row: Element · Tanmātra (quality) · Sense organ · Test it:.</a:t>
             </a:r>
             <a:endParaRPr lang="en-US" sz="1200" dirty="0"/>
           </a:p>
@@ -6428,206 +8460,6 @@
       <p:sp>
         <p:nvSpPr>
           <p:cNvPr id="6" name="Text 4"/>
-          <p:cNvSpPr/>
-          <p:nvPr/>
-        </p:nvSpPr>
-        <p:spPr>
-          <a:xfrm>
-            <a:off x="406301" y="1663154"/>
-            <a:ext cx="8498026" cy="426541"/>
-          </a:xfrm>
-          <a:prstGeom prst="rect">
-            <a:avLst/>
-          </a:prstGeom>
-          <a:noFill/>
-          <a:ln/>
-        </p:spPr>
-        <p:txBody>
-          <a:bodyPr wrap="square" lIns="0" tIns="0" rIns="0" bIns="0" rtlCol="0" anchor="t"/>
-          <a:lstStyle/>
-          <a:p>
-            <a:pPr algn="l" indent="0" marL="0">
-              <a:lnSpc>
-                <a:spcPts val="1680"/>
-              </a:lnSpc>
-              <a:spcBef>
-                <a:spcPts val="300"/>
-              </a:spcBef>
-              <a:spcAft>
-                <a:spcPts val="300"/>
-              </a:spcAft>
-              <a:buNone/>
-            </a:pPr>
-            <a:r>
-              <a:rPr lang="en-US" sz="1200" dirty="0">
-                <a:solidFill>
-                  <a:srgbClr val="1C2833"/>
-                </a:solidFill>
-                <a:latin typeface="Arial" pitchFamily="34" charset="0"/>
-                <a:ea typeface="Arial" pitchFamily="34" charset="-122"/>
-                <a:cs typeface="Arial" pitchFamily="34" charset="-120"/>
-              </a:rPr>
-              <a:t>– At each station, they answer in one sentence: </a:t>
-            </a:r>
-            <a:pPr algn="l" indent="0" marL="0">
-              <a:lnSpc>
-                <a:spcPts val="1680"/>
-              </a:lnSpc>
-              <a:spcBef>
-                <a:spcPts val="300"/>
-              </a:spcBef>
-              <a:spcAft>
-                <a:spcPts val="300"/>
-              </a:spcAft>
-              <a:buNone/>
-            </a:pPr>
-            <a:r>
-              <a:rPr lang="en-US" sz="1200" i="1" dirty="0">
-                <a:solidFill>
-                  <a:srgbClr val="1C2833"/>
-                </a:solidFill>
-                <a:latin typeface="Arial" pitchFamily="34" charset="0"/>
-                <a:ea typeface="Arial" pitchFamily="34" charset="-122"/>
-                <a:cs typeface="Arial" pitchFamily="34" charset="-120"/>
-              </a:rPr>
-              <a:t>"What did I perceive? What other element could I perceive at the same time?"</a:t>
-            </a:r>
-            <a:pPr algn="l" indent="0" marL="0">
-              <a:lnSpc>
-                <a:spcPts val="1680"/>
-              </a:lnSpc>
-              <a:spcBef>
-                <a:spcPts val="300"/>
-              </a:spcBef>
-              <a:spcAft>
-                <a:spcPts val="300"/>
-              </a:spcAft>
-              <a:buNone/>
-            </a:pPr>
-            <a:r>
-              <a:rPr lang="en-US" sz="1200" dirty="0">
-                <a:solidFill>
-                  <a:srgbClr val="1C2833"/>
-                </a:solidFill>
-                <a:latin typeface="Arial" pitchFamily="34" charset="0"/>
-                <a:ea typeface="Arial" pitchFamily="34" charset="-122"/>
-                <a:cs typeface="Arial" pitchFamily="34" charset="-120"/>
-              </a:rPr>
-              <a:t> (E.g. at the bell station: heard the sound — also felt the vibration if they touched the bell.)</a:t>
-            </a:r>
-            <a:endParaRPr lang="en-US" sz="1200" dirty="0"/>
-          </a:p>
-        </p:txBody>
-      </p:sp>
-      <p:sp>
-        <p:nvSpPr>
-          <p:cNvPr id="7" name="Text 5"/>
-          <p:cNvSpPr/>
-          <p:nvPr/>
-        </p:nvSpPr>
-        <p:spPr>
-          <a:xfrm>
-            <a:off x="634901" y="2178546"/>
-            <a:ext cx="8102798" cy="487561"/>
-          </a:xfrm>
-          <a:prstGeom prst="rect">
-            <a:avLst/>
-          </a:prstGeom>
-          <a:noFill/>
-          <a:ln/>
-        </p:spPr>
-        <p:txBody>
-          <a:bodyPr wrap="square" lIns="0" tIns="0" rIns="0" bIns="0" rtlCol="0" anchor="t"/>
-          <a:lstStyle/>
-          <a:p>
-            <a:pPr algn="l" marL="342900" indent="-342900">
-              <a:lnSpc>
-                <a:spcPts val="1620"/>
-              </a:lnSpc>
-              <a:spcAft>
-                <a:spcPts val="300"/>
-              </a:spcAft>
-              <a:buSzPct val="100000"/>
-              <a:buChar char="•"/>
-            </a:pPr>
-            <a:r>
-              <a:rPr lang="en-US" sz="1200" b="1" dirty="0">
-                <a:solidFill>
-                  <a:srgbClr val="1C2833"/>
-                </a:solidFill>
-                <a:latin typeface="Arial" pitchFamily="34" charset="0"/>
-                <a:ea typeface="Arial" pitchFamily="34" charset="-122"/>
-                <a:cs typeface="Arial" pitchFamily="34" charset="-120"/>
-              </a:rPr>
-              <a:t>End-of-rotation discussion (3 min):</a:t>
-            </a:r>
-            <a:pPr algn="l" indent="0" marL="0">
-              <a:lnSpc>
-                <a:spcPts val="1620"/>
-              </a:lnSpc>
-              <a:spcAft>
-                <a:spcPts val="300"/>
-              </a:spcAft>
-              <a:buNone/>
-            </a:pPr>
-            <a:r>
-              <a:rPr lang="en-US" sz="1200" dirty="0">
-                <a:solidFill>
-                  <a:srgbClr val="1C2833"/>
-                </a:solidFill>
-                <a:latin typeface="Arial" pitchFamily="34" charset="0"/>
-                <a:ea typeface="Arial" pitchFamily="34" charset="-122"/>
-                <a:cs typeface="Arial" pitchFamily="34" charset="-120"/>
-              </a:rPr>
-              <a:t> Did any sample give you </a:t>
-            </a:r>
-            <a:pPr algn="l" indent="0" marL="0">
-              <a:lnSpc>
-                <a:spcPts val="1620"/>
-              </a:lnSpc>
-              <a:spcAft>
-                <a:spcPts val="300"/>
-              </a:spcAft>
-              <a:buNone/>
-            </a:pPr>
-            <a:r>
-              <a:rPr lang="en-US" sz="1200" i="1" dirty="0">
-                <a:solidFill>
-                  <a:srgbClr val="1C2833"/>
-                </a:solidFill>
-                <a:latin typeface="Arial" pitchFamily="34" charset="0"/>
-                <a:ea typeface="Arial" pitchFamily="34" charset="-122"/>
-                <a:cs typeface="Arial" pitchFamily="34" charset="-120"/>
-              </a:rPr>
-              <a:t>more than one</a:t>
-            </a:r>
-            <a:pPr algn="l" indent="0" marL="0">
-              <a:lnSpc>
-                <a:spcPts val="1620"/>
-              </a:lnSpc>
-              <a:spcAft>
-                <a:spcPts val="300"/>
-              </a:spcAft>
-              <a:buNone/>
-            </a:pPr>
-            <a:r>
-              <a:rPr lang="en-US" sz="1200" dirty="0">
-                <a:solidFill>
-                  <a:srgbClr val="1C2833"/>
-                </a:solidFill>
-                <a:latin typeface="Arial" pitchFamily="34" charset="0"/>
-                <a:ea typeface="Arial" pitchFamily="34" charset="-122"/>
-                <a:cs typeface="Arial" pitchFamily="34" charset="-120"/>
-              </a:rPr>
-              <a:t> perception? Which? What does that tell us about how the elements overlap in the real world?</a:t>
-            </a:r>
-            <a:endParaRPr lang="en-US" sz="1200" dirty="0"/>
-          </a:p>
-        </p:txBody>
-      </p:sp>
-      <p:sp>
-        <p:nvSpPr>
-          <p:cNvPr id="8" name="Text 6"/>
           <p:cNvSpPr/>
           <p:nvPr/>
         </p:nvSpPr>
@@ -6777,7 +8609,7 @@
                 <a:ea typeface="Georgia" pitchFamily="34" charset="-122"/>
                 <a:cs typeface="Georgia" pitchFamily="34" charset="-120"/>
               </a:rPr>
-              <a:t>Wrap-up (5 min)</a:t>
+              <a:t>Core (20 min) (cont.)</a:t>
             </a:r>
             <a:endParaRPr lang="en-US" sz="1800" dirty="0"/>
           </a:p>
@@ -6792,7 +8624,7 @@
         <p:spPr>
           <a:xfrm>
             <a:off x="634901" y="883593"/>
-            <a:ext cx="8102798" cy="300930"/>
+            <a:ext cx="8102798" cy="1257002"/>
           </a:xfrm>
           <a:prstGeom prst="rect">
             <a:avLst/>
@@ -6815,15 +8647,15 @@
               <a:buChar char="•"/>
             </a:pPr>
             <a:r>
-              <a:rPr lang="en-US" sz="1200" b="1" dirty="0">
-                <a:solidFill>
-                  <a:srgbClr val="1C2833"/>
-                </a:solidFill>
-                <a:latin typeface="Arial" pitchFamily="34" charset="0"/>
-                <a:ea typeface="Arial" pitchFamily="34" charset="-122"/>
-                <a:cs typeface="Arial" pitchFamily="34" charset="-120"/>
-              </a:rPr>
-              <a:t>Formative quiz on a slip of paper (5 questions, 3 min)</a:t>
+              <a:rPr lang="en-US" sz="1200" i="1" dirty="0">
+                <a:solidFill>
+                  <a:srgbClr val="1C2833"/>
+                </a:solidFill>
+                <a:latin typeface="Arial" pitchFamily="34" charset="0"/>
+                <a:ea typeface="Arial" pitchFamily="34" charset="-122"/>
+                <a:cs typeface="Arial" pitchFamily="34" charset="-120"/>
+              </a:rPr>
+              <a:t>ākāśa</a:t>
             </a:r>
             <a:pPr algn="l" indent="0" marL="0">
               <a:lnSpc>
@@ -6843,7 +8675,27 @@
                 <a:ea typeface="Arial" pitchFamily="34" charset="-122"/>
                 <a:cs typeface="Arial" pitchFamily="34" charset="-120"/>
               </a:rPr>
-              <a:t> — see </a:t>
+              <a:t> (space) — </a:t>
+            </a:r>
+            <a:pPr algn="l" indent="0" marL="0">
+              <a:lnSpc>
+                <a:spcPts val="1620"/>
+              </a:lnSpc>
+              <a:spcAft>
+                <a:spcPts val="300"/>
+              </a:spcAft>
+              <a:buNone/>
+            </a:pPr>
+            <a:r>
+              <a:rPr lang="en-US" sz="1200" i="1" dirty="0">
+                <a:solidFill>
+                  <a:srgbClr val="1C2833"/>
+                </a:solidFill>
+                <a:latin typeface="Arial" pitchFamily="34" charset="0"/>
+                <a:ea typeface="Arial" pitchFamily="34" charset="-122"/>
+                <a:cs typeface="Arial" pitchFamily="34" charset="-120"/>
+              </a:rPr>
+              <a:t>śabda</a:t>
             </a:r>
             <a:pPr algn="l" indent="0" marL="0">
               <a:lnSpc>
@@ -6863,7 +8715,31 @@
                 <a:ea typeface="Arial" pitchFamily="34" charset="-122"/>
                 <a:cs typeface="Arial" pitchFamily="34" charset="-120"/>
               </a:rPr>
-              <a:t>quizzes/formative.md</a:t>
+              <a:t> (sound) · ear · Ring the bell</a:t>
+            </a:r>
+            <a:endParaRPr lang="en-US" sz="1200" dirty="0"/>
+          </a:p>
+          <a:p>
+            <a:pPr algn="l" marL="342900" indent="-342900">
+              <a:lnSpc>
+                <a:spcPts val="1620"/>
+              </a:lnSpc>
+              <a:spcAft>
+                <a:spcPts val="300"/>
+              </a:spcAft>
+              <a:buSzPct val="100000"/>
+              <a:buChar char="•"/>
+            </a:pPr>
+            <a:r>
+              <a:rPr lang="en-US" sz="1200" i="1" dirty="0">
+                <a:solidFill>
+                  <a:srgbClr val="1C2833"/>
+                </a:solidFill>
+                <a:latin typeface="Arial" pitchFamily="34" charset="0"/>
+                <a:ea typeface="Arial" pitchFamily="34" charset="-122"/>
+                <a:cs typeface="Arial" pitchFamily="34" charset="-120"/>
+              </a:rPr>
+              <a:t>vāyu</a:t>
             </a:r>
             <a:pPr algn="l" indent="0" marL="0">
               <a:lnSpc>
@@ -6883,63 +8759,307 @@
                 <a:ea typeface="Arial" pitchFamily="34" charset="-122"/>
                 <a:cs typeface="Arial" pitchFamily="34" charset="-120"/>
               </a:rPr>
-              <a:t> Part A.</a:t>
+              <a:t> (air) — </a:t>
+            </a:r>
+            <a:pPr algn="l" indent="0" marL="0">
+              <a:lnSpc>
+                <a:spcPts val="1620"/>
+              </a:lnSpc>
+              <a:spcAft>
+                <a:spcPts val="300"/>
+              </a:spcAft>
+              <a:buNone/>
+            </a:pPr>
+            <a:r>
+              <a:rPr lang="en-US" sz="1200" i="1" dirty="0">
+                <a:solidFill>
+                  <a:srgbClr val="1C2833"/>
+                </a:solidFill>
+                <a:latin typeface="Arial" pitchFamily="34" charset="0"/>
+                <a:ea typeface="Arial" pitchFamily="34" charset="-122"/>
+                <a:cs typeface="Arial" pitchFamily="34" charset="-120"/>
+              </a:rPr>
+              <a:t>sparśa</a:t>
+            </a:r>
+            <a:pPr algn="l" indent="0" marL="0">
+              <a:lnSpc>
+                <a:spcPts val="1620"/>
+              </a:lnSpc>
+              <a:spcAft>
+                <a:spcPts val="300"/>
+              </a:spcAft>
+              <a:buNone/>
+            </a:pPr>
+            <a:r>
+              <a:rPr lang="en-US" sz="1200" dirty="0">
+                <a:solidFill>
+                  <a:srgbClr val="1C2833"/>
+                </a:solidFill>
+                <a:latin typeface="Arial" pitchFamily="34" charset="0"/>
+                <a:ea typeface="Arial" pitchFamily="34" charset="-122"/>
+                <a:cs typeface="Arial" pitchFamily="34" charset="-120"/>
+              </a:rPr>
+              <a:t> (touch) · skin · Feel a breeze on your hand</a:t>
             </a:r>
             <a:endParaRPr lang="en-US" sz="1200" dirty="0"/>
           </a:p>
+          <a:p>
+            <a:pPr algn="l" marL="342900" indent="-342900">
+              <a:lnSpc>
+                <a:spcPts val="1620"/>
+              </a:lnSpc>
+              <a:spcAft>
+                <a:spcPts val="300"/>
+              </a:spcAft>
+              <a:buSzPct val="100000"/>
+              <a:buChar char="•"/>
+            </a:pPr>
+            <a:r>
+              <a:rPr lang="en-US" sz="1200" i="1" dirty="0">
+                <a:solidFill>
+                  <a:srgbClr val="1C2833"/>
+                </a:solidFill>
+                <a:latin typeface="Arial" pitchFamily="34" charset="0"/>
+                <a:ea typeface="Arial" pitchFamily="34" charset="-122"/>
+                <a:cs typeface="Arial" pitchFamily="34" charset="-120"/>
+              </a:rPr>
+              <a:t>tejas</a:t>
+            </a:r>
+            <a:pPr algn="l" indent="0" marL="0">
+              <a:lnSpc>
+                <a:spcPts val="1620"/>
+              </a:lnSpc>
+              <a:spcAft>
+                <a:spcPts val="300"/>
+              </a:spcAft>
+              <a:buNone/>
+            </a:pPr>
+            <a:r>
+              <a:rPr lang="en-US" sz="1200" dirty="0">
+                <a:solidFill>
+                  <a:srgbClr val="1C2833"/>
+                </a:solidFill>
+                <a:latin typeface="Arial" pitchFamily="34" charset="0"/>
+                <a:ea typeface="Arial" pitchFamily="34" charset="-122"/>
+                <a:cs typeface="Arial" pitchFamily="34" charset="-120"/>
+              </a:rPr>
+              <a:t> (fire) — </a:t>
+            </a:r>
+            <a:pPr algn="l" indent="0" marL="0">
+              <a:lnSpc>
+                <a:spcPts val="1620"/>
+              </a:lnSpc>
+              <a:spcAft>
+                <a:spcPts val="300"/>
+              </a:spcAft>
+              <a:buNone/>
+            </a:pPr>
+            <a:r>
+              <a:rPr lang="en-US" sz="1200" i="1" dirty="0">
+                <a:solidFill>
+                  <a:srgbClr val="1C2833"/>
+                </a:solidFill>
+                <a:latin typeface="Arial" pitchFamily="34" charset="0"/>
+                <a:ea typeface="Arial" pitchFamily="34" charset="-122"/>
+                <a:cs typeface="Arial" pitchFamily="34" charset="-120"/>
+              </a:rPr>
+              <a:t>rūpa</a:t>
+            </a:r>
+            <a:pPr algn="l" indent="0" marL="0">
+              <a:lnSpc>
+                <a:spcPts val="1620"/>
+              </a:lnSpc>
+              <a:spcAft>
+                <a:spcPts val="300"/>
+              </a:spcAft>
+              <a:buNone/>
+            </a:pPr>
+            <a:r>
+              <a:rPr lang="en-US" sz="1200" dirty="0">
+                <a:solidFill>
+                  <a:srgbClr val="1C2833"/>
+                </a:solidFill>
+                <a:latin typeface="Arial" pitchFamily="34" charset="0"/>
+                <a:ea typeface="Arial" pitchFamily="34" charset="-122"/>
+                <a:cs typeface="Arial" pitchFamily="34" charset="-120"/>
+              </a:rPr>
+              <a:t> (form / colour) · eye · Look at a flame's colour</a:t>
+            </a:r>
+            <a:endParaRPr lang="en-US" sz="1200" dirty="0"/>
+          </a:p>
+          <a:p>
+            <a:pPr algn="l" marL="342900" indent="-342900">
+              <a:lnSpc>
+                <a:spcPts val="1620"/>
+              </a:lnSpc>
+              <a:spcAft>
+                <a:spcPts val="300"/>
+              </a:spcAft>
+              <a:buSzPct val="100000"/>
+              <a:buChar char="•"/>
+            </a:pPr>
+            <a:r>
+              <a:rPr lang="en-US" sz="1200" i="1" dirty="0">
+                <a:solidFill>
+                  <a:srgbClr val="1C2833"/>
+                </a:solidFill>
+                <a:latin typeface="Arial" pitchFamily="34" charset="0"/>
+                <a:ea typeface="Arial" pitchFamily="34" charset="-122"/>
+                <a:cs typeface="Arial" pitchFamily="34" charset="-120"/>
+              </a:rPr>
+              <a:t>ap</a:t>
+            </a:r>
+            <a:pPr algn="l" indent="0" marL="0">
+              <a:lnSpc>
+                <a:spcPts val="1620"/>
+              </a:lnSpc>
+              <a:spcAft>
+                <a:spcPts val="300"/>
+              </a:spcAft>
+              <a:buNone/>
+            </a:pPr>
+            <a:r>
+              <a:rPr lang="en-US" sz="1200" dirty="0">
+                <a:solidFill>
+                  <a:srgbClr val="1C2833"/>
+                </a:solidFill>
+                <a:latin typeface="Arial" pitchFamily="34" charset="0"/>
+                <a:ea typeface="Arial" pitchFamily="34" charset="-122"/>
+                <a:cs typeface="Arial" pitchFamily="34" charset="-120"/>
+              </a:rPr>
+              <a:t> (water) — </a:t>
+            </a:r>
+            <a:pPr algn="l" indent="0" marL="0">
+              <a:lnSpc>
+                <a:spcPts val="1620"/>
+              </a:lnSpc>
+              <a:spcAft>
+                <a:spcPts val="300"/>
+              </a:spcAft>
+              <a:buNone/>
+            </a:pPr>
+            <a:r>
+              <a:rPr lang="en-US" sz="1200" i="1" dirty="0">
+                <a:solidFill>
+                  <a:srgbClr val="1C2833"/>
+                </a:solidFill>
+                <a:latin typeface="Arial" pitchFamily="34" charset="0"/>
+                <a:ea typeface="Arial" pitchFamily="34" charset="-122"/>
+                <a:cs typeface="Arial" pitchFamily="34" charset="-120"/>
+              </a:rPr>
+              <a:t>rasa</a:t>
+            </a:r>
+            <a:pPr algn="l" indent="0" marL="0">
+              <a:lnSpc>
+                <a:spcPts val="1620"/>
+              </a:lnSpc>
+              <a:spcAft>
+                <a:spcPts val="300"/>
+              </a:spcAft>
+              <a:buNone/>
+            </a:pPr>
+            <a:r>
+              <a:rPr lang="en-US" sz="1200" dirty="0">
+                <a:solidFill>
+                  <a:srgbClr val="1C2833"/>
+                </a:solidFill>
+                <a:latin typeface="Arial" pitchFamily="34" charset="0"/>
+                <a:ea typeface="Arial" pitchFamily="34" charset="-122"/>
+                <a:cs typeface="Arial" pitchFamily="34" charset="-120"/>
+              </a:rPr>
+              <a:t> (taste) · tongue · Taste sweetness / saltiness</a:t>
+            </a:r>
+            <a:endParaRPr lang="en-US" sz="1200" dirty="0"/>
+          </a:p>
+          <a:p>
+            <a:pPr algn="l" marL="342900" indent="-342900">
+              <a:lnSpc>
+                <a:spcPts val="1620"/>
+              </a:lnSpc>
+              <a:spcAft>
+                <a:spcPts val="300"/>
+              </a:spcAft>
+              <a:buSzPct val="100000"/>
+              <a:buChar char="•"/>
+            </a:pPr>
+            <a:r>
+              <a:rPr lang="en-US" sz="1200" i="1" dirty="0">
+                <a:solidFill>
+                  <a:srgbClr val="1C2833"/>
+                </a:solidFill>
+                <a:latin typeface="Arial" pitchFamily="34" charset="0"/>
+                <a:ea typeface="Arial" pitchFamily="34" charset="-122"/>
+                <a:cs typeface="Arial" pitchFamily="34" charset="-120"/>
+              </a:rPr>
+              <a:t>pṛthvī</a:t>
+            </a:r>
+            <a:pPr algn="l" indent="0" marL="0">
+              <a:lnSpc>
+                <a:spcPts val="1620"/>
+              </a:lnSpc>
+              <a:spcAft>
+                <a:spcPts val="300"/>
+              </a:spcAft>
+              <a:buNone/>
+            </a:pPr>
+            <a:r>
+              <a:rPr lang="en-US" sz="1200" dirty="0">
+                <a:solidFill>
+                  <a:srgbClr val="1C2833"/>
+                </a:solidFill>
+                <a:latin typeface="Arial" pitchFamily="34" charset="0"/>
+                <a:ea typeface="Arial" pitchFamily="34" charset="-122"/>
+                <a:cs typeface="Arial" pitchFamily="34" charset="-120"/>
+              </a:rPr>
+              <a:t> (earth) — </a:t>
+            </a:r>
+            <a:pPr algn="l" indent="0" marL="0">
+              <a:lnSpc>
+                <a:spcPts val="1620"/>
+              </a:lnSpc>
+              <a:spcAft>
+                <a:spcPts val="300"/>
+              </a:spcAft>
+              <a:buNone/>
+            </a:pPr>
+            <a:r>
+              <a:rPr lang="en-US" sz="1200" i="1" dirty="0">
+                <a:solidFill>
+                  <a:srgbClr val="1C2833"/>
+                </a:solidFill>
+                <a:latin typeface="Arial" pitchFamily="34" charset="0"/>
+                <a:ea typeface="Arial" pitchFamily="34" charset="-122"/>
+                <a:cs typeface="Arial" pitchFamily="34" charset="-120"/>
+              </a:rPr>
+              <a:t>gandha</a:t>
+            </a:r>
+            <a:pPr algn="l" indent="0" marL="0">
+              <a:lnSpc>
+                <a:spcPts val="1620"/>
+              </a:lnSpc>
+              <a:spcAft>
+                <a:spcPts val="300"/>
+              </a:spcAft>
+              <a:buNone/>
+            </a:pPr>
+            <a:r>
+              <a:rPr lang="en-US" sz="1200" dirty="0">
+                <a:solidFill>
+                  <a:srgbClr val="1C2833"/>
+                </a:solidFill>
+                <a:latin typeface="Arial" pitchFamily="34" charset="0"/>
+                <a:ea typeface="Arial" pitchFamily="34" charset="-122"/>
+                <a:cs typeface="Arial" pitchFamily="34" charset="-120"/>
+              </a:rPr>
+              <a:t> (smell) · nose · Smell soil, or jaggery, or peel</a:t>
+            </a:r>
+            <a:endParaRPr lang="en-US" sz="1200" dirty="0"/>
+          </a:p>
         </p:txBody>
       </p:sp>
       <p:sp>
         <p:nvSpPr>
           <p:cNvPr id="5" name="Text 3"/>
-          <p:cNvSpPr/>
-          <p:nvPr/>
-        </p:nvSpPr>
-        <p:spPr>
-          <a:xfrm>
-            <a:off x="406301" y="1273373"/>
-            <a:ext cx="8498026" cy="213271"/>
-          </a:xfrm>
-          <a:prstGeom prst="rect">
-            <a:avLst/>
-          </a:prstGeom>
-          <a:noFill/>
-          <a:ln/>
-        </p:spPr>
-        <p:txBody>
-          <a:bodyPr wrap="square" lIns="0" tIns="0" rIns="0" bIns="0" rtlCol="0" anchor="t"/>
-          <a:lstStyle/>
-          <a:p>
-            <a:pPr algn="l" indent="0" marL="0">
-              <a:lnSpc>
-                <a:spcPts val="1680"/>
-              </a:lnSpc>
-              <a:spcBef>
-                <a:spcPts val="300"/>
-              </a:spcBef>
-              <a:spcAft>
-                <a:spcPts val="300"/>
-              </a:spcAft>
-              <a:buNone/>
-            </a:pPr>
-            <a:r>
-              <a:rPr lang="en-US" sz="1200" dirty="0">
-                <a:solidFill>
-                  <a:srgbClr val="1C2833"/>
-                </a:solidFill>
-                <a:latin typeface="Arial" pitchFamily="34" charset="0"/>
-                <a:ea typeface="Arial" pitchFamily="34" charset="-122"/>
-                <a:cs typeface="Arial" pitchFamily="34" charset="-120"/>
-              </a:rPr>
-              <a:t>– Collect for grading; the next day's class includes the result.</a:t>
-            </a:r>
-            <a:endParaRPr lang="en-US" sz="1200" dirty="0"/>
-          </a:p>
-        </p:txBody>
-      </p:sp>
-      <p:sp>
-        <p:nvSpPr>
-          <p:cNvPr id="6" name="Text 4"/>
           <p:cNvSpPr/>
           <p:nvPr/>
         </p:nvSpPr>
@@ -7089,7 +9209,7 @@
                 <a:ea typeface="Georgia" pitchFamily="34" charset="-122"/>
                 <a:cs typeface="Georgia" pitchFamily="34" charset="-120"/>
               </a:rPr>
-              <a:t>Student-facing content</a:t>
+              <a:t>Core (20 min) (cont.)</a:t>
             </a:r>
             <a:endParaRPr lang="en-US" sz="1800" dirty="0"/>
           </a:p>
@@ -7103,61 +9223,8 @@
         </p:nvSpPr>
         <p:spPr>
           <a:xfrm>
-            <a:off x="406301" y="883593"/>
-            <a:ext cx="8331398" cy="2343150"/>
-          </a:xfrm>
-          <a:prstGeom prst="rect">
-            <a:avLst/>
-          </a:prstGeom>
-          <a:solidFill>
-            <a:srgbClr val="F4F8F9"/>
-          </a:solidFill>
-          <a:ln/>
-        </p:spPr>
-        <p:txBody>
-          <a:bodyPr wrap="square" rtlCol="0" anchor="ctr"/>
-          <a:lstStyle/>
-          <a:p>
-            <a:pPr indent="0" marL="0">
-              <a:buNone/>
-            </a:pPr>
-            <a:endParaRPr lang="en-US" dirty="0"/>
-          </a:p>
-        </p:txBody>
-      </p:sp>
-      <p:sp>
-        <p:nvSpPr>
-          <p:cNvPr id="5" name="Shape 3"/>
-          <p:cNvSpPr/>
-          <p:nvPr/>
-        </p:nvSpPr>
-        <p:spPr>
-          <a:xfrm>
-            <a:off x="434876" y="883593"/>
-            <a:ext cx="0" cy="2343150"/>
-          </a:xfrm>
-          <a:prstGeom prst="line">
-            <a:avLst/>
-          </a:prstGeom>
-          <a:noFill/>
-          <a:ln w="57150">
-            <a:solidFill>
-              <a:srgbClr val="FE4447"/>
-            </a:solidFill>
-            <a:prstDash val="solid"/>
-          </a:ln>
-        </p:spPr>
-      </p:sp>
-      <p:sp>
-        <p:nvSpPr>
-          <p:cNvPr id="6" name="Text 4"/>
-          <p:cNvSpPr/>
-          <p:nvPr/>
-        </p:nvSpPr>
-        <p:spPr>
-          <a:xfrm>
-            <a:off x="692051" y="1074093"/>
-            <a:ext cx="7973389" cy="230981"/>
+            <a:off x="634901" y="883593"/>
+            <a:ext cx="8102798" cy="487561"/>
           </a:xfrm>
           <a:prstGeom prst="rect">
             <a:avLst/>
@@ -7169,43 +9236,141 @@
           <a:bodyPr wrap="square" lIns="0" tIns="0" rIns="0" bIns="0" rtlCol="0" anchor="t"/>
           <a:lstStyle/>
           <a:p>
-            <a:pPr algn="l" indent="0" marL="0">
-              <a:lnSpc>
-                <a:spcPts val="1820"/>
-              </a:lnSpc>
-              <a:spcBef>
-                <a:spcPts val="300"/>
-              </a:spcBef>
-              <a:spcAft>
-                <a:spcPts val="300"/>
-              </a:spcAft>
-              <a:buNone/>
-            </a:pPr>
-            <a:r>
-              <a:rPr lang="en-US" sz="1300" b="1" i="1" dirty="0">
-                <a:solidFill>
-                  <a:srgbClr val="1C2833"/>
-                </a:solidFill>
-                <a:latin typeface="Georgia" pitchFamily="34" charset="0"/>
-                <a:ea typeface="Georgia" pitchFamily="34" charset="-122"/>
-                <a:cs typeface="Georgia" pitchFamily="34" charset="-120"/>
-              </a:rPr>
-              <a:t>Each element has a quality. Each quality is perceived by a sense.</a:t>
-            </a:r>
-            <a:endParaRPr lang="en-US" sz="1300" dirty="0"/>
-          </a:p>
-        </p:txBody>
-      </p:sp>
-      <p:sp>
-        <p:nvSpPr>
-          <p:cNvPr id="7" name="Text 5"/>
+            <a:pPr algn="l" marL="342900" indent="-342900">
+              <a:lnSpc>
+                <a:spcPts val="1620"/>
+              </a:lnSpc>
+              <a:spcAft>
+                <a:spcPts val="300"/>
+              </a:spcAft>
+              <a:buSzPct val="100000"/>
+              <a:buChar char="•"/>
+            </a:pPr>
+            <a:r>
+              <a:rPr lang="en-US" sz="1200" b="1" dirty="0">
+                <a:solidFill>
+                  <a:srgbClr val="1C2833"/>
+                </a:solidFill>
+                <a:latin typeface="Arial" pitchFamily="34" charset="0"/>
+                <a:ea typeface="Arial" pitchFamily="34" charset="-122"/>
+                <a:cs typeface="Arial" pitchFamily="34" charset="-120"/>
+              </a:rPr>
+              <a:t>Connect to yesterday's quality-count rule:</a:t>
+            </a:r>
+            <a:pPr algn="l" indent="0" marL="0">
+              <a:lnSpc>
+                <a:spcPts val="1620"/>
+              </a:lnSpc>
+              <a:spcAft>
+                <a:spcPts val="300"/>
+              </a:spcAft>
+              <a:buNone/>
+            </a:pPr>
+            <a:r>
+              <a:rPr lang="en-US" sz="1200" dirty="0">
+                <a:solidFill>
+                  <a:srgbClr val="1C2833"/>
+                </a:solidFill>
+                <a:latin typeface="Arial" pitchFamily="34" charset="0"/>
+                <a:ea typeface="Arial" pitchFamily="34" charset="-122"/>
+                <a:cs typeface="Arial" pitchFamily="34" charset="-120"/>
+              </a:rPr>
+              <a:t> the </a:t>
+            </a:r>
+            <a:pPr algn="l" indent="0" marL="0">
+              <a:lnSpc>
+                <a:spcPts val="1620"/>
+              </a:lnSpc>
+              <a:spcAft>
+                <a:spcPts val="300"/>
+              </a:spcAft>
+              <a:buNone/>
+            </a:pPr>
+            <a:r>
+              <a:rPr lang="en-US" sz="1200" i="1" dirty="0">
+                <a:solidFill>
+                  <a:srgbClr val="1C2833"/>
+                </a:solidFill>
+                <a:latin typeface="Arial" pitchFamily="34" charset="0"/>
+                <a:ea typeface="Arial" pitchFamily="34" charset="-122"/>
+                <a:cs typeface="Arial" pitchFamily="34" charset="-120"/>
+              </a:rPr>
+              <a:t>tanmātra</a:t>
+            </a:r>
+            <a:pPr algn="l" indent="0" marL="0">
+              <a:lnSpc>
+                <a:spcPts val="1620"/>
+              </a:lnSpc>
+              <a:spcAft>
+                <a:spcPts val="300"/>
+              </a:spcAft>
+              <a:buNone/>
+            </a:pPr>
+            <a:r>
+              <a:rPr lang="en-US" sz="1200" dirty="0">
+                <a:solidFill>
+                  <a:srgbClr val="1C2833"/>
+                </a:solidFill>
+                <a:latin typeface="Arial" pitchFamily="34" charset="0"/>
+                <a:ea typeface="Arial" pitchFamily="34" charset="-122"/>
+                <a:cs typeface="Arial" pitchFamily="34" charset="-120"/>
+              </a:rPr>
+              <a:t> added at each element is the new quality that earth carries all five of. So earth — solid stuff — is the one you can perceive in </a:t>
+            </a:r>
+            <a:pPr algn="l" indent="0" marL="0">
+              <a:lnSpc>
+                <a:spcPts val="1620"/>
+              </a:lnSpc>
+              <a:spcAft>
+                <a:spcPts val="300"/>
+              </a:spcAft>
+              <a:buNone/>
+            </a:pPr>
+            <a:r>
+              <a:rPr lang="en-US" sz="1200" i="1" dirty="0">
+                <a:solidFill>
+                  <a:srgbClr val="1C2833"/>
+                </a:solidFill>
+                <a:latin typeface="Arial" pitchFamily="34" charset="0"/>
+                <a:ea typeface="Arial" pitchFamily="34" charset="-122"/>
+                <a:cs typeface="Arial" pitchFamily="34" charset="-120"/>
+              </a:rPr>
+              <a:t>every</a:t>
+            </a:r>
+            <a:pPr algn="l" indent="0" marL="0">
+              <a:lnSpc>
+                <a:spcPts val="1620"/>
+              </a:lnSpc>
+              <a:spcAft>
+                <a:spcPts val="300"/>
+              </a:spcAft>
+              <a:buNone/>
+            </a:pPr>
+            <a:r>
+              <a:rPr lang="en-US" sz="1200" dirty="0">
+                <a:solidFill>
+                  <a:srgbClr val="1C2833"/>
+                </a:solidFill>
+                <a:latin typeface="Arial" pitchFamily="34" charset="0"/>
+                <a:ea typeface="Arial" pitchFamily="34" charset="-122"/>
+                <a:cs typeface="Arial" pitchFamily="34" charset="-120"/>
+              </a:rPr>
+              <a:t> way.</a:t>
+            </a:r>
+            <a:endParaRPr lang="en-US" sz="1200" dirty="0"/>
+          </a:p>
+        </p:txBody>
+      </p:sp>
+      <p:sp>
+        <p:nvSpPr>
+          <p:cNvPr id="5" name="Text 3"/>
           <p:cNvSpPr/>
           <p:nvPr/>
         </p:nvSpPr>
         <p:spPr>
           <a:xfrm>
-            <a:off x="692051" y="1343174"/>
-            <a:ext cx="7973389" cy="692944"/>
+            <a:off x="634901" y="1472654"/>
+            <a:ext cx="8102798" cy="281880"/>
           </a:xfrm>
           <a:prstGeom prst="rect">
             <a:avLst/>
@@ -7217,638 +9382,54 @@
           <a:bodyPr wrap="square" lIns="0" tIns="0" rIns="0" bIns="0" rtlCol="0" anchor="t"/>
           <a:lstStyle/>
           <a:p>
-            <a:pPr algn="l" indent="0" marL="0">
-              <a:lnSpc>
-                <a:spcPts val="1820"/>
-              </a:lnSpc>
-              <a:spcBef>
-                <a:spcPts val="300"/>
-              </a:spcBef>
-              <a:spcAft>
-                <a:spcPts val="300"/>
-              </a:spcAft>
-              <a:buNone/>
-            </a:pPr>
-            <a:r>
-              <a:rPr lang="en-US" sz="1300" dirty="0">
-                <a:solidFill>
-                  <a:srgbClr val="1C2833"/>
-                </a:solidFill>
-                <a:latin typeface="Georgia" pitchFamily="34" charset="0"/>
-                <a:ea typeface="Georgia" pitchFamily="34" charset="-122"/>
-                <a:cs typeface="Georgia" pitchFamily="34" charset="-120"/>
-              </a:rPr>
-              <a:t>| Element | Quality (</a:t>
-            </a:r>
-            <a:pPr algn="l" indent="0" marL="0">
-              <a:lnSpc>
-                <a:spcPts val="1820"/>
-              </a:lnSpc>
-              <a:spcBef>
-                <a:spcPts val="300"/>
-              </a:spcBef>
-              <a:spcAft>
-                <a:spcPts val="300"/>
-              </a:spcAft>
-              <a:buNone/>
-            </a:pPr>
-            <a:r>
-              <a:rPr lang="en-US" sz="1300" i="1" dirty="0">
-                <a:solidFill>
-                  <a:srgbClr val="1C2833"/>
-                </a:solidFill>
-                <a:latin typeface="Georgia" pitchFamily="34" charset="0"/>
-                <a:ea typeface="Georgia" pitchFamily="34" charset="-122"/>
-                <a:cs typeface="Georgia" pitchFamily="34" charset="-120"/>
-              </a:rPr>
-              <a:t>tanmātra</a:t>
-            </a:r>
-            <a:pPr algn="l" indent="0" marL="0">
-              <a:lnSpc>
-                <a:spcPts val="1820"/>
-              </a:lnSpc>
-              <a:spcBef>
-                <a:spcPts val="300"/>
-              </a:spcBef>
-              <a:spcAft>
-                <a:spcPts val="300"/>
-              </a:spcAft>
-              <a:buNone/>
-            </a:pPr>
-            <a:r>
-              <a:rPr lang="en-US" sz="1300" dirty="0">
-                <a:solidFill>
-                  <a:srgbClr val="1C2833"/>
-                </a:solidFill>
-                <a:latin typeface="Georgia" pitchFamily="34" charset="0"/>
-                <a:ea typeface="Georgia" pitchFamily="34" charset="-122"/>
-                <a:cs typeface="Georgia" pitchFamily="34" charset="-120"/>
-              </a:rPr>
-              <a:t>) | Perceived by | |---|---|---| | </a:t>
-            </a:r>
-            <a:pPr algn="l" indent="0" marL="0">
-              <a:lnSpc>
-                <a:spcPts val="1820"/>
-              </a:lnSpc>
-              <a:spcBef>
-                <a:spcPts val="300"/>
-              </a:spcBef>
-              <a:spcAft>
-                <a:spcPts val="300"/>
-              </a:spcAft>
-              <a:buNone/>
-            </a:pPr>
-            <a:r>
-              <a:rPr lang="en-US" sz="1300" i="1" dirty="0">
-                <a:solidFill>
-                  <a:srgbClr val="1C2833"/>
-                </a:solidFill>
-                <a:latin typeface="Georgia" pitchFamily="34" charset="0"/>
-                <a:ea typeface="Georgia" pitchFamily="34" charset="-122"/>
-                <a:cs typeface="Georgia" pitchFamily="34" charset="-120"/>
-              </a:rPr>
-              <a:t>ākāśa</a:t>
-            </a:r>
-            <a:pPr algn="l" indent="0" marL="0">
-              <a:lnSpc>
-                <a:spcPts val="1820"/>
-              </a:lnSpc>
-              <a:spcBef>
-                <a:spcPts val="300"/>
-              </a:spcBef>
-              <a:spcAft>
-                <a:spcPts val="300"/>
-              </a:spcAft>
-              <a:buNone/>
-            </a:pPr>
-            <a:r>
-              <a:rPr lang="en-US" sz="1300" dirty="0">
-                <a:solidFill>
-                  <a:srgbClr val="1C2833"/>
-                </a:solidFill>
-                <a:latin typeface="Georgia" pitchFamily="34" charset="0"/>
-                <a:ea typeface="Georgia" pitchFamily="34" charset="-122"/>
-                <a:cs typeface="Georgia" pitchFamily="34" charset="-120"/>
-              </a:rPr>
-              <a:t> (space) | </a:t>
-            </a:r>
-            <a:pPr algn="l" indent="0" marL="0">
-              <a:lnSpc>
-                <a:spcPts val="1820"/>
-              </a:lnSpc>
-              <a:spcBef>
-                <a:spcPts val="300"/>
-              </a:spcBef>
-              <a:spcAft>
-                <a:spcPts val="300"/>
-              </a:spcAft>
-              <a:buNone/>
-            </a:pPr>
-            <a:r>
-              <a:rPr lang="en-US" sz="1300" i="1" dirty="0">
-                <a:solidFill>
-                  <a:srgbClr val="1C2833"/>
-                </a:solidFill>
-                <a:latin typeface="Georgia" pitchFamily="34" charset="0"/>
-                <a:ea typeface="Georgia" pitchFamily="34" charset="-122"/>
-                <a:cs typeface="Georgia" pitchFamily="34" charset="-120"/>
-              </a:rPr>
-              <a:t>śabda</a:t>
-            </a:r>
-            <a:pPr algn="l" indent="0" marL="0">
-              <a:lnSpc>
-                <a:spcPts val="1820"/>
-              </a:lnSpc>
-              <a:spcBef>
-                <a:spcPts val="300"/>
-              </a:spcBef>
-              <a:spcAft>
-                <a:spcPts val="300"/>
-              </a:spcAft>
-              <a:buNone/>
-            </a:pPr>
-            <a:r>
-              <a:rPr lang="en-US" sz="1300" dirty="0">
-                <a:solidFill>
-                  <a:srgbClr val="1C2833"/>
-                </a:solidFill>
-                <a:latin typeface="Georgia" pitchFamily="34" charset="0"/>
-                <a:ea typeface="Georgia" pitchFamily="34" charset="-122"/>
-                <a:cs typeface="Georgia" pitchFamily="34" charset="-120"/>
-              </a:rPr>
-              <a:t> (sound) | ear | | </a:t>
-            </a:r>
-            <a:pPr algn="l" indent="0" marL="0">
-              <a:lnSpc>
-                <a:spcPts val="1820"/>
-              </a:lnSpc>
-              <a:spcBef>
-                <a:spcPts val="300"/>
-              </a:spcBef>
-              <a:spcAft>
-                <a:spcPts val="300"/>
-              </a:spcAft>
-              <a:buNone/>
-            </a:pPr>
-            <a:r>
-              <a:rPr lang="en-US" sz="1300" i="1" dirty="0">
-                <a:solidFill>
-                  <a:srgbClr val="1C2833"/>
-                </a:solidFill>
-                <a:latin typeface="Georgia" pitchFamily="34" charset="0"/>
-                <a:ea typeface="Georgia" pitchFamily="34" charset="-122"/>
-                <a:cs typeface="Georgia" pitchFamily="34" charset="-120"/>
-              </a:rPr>
-              <a:t>vāyu</a:t>
-            </a:r>
-            <a:pPr algn="l" indent="0" marL="0">
-              <a:lnSpc>
-                <a:spcPts val="1820"/>
-              </a:lnSpc>
-              <a:spcBef>
-                <a:spcPts val="300"/>
-              </a:spcBef>
-              <a:spcAft>
-                <a:spcPts val="300"/>
-              </a:spcAft>
-              <a:buNone/>
-            </a:pPr>
-            <a:r>
-              <a:rPr lang="en-US" sz="1300" dirty="0">
-                <a:solidFill>
-                  <a:srgbClr val="1C2833"/>
-                </a:solidFill>
-                <a:latin typeface="Georgia" pitchFamily="34" charset="0"/>
-                <a:ea typeface="Georgia" pitchFamily="34" charset="-122"/>
-                <a:cs typeface="Georgia" pitchFamily="34" charset="-120"/>
-              </a:rPr>
-              <a:t> (air) | </a:t>
-            </a:r>
-            <a:pPr algn="l" indent="0" marL="0">
-              <a:lnSpc>
-                <a:spcPts val="1820"/>
-              </a:lnSpc>
-              <a:spcBef>
-                <a:spcPts val="300"/>
-              </a:spcBef>
-              <a:spcAft>
-                <a:spcPts val="300"/>
-              </a:spcAft>
-              <a:buNone/>
-            </a:pPr>
-            <a:r>
-              <a:rPr lang="en-US" sz="1300" i="1" dirty="0">
-                <a:solidFill>
-                  <a:srgbClr val="1C2833"/>
-                </a:solidFill>
-                <a:latin typeface="Georgia" pitchFamily="34" charset="0"/>
-                <a:ea typeface="Georgia" pitchFamily="34" charset="-122"/>
-                <a:cs typeface="Georgia" pitchFamily="34" charset="-120"/>
-              </a:rPr>
-              <a:t>sparśa</a:t>
-            </a:r>
-            <a:pPr algn="l" indent="0" marL="0">
-              <a:lnSpc>
-                <a:spcPts val="1820"/>
-              </a:lnSpc>
-              <a:spcBef>
-                <a:spcPts val="300"/>
-              </a:spcBef>
-              <a:spcAft>
-                <a:spcPts val="300"/>
-              </a:spcAft>
-              <a:buNone/>
-            </a:pPr>
-            <a:r>
-              <a:rPr lang="en-US" sz="1300" dirty="0">
-                <a:solidFill>
-                  <a:srgbClr val="1C2833"/>
-                </a:solidFill>
-                <a:latin typeface="Georgia" pitchFamily="34" charset="0"/>
-                <a:ea typeface="Georgia" pitchFamily="34" charset="-122"/>
-                <a:cs typeface="Georgia" pitchFamily="34" charset="-120"/>
-              </a:rPr>
-              <a:t> (touch) | skin | | </a:t>
-            </a:r>
-            <a:pPr algn="l" indent="0" marL="0">
-              <a:lnSpc>
-                <a:spcPts val="1820"/>
-              </a:lnSpc>
-              <a:spcBef>
-                <a:spcPts val="300"/>
-              </a:spcBef>
-              <a:spcAft>
-                <a:spcPts val="300"/>
-              </a:spcAft>
-              <a:buNone/>
-            </a:pPr>
-            <a:r>
-              <a:rPr lang="en-US" sz="1300" i="1" dirty="0">
-                <a:solidFill>
-                  <a:srgbClr val="1C2833"/>
-                </a:solidFill>
-                <a:latin typeface="Georgia" pitchFamily="34" charset="0"/>
-                <a:ea typeface="Georgia" pitchFamily="34" charset="-122"/>
-                <a:cs typeface="Georgia" pitchFamily="34" charset="-120"/>
-              </a:rPr>
-              <a:t>tejas</a:t>
-            </a:r>
-            <a:pPr algn="l" indent="0" marL="0">
-              <a:lnSpc>
-                <a:spcPts val="1820"/>
-              </a:lnSpc>
-              <a:spcBef>
-                <a:spcPts val="300"/>
-              </a:spcBef>
-              <a:spcAft>
-                <a:spcPts val="300"/>
-              </a:spcAft>
-              <a:buNone/>
-            </a:pPr>
-            <a:r>
-              <a:rPr lang="en-US" sz="1300" dirty="0">
-                <a:solidFill>
-                  <a:srgbClr val="1C2833"/>
-                </a:solidFill>
-                <a:latin typeface="Georgia" pitchFamily="34" charset="0"/>
-                <a:ea typeface="Georgia" pitchFamily="34" charset="-122"/>
-                <a:cs typeface="Georgia" pitchFamily="34" charset="-120"/>
-              </a:rPr>
-              <a:t> (fire) | </a:t>
-            </a:r>
-            <a:pPr algn="l" indent="0" marL="0">
-              <a:lnSpc>
-                <a:spcPts val="1820"/>
-              </a:lnSpc>
-              <a:spcBef>
-                <a:spcPts val="300"/>
-              </a:spcBef>
-              <a:spcAft>
-                <a:spcPts val="300"/>
-              </a:spcAft>
-              <a:buNone/>
-            </a:pPr>
-            <a:r>
-              <a:rPr lang="en-US" sz="1300" i="1" dirty="0">
-                <a:solidFill>
-                  <a:srgbClr val="1C2833"/>
-                </a:solidFill>
-                <a:latin typeface="Georgia" pitchFamily="34" charset="0"/>
-                <a:ea typeface="Georgia" pitchFamily="34" charset="-122"/>
-                <a:cs typeface="Georgia" pitchFamily="34" charset="-120"/>
-              </a:rPr>
-              <a:t>rūpa</a:t>
-            </a:r>
-            <a:pPr algn="l" indent="0" marL="0">
-              <a:lnSpc>
-                <a:spcPts val="1820"/>
-              </a:lnSpc>
-              <a:spcBef>
-                <a:spcPts val="300"/>
-              </a:spcBef>
-              <a:spcAft>
-                <a:spcPts val="300"/>
-              </a:spcAft>
-              <a:buNone/>
-            </a:pPr>
-            <a:r>
-              <a:rPr lang="en-US" sz="1300" dirty="0">
-                <a:solidFill>
-                  <a:srgbClr val="1C2833"/>
-                </a:solidFill>
-                <a:latin typeface="Georgia" pitchFamily="34" charset="0"/>
-                <a:ea typeface="Georgia" pitchFamily="34" charset="-122"/>
-                <a:cs typeface="Georgia" pitchFamily="34" charset="-120"/>
-              </a:rPr>
-              <a:t> (form, colour) | eye | | </a:t>
-            </a:r>
-            <a:pPr algn="l" indent="0" marL="0">
-              <a:lnSpc>
-                <a:spcPts val="1820"/>
-              </a:lnSpc>
-              <a:spcBef>
-                <a:spcPts val="300"/>
-              </a:spcBef>
-              <a:spcAft>
-                <a:spcPts val="300"/>
-              </a:spcAft>
-              <a:buNone/>
-            </a:pPr>
-            <a:r>
-              <a:rPr lang="en-US" sz="1300" i="1" dirty="0">
-                <a:solidFill>
-                  <a:srgbClr val="1C2833"/>
-                </a:solidFill>
-                <a:latin typeface="Georgia" pitchFamily="34" charset="0"/>
-                <a:ea typeface="Georgia" pitchFamily="34" charset="-122"/>
-                <a:cs typeface="Georgia" pitchFamily="34" charset="-120"/>
-              </a:rPr>
-              <a:t>ap</a:t>
-            </a:r>
-            <a:pPr algn="l" indent="0" marL="0">
-              <a:lnSpc>
-                <a:spcPts val="1820"/>
-              </a:lnSpc>
-              <a:spcBef>
-                <a:spcPts val="300"/>
-              </a:spcBef>
-              <a:spcAft>
-                <a:spcPts val="300"/>
-              </a:spcAft>
-              <a:buNone/>
-            </a:pPr>
-            <a:r>
-              <a:rPr lang="en-US" sz="1300" dirty="0">
-                <a:solidFill>
-                  <a:srgbClr val="1C2833"/>
-                </a:solidFill>
-                <a:latin typeface="Georgia" pitchFamily="34" charset="0"/>
-                <a:ea typeface="Georgia" pitchFamily="34" charset="-122"/>
-                <a:cs typeface="Georgia" pitchFamily="34" charset="-120"/>
-              </a:rPr>
-              <a:t> (water) | </a:t>
-            </a:r>
-            <a:pPr algn="l" indent="0" marL="0">
-              <a:lnSpc>
-                <a:spcPts val="1820"/>
-              </a:lnSpc>
-              <a:spcBef>
-                <a:spcPts val="300"/>
-              </a:spcBef>
-              <a:spcAft>
-                <a:spcPts val="300"/>
-              </a:spcAft>
-              <a:buNone/>
-            </a:pPr>
-            <a:r>
-              <a:rPr lang="en-US" sz="1300" i="1" dirty="0">
-                <a:solidFill>
-                  <a:srgbClr val="1C2833"/>
-                </a:solidFill>
-                <a:latin typeface="Georgia" pitchFamily="34" charset="0"/>
-                <a:ea typeface="Georgia" pitchFamily="34" charset="-122"/>
-                <a:cs typeface="Georgia" pitchFamily="34" charset="-120"/>
-              </a:rPr>
-              <a:t>rasa</a:t>
-            </a:r>
-            <a:pPr algn="l" indent="0" marL="0">
-              <a:lnSpc>
-                <a:spcPts val="1820"/>
-              </a:lnSpc>
-              <a:spcBef>
-                <a:spcPts val="300"/>
-              </a:spcBef>
-              <a:spcAft>
-                <a:spcPts val="300"/>
-              </a:spcAft>
-              <a:buNone/>
-            </a:pPr>
-            <a:r>
-              <a:rPr lang="en-US" sz="1300" dirty="0">
-                <a:solidFill>
-                  <a:srgbClr val="1C2833"/>
-                </a:solidFill>
-                <a:latin typeface="Georgia" pitchFamily="34" charset="0"/>
-                <a:ea typeface="Georgia" pitchFamily="34" charset="-122"/>
-                <a:cs typeface="Georgia" pitchFamily="34" charset="-120"/>
-              </a:rPr>
-              <a:t> (taste) | tongue | | </a:t>
-            </a:r>
-            <a:pPr algn="l" indent="0" marL="0">
-              <a:lnSpc>
-                <a:spcPts val="1820"/>
-              </a:lnSpc>
-              <a:spcBef>
-                <a:spcPts val="300"/>
-              </a:spcBef>
-              <a:spcAft>
-                <a:spcPts val="300"/>
-              </a:spcAft>
-              <a:buNone/>
-            </a:pPr>
-            <a:r>
-              <a:rPr lang="en-US" sz="1300" i="1" dirty="0">
-                <a:solidFill>
-                  <a:srgbClr val="1C2833"/>
-                </a:solidFill>
-                <a:latin typeface="Georgia" pitchFamily="34" charset="0"/>
-                <a:ea typeface="Georgia" pitchFamily="34" charset="-122"/>
-                <a:cs typeface="Georgia" pitchFamily="34" charset="-120"/>
-              </a:rPr>
-              <a:t>pṛthvī</a:t>
-            </a:r>
-            <a:pPr algn="l" indent="0" marL="0">
-              <a:lnSpc>
-                <a:spcPts val="1820"/>
-              </a:lnSpc>
-              <a:spcBef>
-                <a:spcPts val="300"/>
-              </a:spcBef>
-              <a:spcAft>
-                <a:spcPts val="300"/>
-              </a:spcAft>
-              <a:buNone/>
-            </a:pPr>
-            <a:r>
-              <a:rPr lang="en-US" sz="1300" dirty="0">
-                <a:solidFill>
-                  <a:srgbClr val="1C2833"/>
-                </a:solidFill>
-                <a:latin typeface="Georgia" pitchFamily="34" charset="0"/>
-                <a:ea typeface="Georgia" pitchFamily="34" charset="-122"/>
-                <a:cs typeface="Georgia" pitchFamily="34" charset="-120"/>
-              </a:rPr>
-              <a:t> (earth) | </a:t>
-            </a:r>
-            <a:pPr algn="l" indent="0" marL="0">
-              <a:lnSpc>
-                <a:spcPts val="1820"/>
-              </a:lnSpc>
-              <a:spcBef>
-                <a:spcPts val="300"/>
-              </a:spcBef>
-              <a:spcAft>
-                <a:spcPts val="300"/>
-              </a:spcAft>
-              <a:buNone/>
-            </a:pPr>
-            <a:r>
-              <a:rPr lang="en-US" sz="1300" i="1" dirty="0">
-                <a:solidFill>
-                  <a:srgbClr val="1C2833"/>
-                </a:solidFill>
-                <a:latin typeface="Georgia" pitchFamily="34" charset="0"/>
-                <a:ea typeface="Georgia" pitchFamily="34" charset="-122"/>
-                <a:cs typeface="Georgia" pitchFamily="34" charset="-120"/>
-              </a:rPr>
-              <a:t>gandha</a:t>
-            </a:r>
-            <a:pPr algn="l" indent="0" marL="0">
-              <a:lnSpc>
-                <a:spcPts val="1820"/>
-              </a:lnSpc>
-              <a:spcBef>
-                <a:spcPts val="300"/>
-              </a:spcBef>
-              <a:spcAft>
-                <a:spcPts val="300"/>
-              </a:spcAft>
-              <a:buNone/>
-            </a:pPr>
-            <a:r>
-              <a:rPr lang="en-US" sz="1300" dirty="0">
-                <a:solidFill>
-                  <a:srgbClr val="1C2833"/>
-                </a:solidFill>
-                <a:latin typeface="Georgia" pitchFamily="34" charset="0"/>
-                <a:ea typeface="Georgia" pitchFamily="34" charset="-122"/>
-                <a:cs typeface="Georgia" pitchFamily="34" charset="-120"/>
-              </a:rPr>
-              <a:t> (smell) | nose |</a:t>
-            </a:r>
-            <a:endParaRPr lang="en-US" sz="1300" dirty="0"/>
-          </a:p>
-        </p:txBody>
-      </p:sp>
-      <p:sp>
-        <p:nvSpPr>
-          <p:cNvPr id="8" name="Text 6"/>
-          <p:cNvSpPr/>
-          <p:nvPr/>
-        </p:nvSpPr>
-        <p:spPr>
-          <a:xfrm>
-            <a:off x="692051" y="2074218"/>
-            <a:ext cx="7973389" cy="461963"/>
-          </a:xfrm>
-          <a:prstGeom prst="rect">
-            <a:avLst/>
-          </a:prstGeom>
-          <a:noFill/>
-          <a:ln/>
-        </p:spPr>
-        <p:txBody>
-          <a:bodyPr wrap="square" lIns="0" tIns="0" rIns="0" bIns="0" rtlCol="0" anchor="t"/>
-          <a:lstStyle/>
-          <a:p>
-            <a:pPr algn="l" indent="0" marL="0">
-              <a:lnSpc>
-                <a:spcPts val="1820"/>
-              </a:lnSpc>
-              <a:spcBef>
-                <a:spcPts val="300"/>
-              </a:spcBef>
-              <a:spcAft>
-                <a:spcPts val="300"/>
-              </a:spcAft>
-              <a:buNone/>
-            </a:pPr>
-            <a:r>
-              <a:rPr lang="en-US" sz="1300" i="1" dirty="0">
-                <a:solidFill>
-                  <a:srgbClr val="1C2833"/>
-                </a:solidFill>
-                <a:latin typeface="Georgia" pitchFamily="34" charset="0"/>
-                <a:ea typeface="Georgia" pitchFamily="34" charset="-122"/>
-                <a:cs typeface="Georgia" pitchFamily="34" charset="-120"/>
-              </a:rPr>
-              <a:t>Earth has all five qualities. That's why you can hear soil shift, feel its texture, see its colour, taste its mineral content (you've all chewed sand in childhood — admit it), and smell it after rain.</a:t>
-            </a:r>
-            <a:endParaRPr lang="en-US" sz="1300" dirty="0"/>
-          </a:p>
-        </p:txBody>
-      </p:sp>
-      <p:sp>
-        <p:nvSpPr>
-          <p:cNvPr id="9" name="Text 7"/>
-          <p:cNvSpPr/>
-          <p:nvPr/>
-        </p:nvSpPr>
-        <p:spPr>
-          <a:xfrm>
-            <a:off x="692051" y="2574280"/>
-            <a:ext cx="7973389" cy="461963"/>
-          </a:xfrm>
-          <a:prstGeom prst="rect">
-            <a:avLst/>
-          </a:prstGeom>
-          <a:noFill/>
-          <a:ln/>
-        </p:spPr>
-        <p:txBody>
-          <a:bodyPr wrap="square" lIns="0" tIns="0" rIns="0" bIns="0" rtlCol="0" anchor="t"/>
-          <a:lstStyle/>
-          <a:p>
-            <a:pPr algn="l" indent="0" marL="0">
-              <a:lnSpc>
-                <a:spcPts val="1820"/>
-              </a:lnSpc>
-              <a:spcBef>
-                <a:spcPts val="300"/>
-              </a:spcBef>
-              <a:spcAft>
-                <a:spcPts val="300"/>
-              </a:spcAft>
-              <a:buNone/>
-            </a:pPr>
-            <a:r>
-              <a:rPr lang="en-US" sz="1300" i="1" dirty="0">
-                <a:solidFill>
-                  <a:srgbClr val="1C2833"/>
-                </a:solidFill>
-                <a:latin typeface="Georgia" pitchFamily="34" charset="0"/>
-                <a:ea typeface="Georgia" pitchFamily="34" charset="-122"/>
-                <a:cs typeface="Georgia" pitchFamily="34" charset="-120"/>
-              </a:rPr>
-              <a:t>&gt; "Softness, hardness, cold and heat are the qualities of touch, the subtle attribute of air." &gt; — Śrīmad-Bhāgavatam 3.26.36</a:t>
-            </a:r>
-            <a:endParaRPr lang="en-US" sz="1300" dirty="0"/>
-          </a:p>
-        </p:txBody>
-      </p:sp>
-      <p:sp>
-        <p:nvSpPr>
-          <p:cNvPr id="10" name="Text 8"/>
+            <a:pPr algn="l" marL="342900" indent="-342900">
+              <a:lnSpc>
+                <a:spcPts val="1620"/>
+              </a:lnSpc>
+              <a:spcAft>
+                <a:spcPts val="300"/>
+              </a:spcAft>
+              <a:buSzPct val="100000"/>
+              <a:buChar char="•"/>
+            </a:pPr>
+            <a:r>
+              <a:rPr lang="en-US" sz="1200" b="1" dirty="0">
+                <a:solidFill>
+                  <a:srgbClr val="1C2833"/>
+                </a:solidFill>
+                <a:latin typeface="Arial" pitchFamily="34" charset="0"/>
+                <a:ea typeface="Arial" pitchFamily="34" charset="-122"/>
+                <a:cs typeface="Arial" pitchFamily="34" charset="-120"/>
+              </a:rPr>
+              <a:t>Source check.</a:t>
+            </a:r>
+            <a:pPr algn="l" indent="0" marL="0">
+              <a:lnSpc>
+                <a:spcPts val="1620"/>
+              </a:lnSpc>
+              <a:spcAft>
+                <a:spcPts val="300"/>
+              </a:spcAft>
+              <a:buNone/>
+            </a:pPr>
+            <a:r>
+              <a:rPr lang="en-US" sz="1200" dirty="0">
+                <a:solidFill>
+                  <a:srgbClr val="1C2833"/>
+                </a:solidFill>
+                <a:latin typeface="Arial" pitchFamily="34" charset="0"/>
+                <a:ea typeface="Arial" pitchFamily="34" charset="-122"/>
+                <a:cs typeface="Arial" pitchFamily="34" charset="-120"/>
+              </a:rPr>
+              <a:t> Read (don't memorise):</a:t>
+            </a:r>
+            <a:endParaRPr lang="en-US" sz="1200" dirty="0"/>
+          </a:p>
+        </p:txBody>
+      </p:sp>
+      <p:sp>
+        <p:nvSpPr>
+          <p:cNvPr id="6" name="Text 4"/>
           <p:cNvSpPr/>
           <p:nvPr/>
         </p:nvSpPr>
